--- a/slides/Module-06-RegTech-Basel-Compliance.pptx
+++ b/slides/Module-06-RegTech-Basel-Compliance.pptx
@@ -10,6 +10,10 @@
     <p:sldId id="258" r:id="rId9"/>
     <p:sldId id="259" r:id="rId10"/>
     <p:sldId id="260" r:id="rId11"/>
+    <p:sldId id="261" r:id="rId12"/>
+    <p:sldId id="262" r:id="rId13"/>
+    <p:sldId id="263" r:id="rId14"/>
+    <p:sldId id="264" r:id="rId15"/>
   </p:sldIdLst>
   <p:sldSz cx="12191695" cy="6858000" type="screen4x3"/>
   <p:notesSz cx="6858000" cy="9144000"/>
@@ -5758,7 +5762,7 @@
                   <a:srgbClr val="C9A227"/>
                 </a:solidFill>
               </a:rPr>
-              <a:t>HOUR 2 · AML, KYC AND THE REPORT NOBODY WANTS TO WRITE</a:t>
+              <a:t>HOUR 1 · THE TWO RETURNS EVERY EUROPEAN BANK FILES</a:t>
             </a:r>
           </a:p>
         </p:txBody>
@@ -5793,7 +5797,7 @@
                 </a:solidFill>
                 <a:latin typeface="Georgia"/>
               </a:rPr>
-              <a:t>Where the machine helps, and where a human still signs</a:t>
+              <a:t>COREP counts the capital. FINREP reports the accounts.</a:t>
             </a:r>
           </a:p>
         </p:txBody>
@@ -5806,8 +5810,8 @@
         </p:nvSpPr>
         <p:spPr>
           <a:xfrm>
-            <a:off x="548640" y="1417320"/>
-            <a:ext cx="3611880" cy="3840480"/>
+            <a:off x="548640" y="1481328"/>
+            <a:ext cx="5422392" cy="3566160"/>
           </a:xfrm>
           <a:prstGeom prst="rect">
             <a:avLst/>
@@ -5844,14 +5848,58 @@
       </p:sp>
       <p:sp>
         <p:nvSpPr>
-          <p:cNvPr id="6" name="TextBox 5"/>
-          <p:cNvSpPr txBox="1"/>
-          <p:nvPr/>
-        </p:nvSpPr>
-        <p:spPr>
-          <a:xfrm>
-            <a:off x="786384" y="1600200"/>
-            <a:ext cx="3108960" cy="274320"/>
+          <p:cNvPr id="6" name="Rectangle 5"/>
+          <p:cNvSpPr/>
+          <p:nvPr/>
+        </p:nvSpPr>
+        <p:spPr>
+          <a:xfrm>
+            <a:off x="548640" y="1481328"/>
+            <a:ext cx="5422392" cy="54864"/>
+          </a:xfrm>
+          <a:prstGeom prst="rect">
+            <a:avLst/>
+          </a:prstGeom>
+          <a:solidFill>
+            <a:srgbClr val="C9A227"/>
+          </a:solidFill>
+          <a:ln>
+            <a:noFill/>
+          </a:ln>
+          <a:effectLst/>
+        </p:spPr>
+        <p:style>
+          <a:lnRef idx="1">
+            <a:schemeClr val="accent1"/>
+          </a:lnRef>
+          <a:fillRef idx="3">
+            <a:schemeClr val="accent1"/>
+          </a:fillRef>
+          <a:effectRef idx="2">
+            <a:schemeClr val="accent1"/>
+          </a:effectRef>
+          <a:fontRef idx="minor">
+            <a:schemeClr val="lt1"/>
+          </a:fontRef>
+        </p:style>
+        <p:txBody>
+          <a:bodyPr rtlCol="0" anchor="ctr"/>
+          <a:lstStyle/>
+          <a:p>
+            <a:pPr algn="ctr"/>
+          </a:p>
+        </p:txBody>
+      </p:sp>
+      <p:sp>
+        <p:nvSpPr>
+          <p:cNvPr id="7" name="TextBox 6"/>
+          <p:cNvSpPr txBox="1"/>
+          <p:nvPr/>
+        </p:nvSpPr>
+        <p:spPr>
+          <a:xfrm>
+            <a:off x="822959" y="1737360"/>
+            <a:ext cx="4846320" cy="274320"/>
           </a:xfrm>
           <a:prstGeom prst="rect">
             <a:avLst/>
@@ -5871,56 +5919,56 @@
                   <a:srgbClr val="3A5C9E"/>
                 </a:solidFill>
               </a:rPr>
-              <a:t>TRANSACTION MONITORING</a:t>
-            </a:r>
-          </a:p>
-        </p:txBody>
-      </p:sp>
-      <p:sp>
-        <p:nvSpPr>
-          <p:cNvPr id="7" name="TextBox 6"/>
-          <p:cNvSpPr txBox="1"/>
-          <p:nvPr/>
-        </p:nvSpPr>
-        <p:spPr>
-          <a:xfrm>
-            <a:off x="786384" y="1892808"/>
-            <a:ext cx="3108960" cy="365760"/>
-          </a:xfrm>
-          <a:prstGeom prst="rect">
-            <a:avLst/>
-          </a:prstGeom>
-          <a:noFill/>
-        </p:spPr>
-        <p:txBody>
-          <a:bodyPr wrap="square" anchor="t" lIns="0" rIns="0" tIns="0" bIns="0">
-            <a:spAutoFit/>
-          </a:bodyPr>
-          <a:lstStyle/>
-          <a:p>
-            <a:pPr algn="l"/>
-            <a:r>
-              <a:rPr sz="1500" b="1">
+              <a:t>COREP  ·  COMMON REPORTING</a:t>
+            </a:r>
+          </a:p>
+        </p:txBody>
+      </p:sp>
+      <p:sp>
+        <p:nvSpPr>
+          <p:cNvPr id="8" name="TextBox 7"/>
+          <p:cNvSpPr txBox="1"/>
+          <p:nvPr/>
+        </p:nvSpPr>
+        <p:spPr>
+          <a:xfrm>
+            <a:off x="822959" y="2029968"/>
+            <a:ext cx="4846320" cy="365760"/>
+          </a:xfrm>
+          <a:prstGeom prst="rect">
+            <a:avLst/>
+          </a:prstGeom>
+          <a:noFill/>
+        </p:spPr>
+        <p:txBody>
+          <a:bodyPr wrap="square" anchor="t" lIns="0" rIns="0" tIns="0" bIns="0">
+            <a:spAutoFit/>
+          </a:bodyPr>
+          <a:lstStyle/>
+          <a:p>
+            <a:pPr algn="l"/>
+            <a:r>
+              <a:rPr sz="1700" b="1">
                 <a:solidFill>
                   <a:srgbClr val="0F2145"/>
                 </a:solidFill>
                 <a:latin typeface="Georgia"/>
               </a:rPr>
-              <a:t>Rules fire. ML ranks.</a:t>
-            </a:r>
-          </a:p>
-        </p:txBody>
-      </p:sp>
-      <p:sp>
-        <p:nvSpPr>
-          <p:cNvPr id="8" name="TextBox 7"/>
-          <p:cNvSpPr txBox="1"/>
-          <p:nvPr/>
-        </p:nvSpPr>
-        <p:spPr>
-          <a:xfrm>
-            <a:off x="786384" y="2377440"/>
-            <a:ext cx="3108960" cy="1417320"/>
+              <a:t>The prudential return.</a:t>
+            </a:r>
+          </a:p>
+        </p:txBody>
+      </p:sp>
+      <p:sp>
+        <p:nvSpPr>
+          <p:cNvPr id="9" name="TextBox 8"/>
+          <p:cNvSpPr txBox="1"/>
+          <p:nvPr/>
+        </p:nvSpPr>
+        <p:spPr>
+          <a:xfrm>
+            <a:off x="822959" y="2450592"/>
+            <a:ext cx="4892040" cy="685800"/>
           </a:xfrm>
           <a:prstGeom prst="rect">
             <a:avLst/>
@@ -5940,21 +5988,223 @@
                   <a:srgbClr val="1B2A41"/>
                 </a:solidFill>
               </a:rPr>
-              <a:t>A rule fires on every cash deposit above a threshold. Most of those alerts are innocent. A model trained on past cases ranks the alerts, so the analyst opens the worst one first instead of the first one.</a:t>
-            </a:r>
-          </a:p>
-        </p:txBody>
-      </p:sp>
-      <p:sp>
-        <p:nvSpPr>
-          <p:cNvPr id="9" name="Rectangle 8"/>
+              <a:t>It tells the supervisor whether the bank meets Basel III as written into EU law, the CRR and CRD IV. Every number on slide 2 is a COREP cell.</a:t>
+            </a:r>
+          </a:p>
+        </p:txBody>
+      </p:sp>
+      <p:sp>
+        <p:nvSpPr>
+          <p:cNvPr id="10" name="TextBox 9"/>
+          <p:cNvSpPr txBox="1"/>
+          <p:nvPr/>
+        </p:nvSpPr>
+        <p:spPr>
+          <a:xfrm>
+            <a:off x="822959" y="3154680"/>
+            <a:ext cx="4892040" cy="329184"/>
+          </a:xfrm>
+          <a:prstGeom prst="rect">
+            <a:avLst/>
+          </a:prstGeom>
+          <a:noFill/>
+        </p:spPr>
+        <p:txBody>
+          <a:bodyPr wrap="square" anchor="t" lIns="0" rIns="0" tIns="0" bIns="0">
+            <a:spAutoFit/>
+          </a:bodyPr>
+          <a:lstStyle/>
+          <a:p>
+            <a:pPr algn="l"/>
+            <a:r>
+              <a:rPr sz="1000" b="1">
+                <a:solidFill>
+                  <a:srgbClr val="C9A227"/>
+                </a:solidFill>
+              </a:rPr>
+              <a:t>▪  </a:t>
+            </a:r>
+            <a:r>
+              <a:rPr sz="1000" b="0">
+                <a:solidFill>
+                  <a:srgbClr val="1B2A41"/>
+                </a:solidFill>
+              </a:rPr>
+              <a:t>Own funds: CET1, AT1 and Tier 2, with every deduction</a:t>
+            </a:r>
+          </a:p>
+        </p:txBody>
+      </p:sp>
+      <p:sp>
+        <p:nvSpPr>
+          <p:cNvPr id="11" name="TextBox 10"/>
+          <p:cNvSpPr txBox="1"/>
+          <p:nvPr/>
+        </p:nvSpPr>
+        <p:spPr>
+          <a:xfrm>
+            <a:off x="822959" y="3483864"/>
+            <a:ext cx="4892040" cy="329184"/>
+          </a:xfrm>
+          <a:prstGeom prst="rect">
+            <a:avLst/>
+          </a:prstGeom>
+          <a:noFill/>
+        </p:spPr>
+        <p:txBody>
+          <a:bodyPr wrap="square" anchor="t" lIns="0" rIns="0" tIns="0" bIns="0">
+            <a:spAutoFit/>
+          </a:bodyPr>
+          <a:lstStyle/>
+          <a:p>
+            <a:pPr algn="l"/>
+            <a:r>
+              <a:rPr sz="1000" b="1">
+                <a:solidFill>
+                  <a:srgbClr val="C9A227"/>
+                </a:solidFill>
+              </a:rPr>
+              <a:t>▪  </a:t>
+            </a:r>
+            <a:r>
+              <a:rPr sz="1000" b="0">
+                <a:solidFill>
+                  <a:srgbClr val="1B2A41"/>
+                </a:solidFill>
+              </a:rPr>
+              <a:t>Capital requirement for credit, market and operational risk</a:t>
+            </a:r>
+          </a:p>
+        </p:txBody>
+      </p:sp>
+      <p:sp>
+        <p:nvSpPr>
+          <p:cNvPr id="12" name="TextBox 11"/>
+          <p:cNvSpPr txBox="1"/>
+          <p:nvPr/>
+        </p:nvSpPr>
+        <p:spPr>
+          <a:xfrm>
+            <a:off x="822959" y="3813048"/>
+            <a:ext cx="4892040" cy="329184"/>
+          </a:xfrm>
+          <a:prstGeom prst="rect">
+            <a:avLst/>
+          </a:prstGeom>
+          <a:noFill/>
+        </p:spPr>
+        <p:txBody>
+          <a:bodyPr wrap="square" anchor="t" lIns="0" rIns="0" tIns="0" bIns="0">
+            <a:spAutoFit/>
+          </a:bodyPr>
+          <a:lstStyle/>
+          <a:p>
+            <a:pPr algn="l"/>
+            <a:r>
+              <a:rPr sz="1000" b="1">
+                <a:solidFill>
+                  <a:srgbClr val="C9A227"/>
+                </a:solidFill>
+              </a:rPr>
+              <a:t>▪  </a:t>
+            </a:r>
+            <a:r>
+              <a:rPr sz="1000" b="0">
+                <a:solidFill>
+                  <a:srgbClr val="1B2A41"/>
+                </a:solidFill>
+              </a:rPr>
+              <a:t>Leverage ratio, LCR and NSFR</a:t>
+            </a:r>
+          </a:p>
+        </p:txBody>
+      </p:sp>
+      <p:sp>
+        <p:nvSpPr>
+          <p:cNvPr id="13" name="TextBox 12"/>
+          <p:cNvSpPr txBox="1"/>
+          <p:nvPr/>
+        </p:nvSpPr>
+        <p:spPr>
+          <a:xfrm>
+            <a:off x="822959" y="4142232"/>
+            <a:ext cx="4892040" cy="329184"/>
+          </a:xfrm>
+          <a:prstGeom prst="rect">
+            <a:avLst/>
+          </a:prstGeom>
+          <a:noFill/>
+        </p:spPr>
+        <p:txBody>
+          <a:bodyPr wrap="square" anchor="t" lIns="0" rIns="0" tIns="0" bIns="0">
+            <a:spAutoFit/>
+          </a:bodyPr>
+          <a:lstStyle/>
+          <a:p>
+            <a:pPr algn="l"/>
+            <a:r>
+              <a:rPr sz="1000" b="1">
+                <a:solidFill>
+                  <a:srgbClr val="C9A227"/>
+                </a:solidFill>
+              </a:rPr>
+              <a:t>▪  </a:t>
+            </a:r>
+            <a:r>
+              <a:rPr sz="1000" b="0">
+                <a:solidFill>
+                  <a:srgbClr val="1B2A41"/>
+                </a:solidFill>
+              </a:rPr>
+              <a:t>Large exposures: any client above 10% of capital</a:t>
+            </a:r>
+          </a:p>
+        </p:txBody>
+      </p:sp>
+      <p:sp>
+        <p:nvSpPr>
+          <p:cNvPr id="14" name="TextBox 13"/>
+          <p:cNvSpPr txBox="1"/>
+          <p:nvPr/>
+        </p:nvSpPr>
+        <p:spPr>
+          <a:xfrm>
+            <a:off x="822959" y="4526280"/>
+            <a:ext cx="4892040" cy="457200"/>
+          </a:xfrm>
+          <a:prstGeom prst="rect">
+            <a:avLst/>
+          </a:prstGeom>
+          <a:noFill/>
+        </p:spPr>
+        <p:txBody>
+          <a:bodyPr wrap="square" anchor="t" lIns="0" rIns="0" tIns="0" bIns="0">
+            <a:spAutoFit/>
+          </a:bodyPr>
+          <a:lstStyle/>
+          <a:p>
+            <a:pPr algn="l"/>
+            <a:r>
+              <a:rPr sz="950" b="1">
+                <a:solidFill>
+                  <a:srgbClr val="5D6B7E"/>
+                </a:solidFill>
+              </a:rPr>
+              <a:t>Quarterly. LCR monthly. India's parallel is the set of RBI returns filed through CIMS.</a:t>
+            </a:r>
+          </a:p>
+        </p:txBody>
+      </p:sp>
+      <p:sp>
+        <p:nvSpPr>
+          <p:cNvPr id="15" name="Rectangle 14"/>
           <p:cNvSpPr/>
           <p:nvPr/>
         </p:nvSpPr>
         <p:spPr>
           <a:xfrm>
-            <a:off x="786384" y="3813048"/>
-            <a:ext cx="3136392" cy="914400"/>
+            <a:off x="6217920" y="1481328"/>
+            <a:ext cx="5422392" cy="3566160"/>
           </a:xfrm>
           <a:prstGeom prst="rect">
             <a:avLst/>
@@ -5991,103 +6241,20 @@
       </p:sp>
       <p:sp>
         <p:nvSpPr>
-          <p:cNvPr id="10" name="TextBox 9"/>
-          <p:cNvSpPr txBox="1"/>
-          <p:nvPr/>
-        </p:nvSpPr>
-        <p:spPr>
-          <a:xfrm>
-            <a:off x="950976" y="3904488"/>
-            <a:ext cx="2834640" cy="777240"/>
-          </a:xfrm>
-          <a:prstGeom prst="rect">
-            <a:avLst/>
-          </a:prstGeom>
-          <a:noFill/>
-        </p:spPr>
-        <p:txBody>
-          <a:bodyPr wrap="square" anchor="t" lIns="0" rIns="0" tIns="0" bIns="0">
-            <a:spAutoFit/>
-          </a:bodyPr>
-          <a:lstStyle/>
-          <a:p>
-            <a:pPr algn="l"/>
-            <a:r>
-              <a:rPr sz="800" b="1">
-                <a:solidFill>
-                  <a:srgbClr val="3A5C9E"/>
-                </a:solidFill>
-              </a:rPr>
-              <a:t>EXAMPLE</a:t>
-            </a:r>
-          </a:p>
-          <a:p>
-            <a:pPr algn="l">
-              <a:spcBef>
-                <a:spcPts val="200"/>
-              </a:spcBef>
-            </a:pPr>
-            <a:r>
-              <a:rPr sz="950" b="0">
-                <a:solidFill>
-                  <a:srgbClr val="1B2A41"/>
-                </a:solidFill>
-              </a:rPr>
-              <a:t>10,000 alerts a month. The model puts the 200 that matter at the top of the queue.</a:t>
-            </a:r>
-          </a:p>
-        </p:txBody>
-      </p:sp>
-      <p:sp>
-        <p:nvSpPr>
-          <p:cNvPr id="11" name="TextBox 10"/>
-          <p:cNvSpPr txBox="1"/>
-          <p:nvPr/>
-        </p:nvSpPr>
-        <p:spPr>
-          <a:xfrm>
-            <a:off x="786384" y="4800600"/>
-            <a:ext cx="3108960" cy="411480"/>
-          </a:xfrm>
-          <a:prstGeom prst="rect">
-            <a:avLst/>
-          </a:prstGeom>
-          <a:noFill/>
-        </p:spPr>
-        <p:txBody>
-          <a:bodyPr wrap="square" anchor="t" lIns="0" rIns="0" tIns="0" bIns="0">
-            <a:spAutoFit/>
-          </a:bodyPr>
-          <a:lstStyle/>
-          <a:p>
-            <a:pPr algn="l"/>
-            <a:r>
-              <a:rPr sz="1000" b="1">
-                <a:solidFill>
-                  <a:srgbClr val="5D6B7E"/>
-                </a:solidFill>
-              </a:rPr>
-              <a:t>The rule still fires. The machine only orders the queue.</a:t>
-            </a:r>
-          </a:p>
-        </p:txBody>
-      </p:sp>
-      <p:sp>
-        <p:nvSpPr>
-          <p:cNvPr id="12" name="Rectangle 11"/>
+          <p:cNvPr id="16" name="Rectangle 15"/>
           <p:cNvSpPr/>
           <p:nvPr/>
         </p:nvSpPr>
         <p:spPr>
           <a:xfrm>
-            <a:off x="4315968" y="1417320"/>
-            <a:ext cx="3611880" cy="3840480"/>
+            <a:off x="6217920" y="1481328"/>
+            <a:ext cx="5422392" cy="54864"/>
           </a:xfrm>
           <a:prstGeom prst="rect">
             <a:avLst/>
           </a:prstGeom>
           <a:solidFill>
-            <a:srgbClr val="FFFFFF"/>
+            <a:srgbClr val="C9A227"/>
           </a:solidFill>
           <a:ln>
             <a:noFill/>
@@ -6118,14 +6285,14 @@
       </p:sp>
       <p:sp>
         <p:nvSpPr>
-          <p:cNvPr id="13" name="TextBox 12"/>
-          <p:cNvSpPr txBox="1"/>
-          <p:nvPr/>
-        </p:nvSpPr>
-        <p:spPr>
-          <a:xfrm>
-            <a:off x="4553712" y="1600200"/>
-            <a:ext cx="3108960" cy="274320"/>
+          <p:cNvPr id="17" name="TextBox 16"/>
+          <p:cNvSpPr txBox="1"/>
+          <p:nvPr/>
+        </p:nvSpPr>
+        <p:spPr>
+          <a:xfrm>
+            <a:off x="6492240" y="1737360"/>
+            <a:ext cx="4846320" cy="274320"/>
           </a:xfrm>
           <a:prstGeom prst="rect">
             <a:avLst/>
@@ -6145,56 +6312,56 @@
                   <a:srgbClr val="3A5C9E"/>
                 </a:solidFill>
               </a:rPr>
-              <a:t>KYC DOCUMENT AUTOMATION</a:t>
-            </a:r>
-          </a:p>
-        </p:txBody>
-      </p:sp>
-      <p:sp>
-        <p:nvSpPr>
-          <p:cNvPr id="14" name="TextBox 13"/>
-          <p:cNvSpPr txBox="1"/>
-          <p:nvPr/>
-        </p:nvSpPr>
-        <p:spPr>
-          <a:xfrm>
-            <a:off x="4553712" y="1892808"/>
-            <a:ext cx="3108960" cy="365760"/>
-          </a:xfrm>
-          <a:prstGeom prst="rect">
-            <a:avLst/>
-          </a:prstGeom>
-          <a:noFill/>
-        </p:spPr>
-        <p:txBody>
-          <a:bodyPr wrap="square" anchor="t" lIns="0" rIns="0" tIns="0" bIns="0">
-            <a:spAutoFit/>
-          </a:bodyPr>
-          <a:lstStyle/>
-          <a:p>
-            <a:pPr algn="l"/>
-            <a:r>
-              <a:rPr sz="1500" b="1">
+              <a:t>FINREP  ·  FINANCIAL REPORTING</a:t>
+            </a:r>
+          </a:p>
+        </p:txBody>
+      </p:sp>
+      <p:sp>
+        <p:nvSpPr>
+          <p:cNvPr id="18" name="TextBox 17"/>
+          <p:cNvSpPr txBox="1"/>
+          <p:nvPr/>
+        </p:nvSpPr>
+        <p:spPr>
+          <a:xfrm>
+            <a:off x="6492240" y="2029968"/>
+            <a:ext cx="4846320" cy="365760"/>
+          </a:xfrm>
+          <a:prstGeom prst="rect">
+            <a:avLst/>
+          </a:prstGeom>
+          <a:noFill/>
+        </p:spPr>
+        <p:txBody>
+          <a:bodyPr wrap="square" anchor="t" lIns="0" rIns="0" tIns="0" bIns="0">
+            <a:spAutoFit/>
+          </a:bodyPr>
+          <a:lstStyle/>
+          <a:p>
+            <a:pPr algn="l"/>
+            <a:r>
+              <a:rPr sz="1700" b="1">
                 <a:solidFill>
                   <a:srgbClr val="0F2145"/>
                 </a:solidFill>
                 <a:latin typeface="Georgia"/>
               </a:rPr>
-              <a:t>OCR reads. NLP checks.</a:t>
-            </a:r>
-          </a:p>
-        </p:txBody>
-      </p:sp>
-      <p:sp>
-        <p:nvSpPr>
-          <p:cNvPr id="15" name="TextBox 14"/>
-          <p:cNvSpPr txBox="1"/>
-          <p:nvPr/>
-        </p:nvSpPr>
-        <p:spPr>
-          <a:xfrm>
-            <a:off x="4553712" y="2377440"/>
-            <a:ext cx="3108960" cy="1417320"/>
+              <a:t>The accounting return.</a:t>
+            </a:r>
+          </a:p>
+        </p:txBody>
+      </p:sp>
+      <p:sp>
+        <p:nvSpPr>
+          <p:cNvPr id="19" name="TextBox 18"/>
+          <p:cNvSpPr txBox="1"/>
+          <p:nvPr/>
+        </p:nvSpPr>
+        <p:spPr>
+          <a:xfrm>
+            <a:off x="6492240" y="2450592"/>
+            <a:ext cx="4892040" cy="685800"/>
           </a:xfrm>
           <a:prstGeom prst="rect">
             <a:avLst/>
@@ -6214,27 +6381,229 @@
                   <a:srgbClr val="1B2A41"/>
                 </a:solidFill>
               </a:rPr>
-              <a:t>OCR reads the Aadhaar and PAN. NLP matches the name, date of birth and address against the form. Anything blurred, mismatched or expired goes to a person.</a:t>
-            </a:r>
-          </a:p>
-        </p:txBody>
-      </p:sp>
-      <p:sp>
-        <p:nvSpPr>
-          <p:cNvPr id="16" name="Rectangle 15"/>
+              <a:t>It gives the supervisor the balance sheet and the P&amp;L in one common IFRS format, so two banks in two countries can be compared line by line.</a:t>
+            </a:r>
+          </a:p>
+        </p:txBody>
+      </p:sp>
+      <p:sp>
+        <p:nvSpPr>
+          <p:cNvPr id="20" name="TextBox 19"/>
+          <p:cNvSpPr txBox="1"/>
+          <p:nvPr/>
+        </p:nvSpPr>
+        <p:spPr>
+          <a:xfrm>
+            <a:off x="6492240" y="3154680"/>
+            <a:ext cx="4892040" cy="329184"/>
+          </a:xfrm>
+          <a:prstGeom prst="rect">
+            <a:avLst/>
+          </a:prstGeom>
+          <a:noFill/>
+        </p:spPr>
+        <p:txBody>
+          <a:bodyPr wrap="square" anchor="t" lIns="0" rIns="0" tIns="0" bIns="0">
+            <a:spAutoFit/>
+          </a:bodyPr>
+          <a:lstStyle/>
+          <a:p>
+            <a:pPr algn="l"/>
+            <a:r>
+              <a:rPr sz="1000" b="1">
+                <a:solidFill>
+                  <a:srgbClr val="C9A227"/>
+                </a:solidFill>
+              </a:rPr>
+              <a:t>▪  </a:t>
+            </a:r>
+            <a:r>
+              <a:rPr sz="1000" b="0">
+                <a:solidFill>
+                  <a:srgbClr val="1B2A41"/>
+                </a:solidFill>
+              </a:rPr>
+              <a:t>Balance sheet and profit and loss, IFRS layout</a:t>
+            </a:r>
+          </a:p>
+        </p:txBody>
+      </p:sp>
+      <p:sp>
+        <p:nvSpPr>
+          <p:cNvPr id="21" name="TextBox 20"/>
+          <p:cNvSpPr txBox="1"/>
+          <p:nvPr/>
+        </p:nvSpPr>
+        <p:spPr>
+          <a:xfrm>
+            <a:off x="6492240" y="3483864"/>
+            <a:ext cx="4892040" cy="329184"/>
+          </a:xfrm>
+          <a:prstGeom prst="rect">
+            <a:avLst/>
+          </a:prstGeom>
+          <a:noFill/>
+        </p:spPr>
+        <p:txBody>
+          <a:bodyPr wrap="square" anchor="t" lIns="0" rIns="0" tIns="0" bIns="0">
+            <a:spAutoFit/>
+          </a:bodyPr>
+          <a:lstStyle/>
+          <a:p>
+            <a:pPr algn="l"/>
+            <a:r>
+              <a:rPr sz="1000" b="1">
+                <a:solidFill>
+                  <a:srgbClr val="C9A227"/>
+                </a:solidFill>
+              </a:rPr>
+              <a:t>▪  </a:t>
+            </a:r>
+            <a:r>
+              <a:rPr sz="1000" b="0">
+                <a:solidFill>
+                  <a:srgbClr val="1B2A41"/>
+                </a:solidFill>
+              </a:rPr>
+              <a:t>Loans by counterparty type and by product</a:t>
+            </a:r>
+          </a:p>
+        </p:txBody>
+      </p:sp>
+      <p:sp>
+        <p:nvSpPr>
+          <p:cNvPr id="22" name="TextBox 21"/>
+          <p:cNvSpPr txBox="1"/>
+          <p:nvPr/>
+        </p:nvSpPr>
+        <p:spPr>
+          <a:xfrm>
+            <a:off x="6492240" y="3813048"/>
+            <a:ext cx="4892040" cy="329184"/>
+          </a:xfrm>
+          <a:prstGeom prst="rect">
+            <a:avLst/>
+          </a:prstGeom>
+          <a:noFill/>
+        </p:spPr>
+        <p:txBody>
+          <a:bodyPr wrap="square" anchor="t" lIns="0" rIns="0" tIns="0" bIns="0">
+            <a:spAutoFit/>
+          </a:bodyPr>
+          <a:lstStyle/>
+          <a:p>
+            <a:pPr algn="l"/>
+            <a:r>
+              <a:rPr sz="1000" b="1">
+                <a:solidFill>
+                  <a:srgbClr val="C9A227"/>
+                </a:solidFill>
+              </a:rPr>
+              <a:t>▪  </a:t>
+            </a:r>
+            <a:r>
+              <a:rPr sz="1000" b="0">
+                <a:solidFill>
+                  <a:srgbClr val="1B2A41"/>
+                </a:solidFill>
+              </a:rPr>
+              <a:t>Non-performing and forborne exposures, and the provisions against them</a:t>
+            </a:r>
+          </a:p>
+        </p:txBody>
+      </p:sp>
+      <p:sp>
+        <p:nvSpPr>
+          <p:cNvPr id="23" name="TextBox 22"/>
+          <p:cNvSpPr txBox="1"/>
+          <p:nvPr/>
+        </p:nvSpPr>
+        <p:spPr>
+          <a:xfrm>
+            <a:off x="6492240" y="4142232"/>
+            <a:ext cx="4892040" cy="329184"/>
+          </a:xfrm>
+          <a:prstGeom prst="rect">
+            <a:avLst/>
+          </a:prstGeom>
+          <a:noFill/>
+        </p:spPr>
+        <p:txBody>
+          <a:bodyPr wrap="square" anchor="t" lIns="0" rIns="0" tIns="0" bIns="0">
+            <a:spAutoFit/>
+          </a:bodyPr>
+          <a:lstStyle/>
+          <a:p>
+            <a:pPr algn="l"/>
+            <a:r>
+              <a:rPr sz="1000" b="1">
+                <a:solidFill>
+                  <a:srgbClr val="C9A227"/>
+                </a:solidFill>
+              </a:rPr>
+              <a:t>▪  </a:t>
+            </a:r>
+            <a:r>
+              <a:rPr sz="1000" b="0">
+                <a:solidFill>
+                  <a:srgbClr val="1B2A41"/>
+                </a:solidFill>
+              </a:rPr>
+              <a:t>Assets pledged and encumbered</a:t>
+            </a:r>
+          </a:p>
+        </p:txBody>
+      </p:sp>
+      <p:sp>
+        <p:nvSpPr>
+          <p:cNvPr id="24" name="TextBox 23"/>
+          <p:cNvSpPr txBox="1"/>
+          <p:nvPr/>
+        </p:nvSpPr>
+        <p:spPr>
+          <a:xfrm>
+            <a:off x="6492240" y="4526280"/>
+            <a:ext cx="4892040" cy="457200"/>
+          </a:xfrm>
+          <a:prstGeom prst="rect">
+            <a:avLst/>
+          </a:prstGeom>
+          <a:noFill/>
+        </p:spPr>
+        <p:txBody>
+          <a:bodyPr wrap="square" anchor="t" lIns="0" rIns="0" tIns="0" bIns="0">
+            <a:spAutoFit/>
+          </a:bodyPr>
+          <a:lstStyle/>
+          <a:p>
+            <a:pPr algn="l"/>
+            <a:r>
+              <a:rPr sz="950" b="1">
+                <a:solidFill>
+                  <a:srgbClr val="5D6B7E"/>
+                </a:solidFill>
+              </a:rPr>
+              <a:t>Quarterly, for consolidated groups. The RBI parallel is the statutory returns built from the audited accounts.</a:t>
+            </a:r>
+          </a:p>
+        </p:txBody>
+      </p:sp>
+      <p:sp>
+        <p:nvSpPr>
+          <p:cNvPr id="25" name="Rectangle 24"/>
           <p:cNvSpPr/>
           <p:nvPr/>
         </p:nvSpPr>
         <p:spPr>
           <a:xfrm>
-            <a:off x="4553712" y="3813048"/>
-            <a:ext cx="3136392" cy="914400"/>
+            <a:off x="548640" y="5193792"/>
+            <a:ext cx="11091672" cy="457200"/>
           </a:xfrm>
           <a:prstGeom prst="rect">
             <a:avLst/>
           </a:prstGeom>
           <a:solidFill>
-            <a:srgbClr val="FFFFFF"/>
+            <a:srgbClr val="E9EFF8"/>
           </a:solidFill>
           <a:ln>
             <a:noFill/>
@@ -6265,97 +6634,100 @@
       </p:sp>
       <p:sp>
         <p:nvSpPr>
-          <p:cNvPr id="17" name="TextBox 16"/>
-          <p:cNvSpPr txBox="1"/>
-          <p:nvPr/>
-        </p:nvSpPr>
-        <p:spPr>
-          <a:xfrm>
-            <a:off x="4718304" y="3904488"/>
-            <a:ext cx="2834640" cy="777240"/>
-          </a:xfrm>
-          <a:prstGeom prst="rect">
-            <a:avLst/>
-          </a:prstGeom>
-          <a:noFill/>
-        </p:spPr>
-        <p:txBody>
-          <a:bodyPr wrap="square" anchor="t" lIns="0" rIns="0" tIns="0" bIns="0">
-            <a:spAutoFit/>
-          </a:bodyPr>
-          <a:lstStyle/>
-          <a:p>
-            <a:pPr algn="l"/>
-            <a:r>
-              <a:rPr sz="800" b="1">
+          <p:cNvPr id="26" name="Rectangle 25"/>
+          <p:cNvSpPr/>
+          <p:nvPr/>
+        </p:nvSpPr>
+        <p:spPr>
+          <a:xfrm>
+            <a:off x="548640" y="5193792"/>
+            <a:ext cx="64008" cy="457200"/>
+          </a:xfrm>
+          <a:prstGeom prst="rect">
+            <a:avLst/>
+          </a:prstGeom>
+          <a:solidFill>
+            <a:srgbClr val="3A5C9E"/>
+          </a:solidFill>
+          <a:ln>
+            <a:noFill/>
+          </a:ln>
+          <a:effectLst/>
+        </p:spPr>
+        <p:style>
+          <a:lnRef idx="1">
+            <a:schemeClr val="accent1"/>
+          </a:lnRef>
+          <a:fillRef idx="3">
+            <a:schemeClr val="accent1"/>
+          </a:fillRef>
+          <a:effectRef idx="2">
+            <a:schemeClr val="accent1"/>
+          </a:effectRef>
+          <a:fontRef idx="minor">
+            <a:schemeClr val="lt1"/>
+          </a:fontRef>
+        </p:style>
+        <p:txBody>
+          <a:bodyPr rtlCol="0" anchor="ctr"/>
+          <a:lstStyle/>
+          <a:p>
+            <a:pPr algn="ctr"/>
+          </a:p>
+        </p:txBody>
+      </p:sp>
+      <p:sp>
+        <p:nvSpPr>
+          <p:cNvPr id="27" name="TextBox 26"/>
+          <p:cNvSpPr txBox="1"/>
+          <p:nvPr/>
+        </p:nvSpPr>
+        <p:spPr>
+          <a:xfrm>
+            <a:off x="868680" y="5193792"/>
+            <a:ext cx="10515600" cy="457200"/>
+          </a:xfrm>
+          <a:prstGeom prst="rect">
+            <a:avLst/>
+          </a:prstGeom>
+          <a:noFill/>
+        </p:spPr>
+        <p:txBody>
+          <a:bodyPr wrap="square" anchor="ctr" lIns="0" rIns="0" tIns="0" bIns="0">
+            <a:spAutoFit/>
+          </a:bodyPr>
+          <a:lstStyle/>
+          <a:p>
+            <a:pPr algn="l"/>
+            <a:r>
+              <a:rPr sz="1000" b="1">
                 <a:solidFill>
                   <a:srgbClr val="3A5C9E"/>
                 </a:solidFill>
               </a:rPr>
-              <a:t>EXAMPLE</a:t>
-            </a:r>
-          </a:p>
-          <a:p>
-            <a:pPr algn="l">
-              <a:spcBef>
-                <a:spcPts val="200"/>
-              </a:spcBef>
-            </a:pPr>
-            <a:r>
-              <a:rPr sz="950" b="0">
+              <a:t>BOTH GO IN AS XBRL AGAINST THE EBA DATA POINT MODEL.  </a:t>
+            </a:r>
+            <a:r>
+              <a:rPr sz="1000" b="0">
                 <a:solidFill>
                   <a:srgbClr val="1B2A41"/>
                 </a:solidFill>
               </a:rPr>
-              <a:t>Onboarding drops from three days to twenty minutes for a clean file. The dirty file still takes three days.</a:t>
-            </a:r>
-          </a:p>
-        </p:txBody>
-      </p:sp>
-      <p:sp>
-        <p:nvSpPr>
-          <p:cNvPr id="18" name="TextBox 17"/>
-          <p:cNvSpPr txBox="1"/>
-          <p:nvPr/>
-        </p:nvSpPr>
-        <p:spPr>
-          <a:xfrm>
-            <a:off x="4553712" y="4800600"/>
-            <a:ext cx="3108960" cy="411480"/>
-          </a:xfrm>
-          <a:prstGeom prst="rect">
-            <a:avLst/>
-          </a:prstGeom>
-          <a:noFill/>
-        </p:spPr>
-        <p:txBody>
-          <a:bodyPr wrap="square" anchor="t" lIns="0" rIns="0" tIns="0" bIns="0">
-            <a:spAutoFit/>
-          </a:bodyPr>
-          <a:lstStyle/>
-          <a:p>
-            <a:pPr algn="l"/>
-            <a:r>
-              <a:rPr sz="1000" b="1">
-                <a:solidFill>
-                  <a:srgbClr val="5D6B7E"/>
-                </a:solidFill>
-              </a:rPr>
-              <a:t>The human handles the exceptions, not the volume.</a:t>
-            </a:r>
-          </a:p>
-        </p:txBody>
-      </p:sp>
-      <p:sp>
-        <p:nvSpPr>
-          <p:cNvPr id="19" name="Rectangle 18"/>
+              <a:t>A whole data model is filed, not a set of PDFs. CRD IV multiplied the data points reported to each regulator nine times over. That is why a platform exists.</a:t>
+            </a:r>
+          </a:p>
+        </p:txBody>
+      </p:sp>
+      <p:sp>
+        <p:nvSpPr>
+          <p:cNvPr id="28" name="Rectangle 27"/>
           <p:cNvSpPr/>
           <p:nvPr/>
         </p:nvSpPr>
         <p:spPr>
           <a:xfrm>
-            <a:off x="8083296" y="1417320"/>
-            <a:ext cx="3611880" cy="3840480"/>
+            <a:off x="548640" y="5760720"/>
+            <a:ext cx="11091672" cy="603504"/>
           </a:xfrm>
           <a:prstGeom prst="rect">
             <a:avLst/>
@@ -6392,411 +6764,7 @@
       </p:sp>
       <p:sp>
         <p:nvSpPr>
-          <p:cNvPr id="20" name="TextBox 19"/>
-          <p:cNvSpPr txBox="1"/>
-          <p:nvPr/>
-        </p:nvSpPr>
-        <p:spPr>
-          <a:xfrm>
-            <a:off x="8321040" y="1600200"/>
-            <a:ext cx="3108960" cy="274320"/>
-          </a:xfrm>
-          <a:prstGeom prst="rect">
-            <a:avLst/>
-          </a:prstGeom>
-          <a:noFill/>
-        </p:spPr>
-        <p:txBody>
-          <a:bodyPr wrap="square" anchor="t" lIns="0" rIns="0" tIns="0" bIns="0">
-            <a:spAutoFit/>
-          </a:bodyPr>
-          <a:lstStyle/>
-          <a:p>
-            <a:pPr algn="l"/>
-            <a:r>
-              <a:rPr sz="1000" b="1">
-                <a:solidFill>
-                  <a:srgbClr val="C9A227"/>
-                </a:solidFill>
-              </a:rPr>
-              <a:t>THE SUSPICIOUS TRANSACTION REPORT</a:t>
-            </a:r>
-          </a:p>
-        </p:txBody>
-      </p:sp>
-      <p:sp>
-        <p:nvSpPr>
-          <p:cNvPr id="21" name="TextBox 20"/>
-          <p:cNvSpPr txBox="1"/>
-          <p:nvPr/>
-        </p:nvSpPr>
-        <p:spPr>
-          <a:xfrm>
-            <a:off x="8321040" y="1892808"/>
-            <a:ext cx="3108960" cy="365760"/>
-          </a:xfrm>
-          <a:prstGeom prst="rect">
-            <a:avLst/>
-          </a:prstGeom>
-          <a:noFill/>
-        </p:spPr>
-        <p:txBody>
-          <a:bodyPr wrap="square" anchor="t" lIns="0" rIns="0" tIns="0" bIns="0">
-            <a:spAutoFit/>
-          </a:bodyPr>
-          <a:lstStyle/>
-          <a:p>
-            <a:pPr algn="l"/>
-            <a:r>
-              <a:rPr sz="1500" b="1">
-                <a:solidFill>
-                  <a:srgbClr val="FFFFFF"/>
-                </a:solidFill>
-                <a:latin typeface="Georgia"/>
-              </a:rPr>
-              <a:t>AI drafts. A human signs.</a:t>
-            </a:r>
-          </a:p>
-        </p:txBody>
-      </p:sp>
-      <p:sp>
-        <p:nvSpPr>
-          <p:cNvPr id="22" name="TextBox 21"/>
-          <p:cNvSpPr txBox="1"/>
-          <p:nvPr/>
-        </p:nvSpPr>
-        <p:spPr>
-          <a:xfrm>
-            <a:off x="8321040" y="2377440"/>
-            <a:ext cx="3108960" cy="1417320"/>
-          </a:xfrm>
-          <a:prstGeom prst="rect">
-            <a:avLst/>
-          </a:prstGeom>
-          <a:noFill/>
-        </p:spPr>
-        <p:txBody>
-          <a:bodyPr wrap="square" anchor="t" lIns="0" rIns="0" tIns="0" bIns="0">
-            <a:spAutoFit/>
-          </a:bodyPr>
-          <a:lstStyle/>
-          <a:p>
-            <a:pPr algn="l"/>
-            <a:r>
-              <a:rPr sz="1000" b="0">
-                <a:solidFill>
-                  <a:srgbClr val="C9D6EE"/>
-                </a:solidFill>
-              </a:rPr>
-              <a:t>FATF Recommendation 20 requires the report. India files it to FIU-IND under the PMLA. A model can draft the narrative from the alert history. The officer reads it, changes it, and signs it.</a:t>
-            </a:r>
-          </a:p>
-        </p:txBody>
-      </p:sp>
-      <p:sp>
-        <p:nvSpPr>
-          <p:cNvPr id="23" name="Rectangle 22"/>
-          <p:cNvSpPr/>
-          <p:nvPr/>
-        </p:nvSpPr>
-        <p:spPr>
-          <a:xfrm>
-            <a:off x="8321040" y="3813048"/>
-            <a:ext cx="3136392" cy="914400"/>
-          </a:xfrm>
-          <a:prstGeom prst="rect">
-            <a:avLst/>
-          </a:prstGeom>
-          <a:solidFill>
-            <a:srgbClr val="FFFFFF"/>
-          </a:solidFill>
-          <a:ln>
-            <a:noFill/>
-          </a:ln>
-          <a:effectLst/>
-        </p:spPr>
-        <p:style>
-          <a:lnRef idx="1">
-            <a:schemeClr val="accent1"/>
-          </a:lnRef>
-          <a:fillRef idx="3">
-            <a:schemeClr val="accent1"/>
-          </a:fillRef>
-          <a:effectRef idx="2">
-            <a:schemeClr val="accent1"/>
-          </a:effectRef>
-          <a:fontRef idx="minor">
-            <a:schemeClr val="lt1"/>
-          </a:fontRef>
-        </p:style>
-        <p:txBody>
-          <a:bodyPr rtlCol="0" anchor="ctr"/>
-          <a:lstStyle/>
-          <a:p>
-            <a:pPr algn="ctr"/>
-          </a:p>
-        </p:txBody>
-      </p:sp>
-      <p:sp>
-        <p:nvSpPr>
-          <p:cNvPr id="24" name="TextBox 23"/>
-          <p:cNvSpPr txBox="1"/>
-          <p:nvPr/>
-        </p:nvSpPr>
-        <p:spPr>
-          <a:xfrm>
-            <a:off x="8485632" y="3904488"/>
-            <a:ext cx="2834640" cy="777240"/>
-          </a:xfrm>
-          <a:prstGeom prst="rect">
-            <a:avLst/>
-          </a:prstGeom>
-          <a:noFill/>
-        </p:spPr>
-        <p:txBody>
-          <a:bodyPr wrap="square" anchor="t" lIns="0" rIns="0" tIns="0" bIns="0">
-            <a:spAutoFit/>
-          </a:bodyPr>
-          <a:lstStyle/>
-          <a:p>
-            <a:pPr algn="l"/>
-            <a:r>
-              <a:rPr sz="800" b="1">
-                <a:solidFill>
-                  <a:srgbClr val="3A5C9E"/>
-                </a:solidFill>
-              </a:rPr>
-              <a:t>EXAMPLE</a:t>
-            </a:r>
-          </a:p>
-          <a:p>
-            <a:pPr algn="l">
-              <a:spcBef>
-                <a:spcPts val="200"/>
-              </a:spcBef>
-            </a:pPr>
-            <a:r>
-              <a:rPr sz="950" b="0">
-                <a:solidFill>
-                  <a:srgbClr val="1B2A41"/>
-                </a:solidFill>
-              </a:rPr>
-              <a:t>One STR drafted in four minutes, then read for twenty. The reading is the job.</a:t>
-            </a:r>
-          </a:p>
-        </p:txBody>
-      </p:sp>
-      <p:sp>
-        <p:nvSpPr>
-          <p:cNvPr id="25" name="TextBox 24"/>
-          <p:cNvSpPr txBox="1"/>
-          <p:nvPr/>
-        </p:nvSpPr>
-        <p:spPr>
-          <a:xfrm>
-            <a:off x="8321040" y="4800600"/>
-            <a:ext cx="3108960" cy="411480"/>
-          </a:xfrm>
-          <a:prstGeom prst="rect">
-            <a:avLst/>
-          </a:prstGeom>
-          <a:noFill/>
-        </p:spPr>
-        <p:txBody>
-          <a:bodyPr wrap="square" anchor="t" lIns="0" rIns="0" tIns="0" bIns="0">
-            <a:spAutoFit/>
-          </a:bodyPr>
-          <a:lstStyle/>
-          <a:p>
-            <a:pPr algn="l"/>
-            <a:r>
-              <a:rPr sz="1000" b="1">
-                <a:solidFill>
-                  <a:srgbClr val="C9D6EE"/>
-                </a:solidFill>
-              </a:rPr>
-              <a:t>No filing leaves without a name on it.</a:t>
-            </a:r>
-          </a:p>
-        </p:txBody>
-      </p:sp>
-      <p:sp>
-        <p:nvSpPr>
-          <p:cNvPr id="26" name="Rectangle 25"/>
-          <p:cNvSpPr/>
-          <p:nvPr/>
-        </p:nvSpPr>
-        <p:spPr>
-          <a:xfrm>
-            <a:off x="548640" y="5321808"/>
-            <a:ext cx="11091672" cy="402336"/>
-          </a:xfrm>
-          <a:prstGeom prst="rect">
-            <a:avLst/>
-          </a:prstGeom>
-          <a:solidFill>
-            <a:srgbClr val="E9EFF8"/>
-          </a:solidFill>
-          <a:ln>
-            <a:noFill/>
-          </a:ln>
-          <a:effectLst/>
-        </p:spPr>
-        <p:style>
-          <a:lnRef idx="1">
-            <a:schemeClr val="accent1"/>
-          </a:lnRef>
-          <a:fillRef idx="3">
-            <a:schemeClr val="accent1"/>
-          </a:fillRef>
-          <a:effectRef idx="2">
-            <a:schemeClr val="accent1"/>
-          </a:effectRef>
-          <a:fontRef idx="minor">
-            <a:schemeClr val="lt1"/>
-          </a:fontRef>
-        </p:style>
-        <p:txBody>
-          <a:bodyPr rtlCol="0" anchor="ctr"/>
-          <a:lstStyle/>
-          <a:p>
-            <a:pPr algn="ctr"/>
-          </a:p>
-        </p:txBody>
-      </p:sp>
-      <p:sp>
-        <p:nvSpPr>
-          <p:cNvPr id="27" name="Rectangle 26"/>
-          <p:cNvSpPr/>
-          <p:nvPr/>
-        </p:nvSpPr>
-        <p:spPr>
-          <a:xfrm>
-            <a:off x="548640" y="5321808"/>
-            <a:ext cx="64008" cy="402336"/>
-          </a:xfrm>
-          <a:prstGeom prst="rect">
-            <a:avLst/>
-          </a:prstGeom>
-          <a:solidFill>
-            <a:srgbClr val="3A5C9E"/>
-          </a:solidFill>
-          <a:ln>
-            <a:noFill/>
-          </a:ln>
-          <a:effectLst/>
-        </p:spPr>
-        <p:style>
-          <a:lnRef idx="1">
-            <a:schemeClr val="accent1"/>
-          </a:lnRef>
-          <a:fillRef idx="3">
-            <a:schemeClr val="accent1"/>
-          </a:fillRef>
-          <a:effectRef idx="2">
-            <a:schemeClr val="accent1"/>
-          </a:effectRef>
-          <a:fontRef idx="minor">
-            <a:schemeClr val="lt1"/>
-          </a:fontRef>
-        </p:style>
-        <p:txBody>
-          <a:bodyPr rtlCol="0" anchor="ctr"/>
-          <a:lstStyle/>
-          <a:p>
-            <a:pPr algn="ctr"/>
-          </a:p>
-        </p:txBody>
-      </p:sp>
-      <p:sp>
-        <p:nvSpPr>
-          <p:cNvPr id="28" name="TextBox 27"/>
-          <p:cNvSpPr txBox="1"/>
-          <p:nvPr/>
-        </p:nvSpPr>
-        <p:spPr>
-          <a:xfrm>
-            <a:off x="868680" y="5321808"/>
-            <a:ext cx="10515600" cy="402336"/>
-          </a:xfrm>
-          <a:prstGeom prst="rect">
-            <a:avLst/>
-          </a:prstGeom>
-          <a:noFill/>
-        </p:spPr>
-        <p:txBody>
-          <a:bodyPr wrap="square" anchor="ctr" lIns="0" rIns="0" tIns="0" bIns="0">
-            <a:spAutoFit/>
-          </a:bodyPr>
-          <a:lstStyle/>
-          <a:p>
-            <a:pPr algn="l"/>
-            <a:r>
-              <a:rPr sz="1000" b="1">
-                <a:solidFill>
-                  <a:srgbClr val="3A5C9E"/>
-                </a:solidFill>
-              </a:rPr>
-              <a:t>WHAT RBI FINES BANKS FOR UNDER THE KYC MASTER DIRECTION:  </a:t>
-            </a:r>
-            <a:r>
-              <a:rPr sz="1000" b="0">
-                <a:solidFill>
-                  <a:srgbClr val="1B2A41"/>
-                </a:solidFill>
-              </a:rPr>
-              <a:t>accounts opened without full verification, periodic KYC updates missed, and monitoring alerts closed without a review. The fine is the small part. The restriction on onboarding new customers is the expensive part.</a:t>
-            </a:r>
-          </a:p>
-        </p:txBody>
-      </p:sp>
-      <p:sp>
-        <p:nvSpPr>
           <p:cNvPr id="29" name="Rectangle 28"/>
-          <p:cNvSpPr/>
-          <p:nvPr/>
-        </p:nvSpPr>
-        <p:spPr>
-          <a:xfrm>
-            <a:off x="548640" y="5760720"/>
-            <a:ext cx="11091672" cy="603504"/>
-          </a:xfrm>
-          <a:prstGeom prst="rect">
-            <a:avLst/>
-          </a:prstGeom>
-          <a:solidFill>
-            <a:srgbClr val="0F2145"/>
-          </a:solidFill>
-          <a:ln>
-            <a:noFill/>
-          </a:ln>
-          <a:effectLst/>
-        </p:spPr>
-        <p:style>
-          <a:lnRef idx="1">
-            <a:schemeClr val="accent1"/>
-          </a:lnRef>
-          <a:fillRef idx="3">
-            <a:schemeClr val="accent1"/>
-          </a:fillRef>
-          <a:effectRef idx="2">
-            <a:schemeClr val="accent1"/>
-          </a:effectRef>
-          <a:fontRef idx="minor">
-            <a:schemeClr val="lt1"/>
-          </a:fontRef>
-        </p:style>
-        <p:txBody>
-          <a:bodyPr rtlCol="0" anchor="ctr"/>
-          <a:lstStyle/>
-          <a:p>
-            <a:pPr algn="ctr"/>
-          </a:p>
-        </p:txBody>
-      </p:sp>
-      <p:sp>
-        <p:nvSpPr>
-          <p:cNvPr id="30" name="Rectangle 29"/>
           <p:cNvSpPr/>
           <p:nvPr/>
         </p:nvSpPr>
@@ -6840,7 +6808,7 @@
       </p:sp>
       <p:sp>
         <p:nvSpPr>
-          <p:cNvPr id="31" name="TextBox 30"/>
+          <p:cNvPr id="30" name="TextBox 29"/>
           <p:cNvSpPr txBox="1"/>
           <p:nvPr/>
         </p:nvSpPr>
@@ -6867,7 +6835,7 @@
                   <a:srgbClr val="C9A227"/>
                 </a:solidFill>
               </a:rPr>
-              <a:t>The rule for this hour:  </a:t>
+              <a:t>Same bank, two lenses:  </a:t>
             </a:r>
             <a:r>
               <a:rPr sz="1200" b="0">
@@ -6875,14 +6843,14 @@
                   <a:srgbClr val="FFFFFF"/>
                 </a:solidFill>
               </a:rPr>
-              <a:t>automation earns its place by removing the false alerts, never by removing the signature.</a:t>
-            </a:r>
-          </a:p>
-        </p:txBody>
-      </p:sp>
-      <p:sp>
-        <p:nvSpPr>
-          <p:cNvPr id="32" name="TextBox 31"/>
+              <a:t>COREP asks whether there is enough capital. FINREP asks what the balance sheet looks like. The supervisor reads both, and they have to agree.</a:t>
+            </a:r>
+          </a:p>
+        </p:txBody>
+      </p:sp>
+      <p:sp>
+        <p:nvSpPr>
+          <p:cNvPr id="31" name="TextBox 30"/>
           <p:cNvSpPr txBox="1"/>
           <p:nvPr/>
         </p:nvSpPr>
@@ -6916,7 +6884,7 @@
       </p:sp>
       <p:sp>
         <p:nvSpPr>
-          <p:cNvPr id="33" name="TextBox 32"/>
+          <p:cNvPr id="32" name="TextBox 31"/>
           <p:cNvSpPr txBox="1"/>
           <p:nvPr/>
         </p:nvSpPr>
@@ -7047,7 +7015,7 @@
                   <a:srgbClr val="C9A227"/>
                 </a:solidFill>
               </a:rPr>
-              <a:t>HOUR 3 · THE LAB</a:t>
+              <a:t>HOUR 1 · THE PLATFORM</a:t>
             </a:r>
           </a:p>
         </p:txBody>
@@ -7082,7 +7050,7 @@
                 </a:solidFill>
                 <a:latin typeface="Georgia"/>
               </a:rPr>
-              <a:t>One sentence, one Word document, one check</a:t>
+              <a:t>What Nasdaq AxiomSL does, ledger to regulator</a:t>
             </a:r>
           </a:p>
         </p:txBody>
@@ -7095,14 +7063,14 @@
         </p:nvSpPr>
         <p:spPr>
           <a:xfrm>
-            <a:off x="548640" y="1444752"/>
-            <a:ext cx="11091672" cy="768096"/>
+            <a:off x="548640" y="1481328"/>
+            <a:ext cx="2103120" cy="2103120"/>
           </a:xfrm>
           <a:prstGeom prst="rect">
             <a:avLst/>
           </a:prstGeom>
           <a:solidFill>
-            <a:srgbClr val="0B1936"/>
+            <a:srgbClr val="FFFFFF"/>
           </a:solidFill>
           <a:ln>
             <a:noFill/>
@@ -7139,8 +7107,8 @@
         </p:nvSpPr>
         <p:spPr>
           <a:xfrm>
-            <a:off x="548640" y="1444752"/>
-            <a:ext cx="64008" cy="768096"/>
+            <a:off x="548640" y="1481328"/>
+            <a:ext cx="2103120" cy="54864"/>
           </a:xfrm>
           <a:prstGeom prst="rect">
             <a:avLst/>
@@ -7183,8 +7151,76 @@
         </p:nvSpPr>
         <p:spPr>
           <a:xfrm>
-            <a:off x="868680" y="1444752"/>
-            <a:ext cx="10515600" cy="768096"/>
+            <a:off x="731520" y="1682496"/>
+            <a:ext cx="1783080" cy="274320"/>
+          </a:xfrm>
+          <a:prstGeom prst="rect">
+            <a:avLst/>
+          </a:prstGeom>
+          <a:noFill/>
+        </p:spPr>
+        <p:txBody>
+          <a:bodyPr wrap="square" anchor="t" lIns="0" rIns="0" tIns="0" bIns="0">
+            <a:spAutoFit/>
+          </a:bodyPr>
+          <a:lstStyle/>
+          <a:p>
+            <a:pPr algn="l"/>
+            <a:r>
+              <a:rPr sz="900" b="1">
+                <a:solidFill>
+                  <a:srgbClr val="3A5C9E"/>
+                </a:solidFill>
+              </a:rPr>
+              <a:t>1  SOURCE DATA</a:t>
+            </a:r>
+          </a:p>
+        </p:txBody>
+      </p:sp>
+      <p:sp>
+        <p:nvSpPr>
+          <p:cNvPr id="8" name="TextBox 7"/>
+          <p:cNvSpPr txBox="1"/>
+          <p:nvPr/>
+        </p:nvSpPr>
+        <p:spPr>
+          <a:xfrm>
+            <a:off x="731520" y="1993392"/>
+            <a:ext cx="1783080" cy="1828800"/>
+          </a:xfrm>
+          <a:prstGeom prst="rect">
+            <a:avLst/>
+          </a:prstGeom>
+          <a:noFill/>
+        </p:spPr>
+        <p:txBody>
+          <a:bodyPr wrap="square" anchor="t" lIns="0" rIns="0" tIns="0" bIns="0">
+            <a:spAutoFit/>
+          </a:bodyPr>
+          <a:lstStyle/>
+          <a:p>
+            <a:pPr algn="l"/>
+            <a:r>
+              <a:rPr sz="950" b="0">
+                <a:solidFill>
+                  <a:srgbClr val="1B2A41"/>
+                </a:solidFill>
+              </a:rPr>
+              <a:t>Core banking, the general ledger, the risk engines, the treasury system. Databases, flat files and APIs, in whatever shape they come.</a:t>
+            </a:r>
+          </a:p>
+        </p:txBody>
+      </p:sp>
+      <p:sp>
+        <p:nvSpPr>
+          <p:cNvPr id="9" name="TextBox 8"/>
+          <p:cNvSpPr txBox="1"/>
+          <p:nvPr/>
+        </p:nvSpPr>
+        <p:spPr>
+          <a:xfrm>
+            <a:off x="2651760" y="2514600"/>
+            <a:ext cx="146304" cy="310896"/>
           </a:xfrm>
           <a:prstGeom prst="rect">
             <a:avLst/>
@@ -7197,44 +7233,28 @@
           </a:bodyPr>
           <a:lstStyle/>
           <a:p>
-            <a:pPr algn="l"/>
-            <a:r>
-              <a:rPr sz="850" b="1">
+            <a:pPr algn="ctr"/>
+            <a:r>
+              <a:rPr sz="1300" b="1">
                 <a:solidFill>
                   <a:srgbClr val="C9A227"/>
                 </a:solidFill>
               </a:rPr>
-              <a:t>THE SENTENCE WE TYPE</a:t>
-            </a:r>
-          </a:p>
-          <a:p>
-            <a:pPr algn="l">
-              <a:spcBef>
-                <a:spcPts val="200"/>
-              </a:spcBef>
-            </a:pPr>
-            <a:r>
-              <a:rPr sz="1200" b="1">
-                <a:solidFill>
-                  <a:srgbClr val="FFFFFF"/>
-                </a:solidFill>
-                <a:latin typeface="Georgia"/>
-              </a:rPr>
-              <a:t>“Here is a bank's capital, RWA and leverage data in bank_data.json. Compute CET1, Tier 1, total capital, leverage, LCR and NSFR, compare each with the RBI minimum, and write a Pillar 3 disclosure in Word with the DF-2 and DF-18 tables.”</a:t>
-            </a:r>
-          </a:p>
-        </p:txBody>
-      </p:sp>
-      <p:sp>
-        <p:nvSpPr>
-          <p:cNvPr id="8" name="Rectangle 7"/>
+              <a:t>→</a:t>
+            </a:r>
+          </a:p>
+        </p:txBody>
+      </p:sp>
+      <p:sp>
+        <p:nvSpPr>
+          <p:cNvPr id="10" name="Rectangle 9"/>
           <p:cNvSpPr/>
           <p:nvPr/>
         </p:nvSpPr>
         <p:spPr>
           <a:xfrm>
-            <a:off x="548640" y="2359152"/>
-            <a:ext cx="3611880" cy="3054096"/>
+            <a:off x="2798064" y="1481328"/>
+            <a:ext cx="2103120" cy="2103120"/>
           </a:xfrm>
           <a:prstGeom prst="rect">
             <a:avLst/>
@@ -7271,237 +7291,146 @@
       </p:sp>
       <p:sp>
         <p:nvSpPr>
-          <p:cNvPr id="9" name="TextBox 8"/>
-          <p:cNvSpPr txBox="1"/>
-          <p:nvPr/>
-        </p:nvSpPr>
-        <p:spPr>
-          <a:xfrm>
-            <a:off x="804672" y="2560320"/>
-            <a:ext cx="3099816" cy="274320"/>
-          </a:xfrm>
-          <a:prstGeom prst="rect">
-            <a:avLst/>
-          </a:prstGeom>
-          <a:noFill/>
-        </p:spPr>
-        <p:txBody>
-          <a:bodyPr wrap="square" anchor="t" lIns="0" rIns="0" tIns="0" bIns="0">
-            <a:spAutoFit/>
-          </a:bodyPr>
-          <a:lstStyle/>
-          <a:p>
-            <a:pPr algn="l"/>
-            <a:r>
-              <a:rPr sz="950" b="1">
+          <p:cNvPr id="11" name="Rectangle 10"/>
+          <p:cNvSpPr/>
+          <p:nvPr/>
+        </p:nvSpPr>
+        <p:spPr>
+          <a:xfrm>
+            <a:off x="2798064" y="1481328"/>
+            <a:ext cx="2103120" cy="54864"/>
+          </a:xfrm>
+          <a:prstGeom prst="rect">
+            <a:avLst/>
+          </a:prstGeom>
+          <a:solidFill>
+            <a:srgbClr val="C9A227"/>
+          </a:solidFill>
+          <a:ln>
+            <a:noFill/>
+          </a:ln>
+          <a:effectLst/>
+        </p:spPr>
+        <p:style>
+          <a:lnRef idx="1">
+            <a:schemeClr val="accent1"/>
+          </a:lnRef>
+          <a:fillRef idx="3">
+            <a:schemeClr val="accent1"/>
+          </a:fillRef>
+          <a:effectRef idx="2">
+            <a:schemeClr val="accent1"/>
+          </a:effectRef>
+          <a:fontRef idx="minor">
+            <a:schemeClr val="lt1"/>
+          </a:fontRef>
+        </p:style>
+        <p:txBody>
+          <a:bodyPr rtlCol="0" anchor="ctr"/>
+          <a:lstStyle/>
+          <a:p>
+            <a:pPr algn="ctr"/>
+          </a:p>
+        </p:txBody>
+      </p:sp>
+      <p:sp>
+        <p:nvSpPr>
+          <p:cNvPr id="12" name="TextBox 11"/>
+          <p:cNvSpPr txBox="1"/>
+          <p:nvPr/>
+        </p:nvSpPr>
+        <p:spPr>
+          <a:xfrm>
+            <a:off x="2980944" y="1682496"/>
+            <a:ext cx="1783080" cy="274320"/>
+          </a:xfrm>
+          <a:prstGeom prst="rect">
+            <a:avLst/>
+          </a:prstGeom>
+          <a:noFill/>
+        </p:spPr>
+        <p:txBody>
+          <a:bodyPr wrap="square" anchor="t" lIns="0" rIns="0" tIns="0" bIns="0">
+            <a:spAutoFit/>
+          </a:bodyPr>
+          <a:lstStyle/>
+          <a:p>
+            <a:pPr algn="l"/>
+            <a:r>
+              <a:rPr sz="900" b="1">
                 <a:solidFill>
                   <a:srgbClr val="3A5C9E"/>
                 </a:solidFill>
               </a:rPr>
-              <a:t>PART A  ·  30 MIN</a:t>
-            </a:r>
-          </a:p>
-        </p:txBody>
-      </p:sp>
-      <p:sp>
-        <p:nvSpPr>
-          <p:cNvPr id="10" name="TextBox 9"/>
-          <p:cNvSpPr txBox="1"/>
-          <p:nvPr/>
-        </p:nvSpPr>
-        <p:spPr>
-          <a:xfrm>
-            <a:off x="804672" y="2871216"/>
-            <a:ext cx="3099816" cy="402336"/>
-          </a:xfrm>
-          <a:prstGeom prst="rect">
-            <a:avLst/>
-          </a:prstGeom>
-          <a:noFill/>
-        </p:spPr>
-        <p:txBody>
-          <a:bodyPr wrap="square" anchor="t" lIns="0" rIns="0" tIns="0" bIns="0">
-            <a:spAutoFit/>
-          </a:bodyPr>
-          <a:lstStyle/>
-          <a:p>
-            <a:pPr algn="l"/>
-            <a:r>
-              <a:rPr sz="1700" b="1">
-                <a:solidFill>
-                  <a:srgbClr val="0F2145"/>
-                </a:solidFill>
-                <a:latin typeface="Georgia"/>
-              </a:rPr>
-              <a:t>Build it</a:t>
-            </a:r>
-          </a:p>
-        </p:txBody>
-      </p:sp>
-      <p:sp>
-        <p:nvSpPr>
-          <p:cNvPr id="11" name="TextBox 10"/>
-          <p:cNvSpPr txBox="1"/>
-          <p:nvPr/>
-        </p:nvSpPr>
-        <p:spPr>
-          <a:xfrm>
-            <a:off x="804672" y="3401568"/>
-            <a:ext cx="3099816" cy="493776"/>
-          </a:xfrm>
-          <a:prstGeom prst="rect">
-            <a:avLst/>
-          </a:prstGeom>
-          <a:noFill/>
-        </p:spPr>
-        <p:txBody>
-          <a:bodyPr wrap="square" anchor="t" lIns="0" rIns="0" tIns="0" bIns="0">
-            <a:spAutoFit/>
-          </a:bodyPr>
-          <a:lstStyle/>
-          <a:p>
-            <a:pPr algn="l"/>
-            <a:r>
-              <a:rPr sz="1000" b="1">
+              <a:t>2  ONE DATA LAYER</a:t>
+            </a:r>
+          </a:p>
+        </p:txBody>
+      </p:sp>
+      <p:sp>
+        <p:nvSpPr>
+          <p:cNvPr id="13" name="TextBox 12"/>
+          <p:cNvSpPr txBox="1"/>
+          <p:nvPr/>
+        </p:nvSpPr>
+        <p:spPr>
+          <a:xfrm>
+            <a:off x="2980944" y="1993392"/>
+            <a:ext cx="1783080" cy="1828800"/>
+          </a:xfrm>
+          <a:prstGeom prst="rect">
+            <a:avLst/>
+          </a:prstGeom>
+          <a:noFill/>
+        </p:spPr>
+        <p:txBody>
+          <a:bodyPr wrap="square" anchor="t" lIns="0" rIns="0" tIns="0" bIns="0">
+            <a:spAutoFit/>
+          </a:bodyPr>
+          <a:lstStyle/>
+          <a:p>
+            <a:pPr algn="l"/>
+            <a:r>
+              <a:rPr sz="950" b="0">
+                <a:solidFill>
+                  <a:srgbClr val="1B2A41"/>
+                </a:solidFill>
+              </a:rPr>
+              <a:t>ControllerView loads everything into one transparent data structure. The same loan is loaded once and reused in every return.</a:t>
+            </a:r>
+          </a:p>
+        </p:txBody>
+      </p:sp>
+      <p:sp>
+        <p:nvSpPr>
+          <p:cNvPr id="14" name="TextBox 13"/>
+          <p:cNvSpPr txBox="1"/>
+          <p:nvPr/>
+        </p:nvSpPr>
+        <p:spPr>
+          <a:xfrm>
+            <a:off x="4901183" y="2514600"/>
+            <a:ext cx="146304" cy="310896"/>
+          </a:xfrm>
+          <a:prstGeom prst="rect">
+            <a:avLst/>
+          </a:prstGeom>
+          <a:noFill/>
+        </p:spPr>
+        <p:txBody>
+          <a:bodyPr wrap="square" anchor="ctr" lIns="0" rIns="0" tIns="0" bIns="0">
+            <a:spAutoFit/>
+          </a:bodyPr>
+          <a:lstStyle/>
+          <a:p>
+            <a:pPr algn="ctr"/>
+            <a:r>
+              <a:rPr sz="1300" b="1">
                 <a:solidFill>
                   <a:srgbClr val="C9A227"/>
                 </a:solidFill>
               </a:rPr>
-              <a:t>▪  </a:t>
-            </a:r>
-            <a:r>
-              <a:rPr sz="1000" b="0">
-                <a:solidFill>
-                  <a:srgbClr val="1B2A41"/>
-                </a:solidFill>
-              </a:rPr>
-              <a:t>Real data: ICICI Bank's published capital and leverage figures, March 2025</a:t>
-            </a:r>
-          </a:p>
-        </p:txBody>
-      </p:sp>
-      <p:sp>
-        <p:nvSpPr>
-          <p:cNvPr id="12" name="TextBox 11"/>
-          <p:cNvSpPr txBox="1"/>
-          <p:nvPr/>
-        </p:nvSpPr>
-        <p:spPr>
-          <a:xfrm>
-            <a:off x="804672" y="3913632"/>
-            <a:ext cx="3099816" cy="493776"/>
-          </a:xfrm>
-          <a:prstGeom prst="rect">
-            <a:avLst/>
-          </a:prstGeom>
-          <a:noFill/>
-        </p:spPr>
-        <p:txBody>
-          <a:bodyPr wrap="square" anchor="t" lIns="0" rIns="0" tIns="0" bIns="0">
-            <a:spAutoFit/>
-          </a:bodyPr>
-          <a:lstStyle/>
-          <a:p>
-            <a:pPr algn="l"/>
-            <a:r>
-              <a:rPr sz="1000" b="1">
-                <a:solidFill>
-                  <a:srgbClr val="C9A227"/>
-                </a:solidFill>
-              </a:rPr>
-              <a:t>▪  </a:t>
-            </a:r>
-            <a:r>
-              <a:rPr sz="1000" b="0">
-                <a:solidFill>
-                  <a:srgbClr val="1B2A41"/>
-                </a:solidFill>
-              </a:rPr>
-              <a:t>Six ratios, each one division</a:t>
-            </a:r>
-          </a:p>
-        </p:txBody>
-      </p:sp>
-      <p:sp>
-        <p:nvSpPr>
-          <p:cNvPr id="13" name="TextBox 12"/>
-          <p:cNvSpPr txBox="1"/>
-          <p:nvPr/>
-        </p:nvSpPr>
-        <p:spPr>
-          <a:xfrm>
-            <a:off x="804672" y="4425696"/>
-            <a:ext cx="3099816" cy="493776"/>
-          </a:xfrm>
-          <a:prstGeom prst="rect">
-            <a:avLst/>
-          </a:prstGeom>
-          <a:noFill/>
-        </p:spPr>
-        <p:txBody>
-          <a:bodyPr wrap="square" anchor="t" lIns="0" rIns="0" tIns="0" bIns="0">
-            <a:spAutoFit/>
-          </a:bodyPr>
-          <a:lstStyle/>
-          <a:p>
-            <a:pPr algn="l"/>
-            <a:r>
-              <a:rPr sz="1000" b="1">
-                <a:solidFill>
-                  <a:srgbClr val="C9A227"/>
-                </a:solidFill>
-              </a:rPr>
-              <a:t>▪  </a:t>
-            </a:r>
-            <a:r>
-              <a:rPr sz="1000" b="0">
-                <a:solidFill>
-                  <a:srgbClr val="1B2A41"/>
-                </a:solidFill>
-              </a:rPr>
-              <a:t>Each ratio next to the RBI floor with buffers</a:t>
-            </a:r>
-          </a:p>
-        </p:txBody>
-      </p:sp>
-      <p:sp>
-        <p:nvSpPr>
-          <p:cNvPr id="14" name="TextBox 13"/>
-          <p:cNvSpPr txBox="1"/>
-          <p:nvPr/>
-        </p:nvSpPr>
-        <p:spPr>
-          <a:xfrm>
-            <a:off x="804672" y="4937760"/>
-            <a:ext cx="3099816" cy="493776"/>
-          </a:xfrm>
-          <a:prstGeom prst="rect">
-            <a:avLst/>
-          </a:prstGeom>
-          <a:noFill/>
-        </p:spPr>
-        <p:txBody>
-          <a:bodyPr wrap="square" anchor="t" lIns="0" rIns="0" tIns="0" bIns="0">
-            <a:spAutoFit/>
-          </a:bodyPr>
-          <a:lstStyle/>
-          <a:p>
-            <a:pPr algn="l"/>
-            <a:r>
-              <a:rPr sz="1000" b="1">
-                <a:solidFill>
-                  <a:srgbClr val="C9A227"/>
-                </a:solidFill>
-              </a:rPr>
-              <a:t>▪  </a:t>
-            </a:r>
-            <a:r>
-              <a:rPr sz="1000" b="0">
-                <a:solidFill>
-                  <a:srgbClr val="1B2A41"/>
-                </a:solidFill>
-              </a:rPr>
-              <a:t>A Word document in the RBI table layout, written by python-docx</a:t>
+              <a:t>→</a:t>
             </a:r>
           </a:p>
         </p:txBody>
@@ -7514,8 +7443,8 @@
         </p:nvSpPr>
         <p:spPr>
           <a:xfrm>
-            <a:off x="4315968" y="2359152"/>
-            <a:ext cx="3611880" cy="3054096"/>
+            <a:off x="5047488" y="1481328"/>
+            <a:ext cx="2103120" cy="2103120"/>
           </a:xfrm>
           <a:prstGeom prst="rect">
             <a:avLst/>
@@ -7552,69 +7481,78 @@
       </p:sp>
       <p:sp>
         <p:nvSpPr>
-          <p:cNvPr id="16" name="TextBox 15"/>
-          <p:cNvSpPr txBox="1"/>
-          <p:nvPr/>
-        </p:nvSpPr>
-        <p:spPr>
-          <a:xfrm>
-            <a:off x="4572000" y="2560320"/>
-            <a:ext cx="3099816" cy="274320"/>
-          </a:xfrm>
-          <a:prstGeom prst="rect">
-            <a:avLst/>
-          </a:prstGeom>
-          <a:noFill/>
-        </p:spPr>
-        <p:txBody>
-          <a:bodyPr wrap="square" anchor="t" lIns="0" rIns="0" tIns="0" bIns="0">
-            <a:spAutoFit/>
-          </a:bodyPr>
-          <a:lstStyle/>
-          <a:p>
-            <a:pPr algn="l"/>
-            <a:r>
-              <a:rPr sz="950" b="1">
+          <p:cNvPr id="16" name="Rectangle 15"/>
+          <p:cNvSpPr/>
+          <p:nvPr/>
+        </p:nvSpPr>
+        <p:spPr>
+          <a:xfrm>
+            <a:off x="5047488" y="1481328"/>
+            <a:ext cx="2103120" cy="54864"/>
+          </a:xfrm>
+          <a:prstGeom prst="rect">
+            <a:avLst/>
+          </a:prstGeom>
+          <a:solidFill>
+            <a:srgbClr val="C9A227"/>
+          </a:solidFill>
+          <a:ln>
+            <a:noFill/>
+          </a:ln>
+          <a:effectLst/>
+        </p:spPr>
+        <p:style>
+          <a:lnRef idx="1">
+            <a:schemeClr val="accent1"/>
+          </a:lnRef>
+          <a:fillRef idx="3">
+            <a:schemeClr val="accent1"/>
+          </a:fillRef>
+          <a:effectRef idx="2">
+            <a:schemeClr val="accent1"/>
+          </a:effectRef>
+          <a:fontRef idx="minor">
+            <a:schemeClr val="lt1"/>
+          </a:fontRef>
+        </p:style>
+        <p:txBody>
+          <a:bodyPr rtlCol="0" anchor="ctr"/>
+          <a:lstStyle/>
+          <a:p>
+            <a:pPr algn="ctr"/>
+          </a:p>
+        </p:txBody>
+      </p:sp>
+      <p:sp>
+        <p:nvSpPr>
+          <p:cNvPr id="17" name="TextBox 16"/>
+          <p:cNvSpPr txBox="1"/>
+          <p:nvPr/>
+        </p:nvSpPr>
+        <p:spPr>
+          <a:xfrm>
+            <a:off x="5230368" y="1682496"/>
+            <a:ext cx="1783080" cy="274320"/>
+          </a:xfrm>
+          <a:prstGeom prst="rect">
+            <a:avLst/>
+          </a:prstGeom>
+          <a:noFill/>
+        </p:spPr>
+        <p:txBody>
+          <a:bodyPr wrap="square" anchor="t" lIns="0" rIns="0" tIns="0" bIns="0">
+            <a:spAutoFit/>
+          </a:bodyPr>
+          <a:lstStyle/>
+          <a:p>
+            <a:pPr algn="l"/>
+            <a:r>
+              <a:rPr sz="900" b="1">
                 <a:solidFill>
                   <a:srgbClr val="3A5C9E"/>
                 </a:solidFill>
               </a:rPr>
-              <a:t>PART B  ·  15 MIN</a:t>
-            </a:r>
-          </a:p>
-        </p:txBody>
-      </p:sp>
-      <p:sp>
-        <p:nvSpPr>
-          <p:cNvPr id="17" name="TextBox 16"/>
-          <p:cNvSpPr txBox="1"/>
-          <p:nvPr/>
-        </p:nvSpPr>
-        <p:spPr>
-          <a:xfrm>
-            <a:off x="4572000" y="2871216"/>
-            <a:ext cx="3099816" cy="402336"/>
-          </a:xfrm>
-          <a:prstGeom prst="rect">
-            <a:avLst/>
-          </a:prstGeom>
-          <a:noFill/>
-        </p:spPr>
-        <p:txBody>
-          <a:bodyPr wrap="square" anchor="t" lIns="0" rIns="0" tIns="0" bIns="0">
-            <a:spAutoFit/>
-          </a:bodyPr>
-          <a:lstStyle/>
-          <a:p>
-            <a:pPr algn="l"/>
-            <a:r>
-              <a:rPr sz="1700" b="1">
-                <a:solidFill>
-                  <a:srgbClr val="0F2145"/>
-                </a:solidFill>
-                <a:latin typeface="Georgia"/>
-              </a:rPr>
-              <a:t>Check it</a:t>
+              <a:t>3  CALCULATE</a:t>
             </a:r>
           </a:p>
         </p:txBody>
@@ -7627,176 +7565,266 @@
         </p:nvSpPr>
         <p:spPr>
           <a:xfrm>
-            <a:off x="4572000" y="3401568"/>
-            <a:ext cx="3099816" cy="493776"/>
-          </a:xfrm>
-          <a:prstGeom prst="rect">
-            <a:avLst/>
-          </a:prstGeom>
-          <a:noFill/>
-        </p:spPr>
-        <p:txBody>
-          <a:bodyPr wrap="square" anchor="t" lIns="0" rIns="0" tIns="0" bIns="0">
-            <a:spAutoFit/>
-          </a:bodyPr>
-          <a:lstStyle/>
-          <a:p>
-            <a:pPr algn="l"/>
-            <a:r>
-              <a:rPr sz="1000" b="1">
+            <a:off x="5230368" y="1993392"/>
+            <a:ext cx="1783080" cy="1828800"/>
+          </a:xfrm>
+          <a:prstGeom prst="rect">
+            <a:avLst/>
+          </a:prstGeom>
+          <a:noFill/>
+        </p:spPr>
+        <p:txBody>
+          <a:bodyPr wrap="square" anchor="t" lIns="0" rIns="0" tIns="0" bIns="0">
+            <a:spAutoFit/>
+          </a:bodyPr>
+          <a:lstStyle/>
+          <a:p>
+            <a:pPr algn="l"/>
+            <a:r>
+              <a:rPr sz="950" b="0">
+                <a:solidFill>
+                  <a:srgbClr val="1B2A41"/>
+                </a:solidFill>
+              </a:rPr>
+              <a:t>Credit, market and operational risk capital. Capital buffers. LCR and NSFR. Large exposures. Stress scenarios on capital and liquidity.</a:t>
+            </a:r>
+          </a:p>
+        </p:txBody>
+      </p:sp>
+      <p:sp>
+        <p:nvSpPr>
+          <p:cNvPr id="19" name="TextBox 18"/>
+          <p:cNvSpPr txBox="1"/>
+          <p:nvPr/>
+        </p:nvSpPr>
+        <p:spPr>
+          <a:xfrm>
+            <a:off x="7150607" y="2514600"/>
+            <a:ext cx="146304" cy="310896"/>
+          </a:xfrm>
+          <a:prstGeom prst="rect">
+            <a:avLst/>
+          </a:prstGeom>
+          <a:noFill/>
+        </p:spPr>
+        <p:txBody>
+          <a:bodyPr wrap="square" anchor="ctr" lIns="0" rIns="0" tIns="0" bIns="0">
+            <a:spAutoFit/>
+          </a:bodyPr>
+          <a:lstStyle/>
+          <a:p>
+            <a:pPr algn="ctr"/>
+            <a:r>
+              <a:rPr sz="1300" b="1">
                 <a:solidFill>
                   <a:srgbClr val="C9A227"/>
                 </a:solidFill>
               </a:rPr>
-              <a:t>▪  </a:t>
-            </a:r>
-            <a:r>
-              <a:rPr sz="1000" b="0">
+              <a:t>→</a:t>
+            </a:r>
+          </a:p>
+        </p:txBody>
+      </p:sp>
+      <p:sp>
+        <p:nvSpPr>
+          <p:cNvPr id="20" name="Rectangle 19"/>
+          <p:cNvSpPr/>
+          <p:nvPr/>
+        </p:nvSpPr>
+        <p:spPr>
+          <a:xfrm>
+            <a:off x="7296912" y="1481328"/>
+            <a:ext cx="2103120" cy="2103120"/>
+          </a:xfrm>
+          <a:prstGeom prst="rect">
+            <a:avLst/>
+          </a:prstGeom>
+          <a:solidFill>
+            <a:srgbClr val="FFFFFF"/>
+          </a:solidFill>
+          <a:ln>
+            <a:noFill/>
+          </a:ln>
+          <a:effectLst/>
+        </p:spPr>
+        <p:style>
+          <a:lnRef idx="1">
+            <a:schemeClr val="accent1"/>
+          </a:lnRef>
+          <a:fillRef idx="3">
+            <a:schemeClr val="accent1"/>
+          </a:fillRef>
+          <a:effectRef idx="2">
+            <a:schemeClr val="accent1"/>
+          </a:effectRef>
+          <a:fontRef idx="minor">
+            <a:schemeClr val="lt1"/>
+          </a:fontRef>
+        </p:style>
+        <p:txBody>
+          <a:bodyPr rtlCol="0" anchor="ctr"/>
+          <a:lstStyle/>
+          <a:p>
+            <a:pPr algn="ctr"/>
+          </a:p>
+        </p:txBody>
+      </p:sp>
+      <p:sp>
+        <p:nvSpPr>
+          <p:cNvPr id="21" name="Rectangle 20"/>
+          <p:cNvSpPr/>
+          <p:nvPr/>
+        </p:nvSpPr>
+        <p:spPr>
+          <a:xfrm>
+            <a:off x="7296912" y="1481328"/>
+            <a:ext cx="2103120" cy="54864"/>
+          </a:xfrm>
+          <a:prstGeom prst="rect">
+            <a:avLst/>
+          </a:prstGeom>
+          <a:solidFill>
+            <a:srgbClr val="C9A227"/>
+          </a:solidFill>
+          <a:ln>
+            <a:noFill/>
+          </a:ln>
+          <a:effectLst/>
+        </p:spPr>
+        <p:style>
+          <a:lnRef idx="1">
+            <a:schemeClr val="accent1"/>
+          </a:lnRef>
+          <a:fillRef idx="3">
+            <a:schemeClr val="accent1"/>
+          </a:fillRef>
+          <a:effectRef idx="2">
+            <a:schemeClr val="accent1"/>
+          </a:effectRef>
+          <a:fontRef idx="minor">
+            <a:schemeClr val="lt1"/>
+          </a:fontRef>
+        </p:style>
+        <p:txBody>
+          <a:bodyPr rtlCol="0" anchor="ctr"/>
+          <a:lstStyle/>
+          <a:p>
+            <a:pPr algn="ctr"/>
+          </a:p>
+        </p:txBody>
+      </p:sp>
+      <p:sp>
+        <p:nvSpPr>
+          <p:cNvPr id="22" name="TextBox 21"/>
+          <p:cNvSpPr txBox="1"/>
+          <p:nvPr/>
+        </p:nvSpPr>
+        <p:spPr>
+          <a:xfrm>
+            <a:off x="7479792" y="1682496"/>
+            <a:ext cx="1783080" cy="274320"/>
+          </a:xfrm>
+          <a:prstGeom prst="rect">
+            <a:avLst/>
+          </a:prstGeom>
+          <a:noFill/>
+        </p:spPr>
+        <p:txBody>
+          <a:bodyPr wrap="square" anchor="t" lIns="0" rIns="0" tIns="0" bIns="0">
+            <a:spAutoFit/>
+          </a:bodyPr>
+          <a:lstStyle/>
+          <a:p>
+            <a:pPr algn="l"/>
+            <a:r>
+              <a:rPr sz="900" b="1">
+                <a:solidFill>
+                  <a:srgbClr val="3A5C9E"/>
+                </a:solidFill>
+              </a:rPr>
+              <a:t>4  TEMPLATES AND CHECKS</a:t>
+            </a:r>
+          </a:p>
+        </p:txBody>
+      </p:sp>
+      <p:sp>
+        <p:nvSpPr>
+          <p:cNvPr id="23" name="TextBox 22"/>
+          <p:cNvSpPr txBox="1"/>
+          <p:nvPr/>
+        </p:nvSpPr>
+        <p:spPr>
+          <a:xfrm>
+            <a:off x="7479792" y="1993392"/>
+            <a:ext cx="1783080" cy="1828800"/>
+          </a:xfrm>
+          <a:prstGeom prst="rect">
+            <a:avLst/>
+          </a:prstGeom>
+          <a:noFill/>
+        </p:spPr>
+        <p:txBody>
+          <a:bodyPr wrap="square" anchor="t" lIns="0" rIns="0" tIns="0" bIns="0">
+            <a:spAutoFit/>
+          </a:bodyPr>
+          <a:lstStyle/>
+          <a:p>
+            <a:pPr algn="l"/>
+            <a:r>
+              <a:rPr sz="950" b="0">
                 <a:solidFill>
                   <a:srgbClr val="1B2A41"/>
                 </a:solidFill>
               </a:rPr>
-              <a:t>The bank printed its own ratios: 15.81, 15.81, 16.41 and 10.37</a:t>
-            </a:r>
-          </a:p>
-        </p:txBody>
-      </p:sp>
-      <p:sp>
-        <p:nvSpPr>
-          <p:cNvPr id="19" name="TextBox 18"/>
-          <p:cNvSpPr txBox="1"/>
-          <p:nvPr/>
-        </p:nvSpPr>
-        <p:spPr>
-          <a:xfrm>
-            <a:off x="4572000" y="3913632"/>
-            <a:ext cx="3099816" cy="493776"/>
-          </a:xfrm>
-          <a:prstGeom prst="rect">
-            <a:avLst/>
-          </a:prstGeom>
-          <a:noFill/>
-        </p:spPr>
-        <p:txBody>
-          <a:bodyPr wrap="square" anchor="t" lIns="0" rIns="0" tIns="0" bIns="0">
-            <a:spAutoFit/>
-          </a:bodyPr>
-          <a:lstStyle/>
-          <a:p>
-            <a:pPr algn="l"/>
-            <a:r>
-              <a:rPr sz="1000" b="1">
+              <a:t>COREP, FINREP, LCR, NSFR, large exposures and leverage in the EBA XBRL taxonomy. The EBA validation rules run before anything is filed.</a:t>
+            </a:r>
+          </a:p>
+        </p:txBody>
+      </p:sp>
+      <p:sp>
+        <p:nvSpPr>
+          <p:cNvPr id="24" name="TextBox 23"/>
+          <p:cNvSpPr txBox="1"/>
+          <p:nvPr/>
+        </p:nvSpPr>
+        <p:spPr>
+          <a:xfrm>
+            <a:off x="9400032" y="2514600"/>
+            <a:ext cx="146304" cy="310896"/>
+          </a:xfrm>
+          <a:prstGeom prst="rect">
+            <a:avLst/>
+          </a:prstGeom>
+          <a:noFill/>
+        </p:spPr>
+        <p:txBody>
+          <a:bodyPr wrap="square" anchor="ctr" lIns="0" rIns="0" tIns="0" bIns="0">
+            <a:spAutoFit/>
+          </a:bodyPr>
+          <a:lstStyle/>
+          <a:p>
+            <a:pPr algn="ctr"/>
+            <a:r>
+              <a:rPr sz="1300" b="1">
                 <a:solidFill>
                   <a:srgbClr val="C9A227"/>
                 </a:solidFill>
               </a:rPr>
-              <a:t>▪  </a:t>
-            </a:r>
-            <a:r>
-              <a:rPr sz="1000" b="0">
-                <a:solidFill>
-                  <a:srgbClr val="1B2A41"/>
-                </a:solidFill>
-              </a:rPr>
-              <a:t>Your document must land on the same four numbers</a:t>
-            </a:r>
-          </a:p>
-        </p:txBody>
-      </p:sp>
-      <p:sp>
-        <p:nvSpPr>
-          <p:cNvPr id="20" name="TextBox 19"/>
-          <p:cNvSpPr txBox="1"/>
-          <p:nvPr/>
-        </p:nvSpPr>
-        <p:spPr>
-          <a:xfrm>
-            <a:off x="4572000" y="4425696"/>
-            <a:ext cx="3099816" cy="493776"/>
-          </a:xfrm>
-          <a:prstGeom prst="rect">
-            <a:avLst/>
-          </a:prstGeom>
-          <a:noFill/>
-        </p:spPr>
-        <p:txBody>
-          <a:bodyPr wrap="square" anchor="t" lIns="0" rIns="0" tIns="0" bIns="0">
-            <a:spAutoFit/>
-          </a:bodyPr>
-          <a:lstStyle/>
-          <a:p>
-            <a:pPr algn="l"/>
-            <a:r>
-              <a:rPr sz="1000" b="1">
-                <a:solidFill>
-                  <a:srgbClr val="C9A227"/>
-                </a:solidFill>
-              </a:rPr>
-              <a:t>▪  </a:t>
-            </a:r>
-            <a:r>
-              <a:rPr sz="1000" b="0">
-                <a:solidFill>
-                  <a:srgbClr val="1B2A41"/>
-                </a:solidFill>
-              </a:rPr>
-              <a:t>A mismatch means a wrong input or a wrong formula</a:t>
-            </a:r>
-          </a:p>
-        </p:txBody>
-      </p:sp>
-      <p:sp>
-        <p:nvSpPr>
-          <p:cNvPr id="21" name="TextBox 20"/>
-          <p:cNvSpPr txBox="1"/>
-          <p:nvPr/>
-        </p:nvSpPr>
-        <p:spPr>
-          <a:xfrm>
-            <a:off x="4572000" y="4937760"/>
-            <a:ext cx="3099816" cy="493776"/>
-          </a:xfrm>
-          <a:prstGeom prst="rect">
-            <a:avLst/>
-          </a:prstGeom>
-          <a:noFill/>
-        </p:spPr>
-        <p:txBody>
-          <a:bodyPr wrap="square" anchor="t" lIns="0" rIns="0" tIns="0" bIns="0">
-            <a:spAutoFit/>
-          </a:bodyPr>
-          <a:lstStyle/>
-          <a:p>
-            <a:pPr algn="l"/>
-            <a:r>
-              <a:rPr sz="1000" b="1">
-                <a:solidFill>
-                  <a:srgbClr val="C9A227"/>
-                </a:solidFill>
-              </a:rPr>
-              <a:t>▪  </a:t>
-            </a:r>
-            <a:r>
-              <a:rPr sz="1000" b="0">
-                <a:solidFill>
-                  <a:srgbClr val="1B2A41"/>
-                </a:solidFill>
-              </a:rPr>
-              <a:t>A document that does not reconcile is not issued</a:t>
-            </a:r>
-          </a:p>
-        </p:txBody>
-      </p:sp>
-      <p:sp>
-        <p:nvSpPr>
-          <p:cNvPr id="22" name="Rectangle 21"/>
+              <a:t>→</a:t>
+            </a:r>
+          </a:p>
+        </p:txBody>
+      </p:sp>
+      <p:sp>
+        <p:nvSpPr>
+          <p:cNvPr id="25" name="Rectangle 24"/>
           <p:cNvSpPr/>
           <p:nvPr/>
         </p:nvSpPr>
         <p:spPr>
           <a:xfrm>
-            <a:off x="8083296" y="2359152"/>
-            <a:ext cx="3557016" cy="3054096"/>
+            <a:off x="9546336" y="1481328"/>
+            <a:ext cx="2103120" cy="2103120"/>
           </a:xfrm>
           <a:prstGeom prst="rect">
             <a:avLst/>
@@ -7833,14 +7861,214 @@
       </p:sp>
       <p:sp>
         <p:nvSpPr>
-          <p:cNvPr id="23" name="TextBox 22"/>
-          <p:cNvSpPr txBox="1"/>
-          <p:nvPr/>
-        </p:nvSpPr>
-        <p:spPr>
-          <a:xfrm>
-            <a:off x="8339327" y="2560320"/>
-            <a:ext cx="3044952" cy="274320"/>
+          <p:cNvPr id="26" name="Rectangle 25"/>
+          <p:cNvSpPr/>
+          <p:nvPr/>
+        </p:nvSpPr>
+        <p:spPr>
+          <a:xfrm>
+            <a:off x="9546336" y="1481328"/>
+            <a:ext cx="2103120" cy="54864"/>
+          </a:xfrm>
+          <a:prstGeom prst="rect">
+            <a:avLst/>
+          </a:prstGeom>
+          <a:solidFill>
+            <a:srgbClr val="C9A227"/>
+          </a:solidFill>
+          <a:ln>
+            <a:noFill/>
+          </a:ln>
+          <a:effectLst/>
+        </p:spPr>
+        <p:style>
+          <a:lnRef idx="1">
+            <a:schemeClr val="accent1"/>
+          </a:lnRef>
+          <a:fillRef idx="3">
+            <a:schemeClr val="accent1"/>
+          </a:fillRef>
+          <a:effectRef idx="2">
+            <a:schemeClr val="accent1"/>
+          </a:effectRef>
+          <a:fontRef idx="minor">
+            <a:schemeClr val="lt1"/>
+          </a:fontRef>
+        </p:style>
+        <p:txBody>
+          <a:bodyPr rtlCol="0" anchor="ctr"/>
+          <a:lstStyle/>
+          <a:p>
+            <a:pPr algn="ctr"/>
+          </a:p>
+        </p:txBody>
+      </p:sp>
+      <p:sp>
+        <p:nvSpPr>
+          <p:cNvPr id="27" name="TextBox 26"/>
+          <p:cNvSpPr txBox="1"/>
+          <p:nvPr/>
+        </p:nvSpPr>
+        <p:spPr>
+          <a:xfrm>
+            <a:off x="9729215" y="1682496"/>
+            <a:ext cx="1783080" cy="274320"/>
+          </a:xfrm>
+          <a:prstGeom prst="rect">
+            <a:avLst/>
+          </a:prstGeom>
+          <a:noFill/>
+        </p:spPr>
+        <p:txBody>
+          <a:bodyPr wrap="square" anchor="t" lIns="0" rIns="0" tIns="0" bIns="0">
+            <a:spAutoFit/>
+          </a:bodyPr>
+          <a:lstStyle/>
+          <a:p>
+            <a:pPr algn="l"/>
+            <a:r>
+              <a:rPr sz="900" b="1">
+                <a:solidFill>
+                  <a:srgbClr val="C9A227"/>
+                </a:solidFill>
+              </a:rPr>
+              <a:t>5  FILE AND PROVE</a:t>
+            </a:r>
+          </a:p>
+        </p:txBody>
+      </p:sp>
+      <p:sp>
+        <p:nvSpPr>
+          <p:cNvPr id="28" name="TextBox 27"/>
+          <p:cNvSpPr txBox="1"/>
+          <p:nvPr/>
+        </p:nvSpPr>
+        <p:spPr>
+          <a:xfrm>
+            <a:off x="9729215" y="1993392"/>
+            <a:ext cx="1783080" cy="1828800"/>
+          </a:xfrm>
+          <a:prstGeom prst="rect">
+            <a:avLst/>
+          </a:prstGeom>
+          <a:noFill/>
+        </p:spPr>
+        <p:txBody>
+          <a:bodyPr wrap="square" anchor="t" lIns="0" rIns="0" tIns="0" bIns="0">
+            <a:spAutoFit/>
+          </a:bodyPr>
+          <a:lstStyle/>
+          <a:p>
+            <a:pPr algn="l"/>
+            <a:r>
+              <a:rPr sz="950" b="0">
+                <a:solidFill>
+                  <a:srgbClr val="C9D6EE"/>
+                </a:solidFill>
+              </a:rPr>
+              <a:t>The XBRL file goes to the regulator. Any cell drills down to the source rows. Sign-off workflow and audit trail on every number.</a:t>
+            </a:r>
+          </a:p>
+        </p:txBody>
+      </p:sp>
+      <p:sp>
+        <p:nvSpPr>
+          <p:cNvPr id="29" name="Rectangle 28"/>
+          <p:cNvSpPr/>
+          <p:nvPr/>
+        </p:nvSpPr>
+        <p:spPr>
+          <a:xfrm>
+            <a:off x="548640" y="3767328"/>
+            <a:ext cx="5422392" cy="1792224"/>
+          </a:xfrm>
+          <a:prstGeom prst="rect">
+            <a:avLst/>
+          </a:prstGeom>
+          <a:solidFill>
+            <a:srgbClr val="FFFFFF"/>
+          </a:solidFill>
+          <a:ln>
+            <a:noFill/>
+          </a:ln>
+          <a:effectLst/>
+        </p:spPr>
+        <p:style>
+          <a:lnRef idx="1">
+            <a:schemeClr val="accent1"/>
+          </a:lnRef>
+          <a:fillRef idx="3">
+            <a:schemeClr val="accent1"/>
+          </a:fillRef>
+          <a:effectRef idx="2">
+            <a:schemeClr val="accent1"/>
+          </a:effectRef>
+          <a:fontRef idx="minor">
+            <a:schemeClr val="lt1"/>
+          </a:fontRef>
+        </p:style>
+        <p:txBody>
+          <a:bodyPr rtlCol="0" anchor="ctr"/>
+          <a:lstStyle/>
+          <a:p>
+            <a:pPr algn="ctr"/>
+          </a:p>
+        </p:txBody>
+      </p:sp>
+      <p:sp>
+        <p:nvSpPr>
+          <p:cNvPr id="30" name="Rectangle 29"/>
+          <p:cNvSpPr/>
+          <p:nvPr/>
+        </p:nvSpPr>
+        <p:spPr>
+          <a:xfrm>
+            <a:off x="548640" y="3767328"/>
+            <a:ext cx="64008" cy="1792224"/>
+          </a:xfrm>
+          <a:prstGeom prst="rect">
+            <a:avLst/>
+          </a:prstGeom>
+          <a:solidFill>
+            <a:srgbClr val="C9A227"/>
+          </a:solidFill>
+          <a:ln>
+            <a:noFill/>
+          </a:ln>
+          <a:effectLst/>
+        </p:spPr>
+        <p:style>
+          <a:lnRef idx="1">
+            <a:schemeClr val="accent1"/>
+          </a:lnRef>
+          <a:fillRef idx="3">
+            <a:schemeClr val="accent1"/>
+          </a:fillRef>
+          <a:effectRef idx="2">
+            <a:schemeClr val="accent1"/>
+          </a:effectRef>
+          <a:fontRef idx="minor">
+            <a:schemeClr val="lt1"/>
+          </a:fontRef>
+        </p:style>
+        <p:txBody>
+          <a:bodyPr rtlCol="0" anchor="ctr"/>
+          <a:lstStyle/>
+          <a:p>
+            <a:pPr algn="ctr"/>
+          </a:p>
+        </p:txBody>
+      </p:sp>
+      <p:sp>
+        <p:nvSpPr>
+          <p:cNvPr id="31" name="TextBox 30"/>
+          <p:cNvSpPr txBox="1"/>
+          <p:nvPr/>
+        </p:nvSpPr>
+        <p:spPr>
+          <a:xfrm>
+            <a:off x="868680" y="3913632"/>
+            <a:ext cx="4937760" cy="1554480"/>
           </a:xfrm>
           <a:prstGeom prst="rect">
             <a:avLst/>
@@ -7857,220 +8085,184 @@
             <a:r>
               <a:rPr sz="950" b="1">
                 <a:solidFill>
-                  <a:srgbClr val="C9A227"/>
-                </a:solidFill>
-              </a:rPr>
-              <a:t>PART C  ·  15 MIN</a:t>
-            </a:r>
-          </a:p>
-        </p:txBody>
-      </p:sp>
-      <p:sp>
-        <p:nvSpPr>
-          <p:cNvPr id="24" name="TextBox 23"/>
-          <p:cNvSpPr txBox="1"/>
-          <p:nvPr/>
-        </p:nvSpPr>
-        <p:spPr>
-          <a:xfrm>
-            <a:off x="8339327" y="2871216"/>
-            <a:ext cx="3044952" cy="402336"/>
-          </a:xfrm>
-          <a:prstGeom prst="rect">
-            <a:avLst/>
-          </a:prstGeom>
-          <a:noFill/>
-        </p:spPr>
-        <p:txBody>
-          <a:bodyPr wrap="square" anchor="t" lIns="0" rIns="0" tIns="0" bIns="0">
-            <a:spAutoFit/>
-          </a:bodyPr>
-          <a:lstStyle/>
-          <a:p>
-            <a:pPr algn="l"/>
-            <a:r>
-              <a:rPr sz="1700" b="1">
-                <a:solidFill>
-                  <a:srgbClr val="FFFFFF"/>
-                </a:solidFill>
-                <a:latin typeface="Georgia"/>
-              </a:rPr>
-              <a:t>Review it</a:t>
-            </a:r>
-          </a:p>
-        </p:txBody>
-      </p:sp>
-      <p:sp>
-        <p:nvSpPr>
-          <p:cNvPr id="25" name="TextBox 24"/>
-          <p:cNvSpPr txBox="1"/>
-          <p:nvPr/>
-        </p:nvSpPr>
-        <p:spPr>
-          <a:xfrm>
-            <a:off x="8339327" y="3401568"/>
-            <a:ext cx="3044952" cy="493776"/>
-          </a:xfrm>
-          <a:prstGeom prst="rect">
-            <a:avLst/>
-          </a:prstGeom>
-          <a:noFill/>
-        </p:spPr>
-        <p:txBody>
-          <a:bodyPr wrap="square" anchor="t" lIns="0" rIns="0" tIns="0" bIns="0">
-            <a:spAutoFit/>
-          </a:bodyPr>
-          <a:lstStyle/>
-          <a:p>
-            <a:pPr algn="l"/>
-            <a:r>
-              <a:rPr sz="1000" b="1">
-                <a:solidFill>
-                  <a:srgbClr val="C9A227"/>
-                </a:solidFill>
-              </a:rPr>
-              <a:t>▪  </a:t>
-            </a:r>
+                  <a:srgbClr val="3A5C9E"/>
+                </a:solidFill>
+              </a:rPr>
+              <a:t>WHEN THE RULE CHANGES</a:t>
+            </a:r>
+          </a:p>
+          <a:p>
+            <a:pPr algn="l">
+              <a:spcBef>
+                <a:spcPts val="400"/>
+              </a:spcBef>
+            </a:pPr>
             <a:r>
               <a:rPr sz="1000" b="0">
                 <a:solidFill>
-                  <a:srgbClr val="C9D6EE"/>
-                </a:solidFill>
-              </a:rPr>
-              <a:t>Swap documents with the next desk</a:t>
-            </a:r>
-          </a:p>
-        </p:txBody>
-      </p:sp>
-      <p:sp>
-        <p:nvSpPr>
-          <p:cNvPr id="26" name="TextBox 25"/>
-          <p:cNvSpPr txBox="1"/>
-          <p:nvPr/>
-        </p:nvSpPr>
-        <p:spPr>
-          <a:xfrm>
-            <a:off x="8339327" y="3913632"/>
-            <a:ext cx="3044952" cy="493776"/>
-          </a:xfrm>
-          <a:prstGeom prst="rect">
-            <a:avLst/>
-          </a:prstGeom>
-          <a:noFill/>
-        </p:spPr>
-        <p:txBody>
-          <a:bodyPr wrap="square" anchor="t" lIns="0" rIns="0" tIns="0" bIns="0">
-            <a:spAutoFit/>
-          </a:bodyPr>
-          <a:lstStyle/>
-          <a:p>
-            <a:pPr algn="l"/>
-            <a:r>
-              <a:rPr sz="1000" b="1">
-                <a:solidFill>
-                  <a:srgbClr val="C9A227"/>
-                </a:solidFill>
-              </a:rPr>
-              <a:t>▪  </a:t>
-            </a:r>
+                  <a:srgbClr val="1B2A41"/>
+                </a:solidFill>
+              </a:rPr>
+              <a:t>The EBA publishes a new taxonomy. The platform ships the updated templates and validation rules. The bank re-maps its data to the new cells. It does not rebuild its reporting.</a:t>
+            </a:r>
+          </a:p>
+        </p:txBody>
+      </p:sp>
+      <p:sp>
+        <p:nvSpPr>
+          <p:cNvPr id="32" name="Rectangle 31"/>
+          <p:cNvSpPr/>
+          <p:nvPr/>
+        </p:nvSpPr>
+        <p:spPr>
+          <a:xfrm>
+            <a:off x="6217920" y="3767328"/>
+            <a:ext cx="5422392" cy="1792224"/>
+          </a:xfrm>
+          <a:prstGeom prst="rect">
+            <a:avLst/>
+          </a:prstGeom>
+          <a:solidFill>
+            <a:srgbClr val="FFFFFF"/>
+          </a:solidFill>
+          <a:ln>
+            <a:noFill/>
+          </a:ln>
+          <a:effectLst/>
+        </p:spPr>
+        <p:style>
+          <a:lnRef idx="1">
+            <a:schemeClr val="accent1"/>
+          </a:lnRef>
+          <a:fillRef idx="3">
+            <a:schemeClr val="accent1"/>
+          </a:fillRef>
+          <a:effectRef idx="2">
+            <a:schemeClr val="accent1"/>
+          </a:effectRef>
+          <a:fontRef idx="minor">
+            <a:schemeClr val="lt1"/>
+          </a:fontRef>
+        </p:style>
+        <p:txBody>
+          <a:bodyPr rtlCol="0" anchor="ctr"/>
+          <a:lstStyle/>
+          <a:p>
+            <a:pPr algn="ctr"/>
+          </a:p>
+        </p:txBody>
+      </p:sp>
+      <p:sp>
+        <p:nvSpPr>
+          <p:cNvPr id="33" name="Rectangle 32"/>
+          <p:cNvSpPr/>
+          <p:nvPr/>
+        </p:nvSpPr>
+        <p:spPr>
+          <a:xfrm>
+            <a:off x="6217920" y="3767328"/>
+            <a:ext cx="64008" cy="1792224"/>
+          </a:xfrm>
+          <a:prstGeom prst="rect">
+            <a:avLst/>
+          </a:prstGeom>
+          <a:solidFill>
+            <a:srgbClr val="C9A227"/>
+          </a:solidFill>
+          <a:ln>
+            <a:noFill/>
+          </a:ln>
+          <a:effectLst/>
+        </p:spPr>
+        <p:style>
+          <a:lnRef idx="1">
+            <a:schemeClr val="accent1"/>
+          </a:lnRef>
+          <a:fillRef idx="3">
+            <a:schemeClr val="accent1"/>
+          </a:fillRef>
+          <a:effectRef idx="2">
+            <a:schemeClr val="accent1"/>
+          </a:effectRef>
+          <a:fontRef idx="minor">
+            <a:schemeClr val="lt1"/>
+          </a:fontRef>
+        </p:style>
+        <p:txBody>
+          <a:bodyPr rtlCol="0" anchor="ctr"/>
+          <a:lstStyle/>
+          <a:p>
+            <a:pPr algn="ctr"/>
+          </a:p>
+        </p:txBody>
+      </p:sp>
+      <p:sp>
+        <p:nvSpPr>
+          <p:cNvPr id="34" name="TextBox 33"/>
+          <p:cNvSpPr txBox="1"/>
+          <p:nvPr/>
+        </p:nvSpPr>
+        <p:spPr>
+          <a:xfrm>
+            <a:off x="6537960" y="3913632"/>
+            <a:ext cx="4937760" cy="1554480"/>
+          </a:xfrm>
+          <a:prstGeom prst="rect">
+            <a:avLst/>
+          </a:prstGeom>
+          <a:noFill/>
+        </p:spPr>
+        <p:txBody>
+          <a:bodyPr wrap="square" anchor="t" lIns="0" rIns="0" tIns="0" bIns="0">
+            <a:spAutoFit/>
+          </a:bodyPr>
+          <a:lstStyle/>
+          <a:p>
+            <a:pPr algn="l"/>
+            <a:r>
+              <a:rPr sz="950" b="1">
+                <a:solidFill>
+                  <a:srgbClr val="3A5C9E"/>
+                </a:solidFill>
+              </a:rPr>
+              <a:t>WHY A BANK BUYS IT INSTEAD OF USING EXCEL</a:t>
+            </a:r>
+          </a:p>
+          <a:p>
+            <a:pPr algn="l">
+              <a:spcBef>
+                <a:spcPts val="400"/>
+              </a:spcBef>
+            </a:pPr>
             <a:r>
               <a:rPr sz="1000" b="0">
                 <a:solidFill>
-                  <a:srgbClr val="C9D6EE"/>
-                </a:solidFill>
-              </a:rPr>
-              <a:t>Paste the two ratio tables into any free AI chat and ask for a commentary</a:t>
-            </a:r>
-          </a:p>
-        </p:txBody>
-      </p:sp>
-      <p:sp>
-        <p:nvSpPr>
-          <p:cNvPr id="27" name="TextBox 26"/>
-          <p:cNvSpPr txBox="1"/>
-          <p:nvPr/>
-        </p:nvSpPr>
-        <p:spPr>
-          <a:xfrm>
-            <a:off x="8339327" y="4425696"/>
-            <a:ext cx="3044952" cy="493776"/>
-          </a:xfrm>
-          <a:prstGeom prst="rect">
-            <a:avLst/>
-          </a:prstGeom>
-          <a:noFill/>
-        </p:spPr>
-        <p:txBody>
-          <a:bodyPr wrap="square" anchor="t" lIns="0" rIns="0" tIns="0" bIns="0">
-            <a:spAutoFit/>
-          </a:bodyPr>
-          <a:lstStyle/>
-          <a:p>
-            <a:pPr algn="l"/>
-            <a:r>
-              <a:rPr sz="1000" b="1">
-                <a:solidFill>
-                  <a:srgbClr val="C9A227"/>
-                </a:solidFill>
-              </a:rPr>
-              <a:t>▪  </a:t>
-            </a:r>
-            <a:r>
-              <a:rPr sz="1000" b="0">
-                <a:solidFill>
-                  <a:srgbClr val="C9D6EE"/>
-                </a:solidFill>
-              </a:rPr>
-              <a:t>Check every number in its paragraph against your tables</a:t>
-            </a:r>
-          </a:p>
-        </p:txBody>
-      </p:sp>
-      <p:sp>
-        <p:nvSpPr>
-          <p:cNvPr id="28" name="TextBox 27"/>
-          <p:cNvSpPr txBox="1"/>
-          <p:nvPr/>
-        </p:nvSpPr>
-        <p:spPr>
-          <a:xfrm>
-            <a:off x="8339327" y="4937760"/>
-            <a:ext cx="3044952" cy="493776"/>
-          </a:xfrm>
-          <a:prstGeom prst="rect">
-            <a:avLst/>
-          </a:prstGeom>
-          <a:noFill/>
-        </p:spPr>
-        <p:txBody>
-          <a:bodyPr wrap="square" anchor="t" lIns="0" rIns="0" tIns="0" bIns="0">
-            <a:spAutoFit/>
-          </a:bodyPr>
-          <a:lstStyle/>
-          <a:p>
-            <a:pPr algn="l"/>
-            <a:r>
-              <a:rPr sz="1000" b="1">
-                <a:solidFill>
-                  <a:srgbClr val="C9A227"/>
-                </a:solidFill>
-              </a:rPr>
-              <a:t>▪  </a:t>
-            </a:r>
-            <a:r>
-              <a:rPr sz="1000" b="0">
-                <a:solidFill>
-                  <a:srgbClr val="C9D6EE"/>
-                </a:solidFill>
-              </a:rPr>
-              <a:t>Keep only the sentences that survive</a:t>
-            </a:r>
-          </a:p>
-        </p:txBody>
-      </p:sp>
-      <p:sp>
-        <p:nvSpPr>
-          <p:cNvPr id="29" name="Rectangle 28"/>
+                  <a:srgbClr val="1B2A41"/>
+                </a:solidFill>
+              </a:rPr>
+              <a:t>The same capital number has to agree across COREP, FINREP, the Pillar 3 document and the annual report. One platform, one number. Nasdaq AxiomSL covers 170 or more regulators in 60 or more jurisdictions on that single platform.</a:t>
+            </a:r>
+          </a:p>
+          <a:p>
+            <a:pPr algn="l">
+              <a:spcBef>
+                <a:spcPts val="600"/>
+              </a:spcBef>
+            </a:pPr>
+            <a:r>
+              <a:rPr sz="750" b="0">
+                <a:solidFill>
+                  <a:srgbClr val="5D6B7E"/>
+                </a:solidFill>
+              </a:rPr>
+              <a:t>Sources: AxiomSL, “Basel III – CRD IV – COREP/FINREP Reporting”; Nasdaq AxiomSL regulatory reporting page.</a:t>
+            </a:r>
+          </a:p>
+        </p:txBody>
+      </p:sp>
+      <p:sp>
+        <p:nvSpPr>
+          <p:cNvPr id="35" name="Rectangle 34"/>
           <p:cNvSpPr/>
           <p:nvPr/>
         </p:nvSpPr>
@@ -8114,7 +8306,7 @@
       </p:sp>
       <p:sp>
         <p:nvSpPr>
-          <p:cNvPr id="30" name="Rectangle 29"/>
+          <p:cNvPr id="36" name="Rectangle 35"/>
           <p:cNvSpPr/>
           <p:nvPr/>
         </p:nvSpPr>
@@ -8158,7 +8350,7 @@
       </p:sp>
       <p:sp>
         <p:nvSpPr>
-          <p:cNvPr id="31" name="TextBox 30"/>
+          <p:cNvPr id="37" name="TextBox 36"/>
           <p:cNvSpPr txBox="1"/>
           <p:nvPr/>
         </p:nvSpPr>
@@ -8185,7 +8377,7 @@
                   <a:srgbClr val="C9A227"/>
                 </a:solidFill>
               </a:rPr>
-              <a:t>Why Part B matters most:  </a:t>
+              <a:t>Where AI fits here:  </a:t>
             </a:r>
             <a:r>
               <a:rPr sz="1200" b="0">
@@ -8193,14 +8385,14 @@
                   <a:srgbClr val="FFFFFF"/>
                 </a:solidFill>
               </a:rPr>
-              <a:t>generating the document takes thirty minutes. Finding out it disagrees with the bank's own number takes five, and it is the only step that makes the document worth anything.</a:t>
-            </a:r>
-          </a:p>
-        </p:txBody>
-      </p:sp>
-      <p:sp>
-        <p:nvSpPr>
-          <p:cNvPr id="32" name="TextBox 31"/>
+              <a:t>not in the calculation. In reading the validation failures, explaining a variance between two quarters, and drafting the sign-off note that a controller then checks.</a:t>
+            </a:r>
+          </a:p>
+        </p:txBody>
+      </p:sp>
+      <p:sp>
+        <p:nvSpPr>
+          <p:cNvPr id="38" name="TextBox 37"/>
           <p:cNvSpPr txBox="1"/>
           <p:nvPr/>
         </p:nvSpPr>
@@ -8234,7 +8426,7 @@
       </p:sp>
       <p:sp>
         <p:nvSpPr>
-          <p:cNvPr id="33" name="TextBox 32"/>
+          <p:cNvPr id="39" name="TextBox 38"/>
           <p:cNvSpPr txBox="1"/>
           <p:nvPr/>
         </p:nvSpPr>
@@ -8365,7 +8557,7 @@
                   <a:srgbClr val="C9A227"/>
                 </a:solidFill>
               </a:rPr>
-              <a:t>PRACTICE QUESTIONS</a:t>
+              <a:t>HOUR 2 · AML, KYC AND THE REPORT NOBODY WANTS TO WRITE</a:t>
             </a:r>
           </a:p>
         </p:txBody>
@@ -8400,7 +8592,7 @@
                 </a:solidFill>
                 <a:latin typeface="Georgia"/>
               </a:rPr>
-              <a:t>Six questions before the exam</a:t>
+              <a:t>Where the machine helps, and where a human still signs</a:t>
             </a:r>
           </a:p>
         </p:txBody>
@@ -8414,7 +8606,7 @@
         <p:spPr>
           <a:xfrm>
             <a:off x="548640" y="1444752"/>
-            <a:ext cx="11091672" cy="676656"/>
+            <a:ext cx="3611880" cy="1572768"/>
           </a:xfrm>
           <a:prstGeom prst="rect">
             <a:avLst/>
@@ -8458,7 +8650,916 @@
         <p:spPr>
           <a:xfrm>
             <a:off x="548640" y="1444752"/>
-            <a:ext cx="64008" cy="676656"/>
+            <a:ext cx="3611880" cy="45720"/>
+          </a:xfrm>
+          <a:prstGeom prst="rect">
+            <a:avLst/>
+          </a:prstGeom>
+          <a:solidFill>
+            <a:srgbClr val="C9A227"/>
+          </a:solidFill>
+          <a:ln>
+            <a:noFill/>
+          </a:ln>
+          <a:effectLst/>
+        </p:spPr>
+        <p:style>
+          <a:lnRef idx="1">
+            <a:schemeClr val="accent1"/>
+          </a:lnRef>
+          <a:fillRef idx="3">
+            <a:schemeClr val="accent1"/>
+          </a:fillRef>
+          <a:effectRef idx="2">
+            <a:schemeClr val="accent1"/>
+          </a:effectRef>
+          <a:fontRef idx="minor">
+            <a:schemeClr val="lt1"/>
+          </a:fontRef>
+        </p:style>
+        <p:txBody>
+          <a:bodyPr rtlCol="0" anchor="ctr"/>
+          <a:lstStyle/>
+          <a:p>
+            <a:pPr algn="ctr"/>
+          </a:p>
+        </p:txBody>
+      </p:sp>
+      <p:sp>
+        <p:nvSpPr>
+          <p:cNvPr id="7" name="TextBox 6"/>
+          <p:cNvSpPr txBox="1"/>
+          <p:nvPr/>
+        </p:nvSpPr>
+        <p:spPr>
+          <a:xfrm>
+            <a:off x="786384" y="1591056"/>
+            <a:ext cx="3154680" cy="274320"/>
+          </a:xfrm>
+          <a:prstGeom prst="rect">
+            <a:avLst/>
+          </a:prstGeom>
+          <a:noFill/>
+        </p:spPr>
+        <p:txBody>
+          <a:bodyPr wrap="square" anchor="t" lIns="0" rIns="0" tIns="0" bIns="0">
+            <a:spAutoFit/>
+          </a:bodyPr>
+          <a:lstStyle/>
+          <a:p>
+            <a:pPr algn="l"/>
+            <a:r>
+              <a:rPr sz="900" b="1">
+                <a:solidFill>
+                  <a:srgbClr val="3A5C9E"/>
+                </a:solidFill>
+              </a:rPr>
+              <a:t>A SUSPICIOUS TRANSACTION, IN PLAIN WORDS</a:t>
+            </a:r>
+          </a:p>
+        </p:txBody>
+      </p:sp>
+      <p:sp>
+        <p:nvSpPr>
+          <p:cNvPr id="8" name="TextBox 7"/>
+          <p:cNvSpPr txBox="1"/>
+          <p:nvPr/>
+        </p:nvSpPr>
+        <p:spPr>
+          <a:xfrm>
+            <a:off x="786384" y="1865376"/>
+            <a:ext cx="3154680" cy="1143000"/>
+          </a:xfrm>
+          <a:prstGeom prst="rect">
+            <a:avLst/>
+          </a:prstGeom>
+          <a:noFill/>
+        </p:spPr>
+        <p:txBody>
+          <a:bodyPr wrap="square" anchor="t" lIns="0" rIns="0" tIns="0" bIns="0">
+            <a:spAutoFit/>
+          </a:bodyPr>
+          <a:lstStyle/>
+          <a:p>
+            <a:pPr algn="l"/>
+            <a:r>
+              <a:rPr sz="950" b="0">
+                <a:solidFill>
+                  <a:srgbClr val="1B2A41"/>
+                </a:solidFill>
+              </a:rPr>
+              <a:t>A payment that does not fit the customer. A salary account that receives ₹40 lakh from ten strangers in a week. A shop that deposits cash just under the reporting limit every day. The bank does not know it is a crime. It knows it does not make sense, and the law says it must report that.</a:t>
+            </a:r>
+          </a:p>
+        </p:txBody>
+      </p:sp>
+      <p:sp>
+        <p:nvSpPr>
+          <p:cNvPr id="9" name="Rectangle 8"/>
+          <p:cNvSpPr/>
+          <p:nvPr/>
+        </p:nvSpPr>
+        <p:spPr>
+          <a:xfrm>
+            <a:off x="4315968" y="1444752"/>
+            <a:ext cx="3611880" cy="1572768"/>
+          </a:xfrm>
+          <a:prstGeom prst="rect">
+            <a:avLst/>
+          </a:prstGeom>
+          <a:solidFill>
+            <a:srgbClr val="FFFFFF"/>
+          </a:solidFill>
+          <a:ln>
+            <a:noFill/>
+          </a:ln>
+          <a:effectLst/>
+        </p:spPr>
+        <p:style>
+          <a:lnRef idx="1">
+            <a:schemeClr val="accent1"/>
+          </a:lnRef>
+          <a:fillRef idx="3">
+            <a:schemeClr val="accent1"/>
+          </a:fillRef>
+          <a:effectRef idx="2">
+            <a:schemeClr val="accent1"/>
+          </a:effectRef>
+          <a:fontRef idx="minor">
+            <a:schemeClr val="lt1"/>
+          </a:fontRef>
+        </p:style>
+        <p:txBody>
+          <a:bodyPr rtlCol="0" anchor="ctr"/>
+          <a:lstStyle/>
+          <a:p>
+            <a:pPr algn="ctr"/>
+          </a:p>
+        </p:txBody>
+      </p:sp>
+      <p:sp>
+        <p:nvSpPr>
+          <p:cNvPr id="10" name="Rectangle 9"/>
+          <p:cNvSpPr/>
+          <p:nvPr/>
+        </p:nvSpPr>
+        <p:spPr>
+          <a:xfrm>
+            <a:off x="4315968" y="1444752"/>
+            <a:ext cx="3611880" cy="45720"/>
+          </a:xfrm>
+          <a:prstGeom prst="rect">
+            <a:avLst/>
+          </a:prstGeom>
+          <a:solidFill>
+            <a:srgbClr val="C9A227"/>
+          </a:solidFill>
+          <a:ln>
+            <a:noFill/>
+          </a:ln>
+          <a:effectLst/>
+        </p:spPr>
+        <p:style>
+          <a:lnRef idx="1">
+            <a:schemeClr val="accent1"/>
+          </a:lnRef>
+          <a:fillRef idx="3">
+            <a:schemeClr val="accent1"/>
+          </a:fillRef>
+          <a:effectRef idx="2">
+            <a:schemeClr val="accent1"/>
+          </a:effectRef>
+          <a:fontRef idx="minor">
+            <a:schemeClr val="lt1"/>
+          </a:fontRef>
+        </p:style>
+        <p:txBody>
+          <a:bodyPr rtlCol="0" anchor="ctr"/>
+          <a:lstStyle/>
+          <a:p>
+            <a:pPr algn="ctr"/>
+          </a:p>
+        </p:txBody>
+      </p:sp>
+      <p:sp>
+        <p:nvSpPr>
+          <p:cNvPr id="11" name="TextBox 10"/>
+          <p:cNvSpPr txBox="1"/>
+          <p:nvPr/>
+        </p:nvSpPr>
+        <p:spPr>
+          <a:xfrm>
+            <a:off x="4553712" y="1591056"/>
+            <a:ext cx="3154680" cy="274320"/>
+          </a:xfrm>
+          <a:prstGeom prst="rect">
+            <a:avLst/>
+          </a:prstGeom>
+          <a:noFill/>
+        </p:spPr>
+        <p:txBody>
+          <a:bodyPr wrap="square" anchor="t" lIns="0" rIns="0" tIns="0" bIns="0">
+            <a:spAutoFit/>
+          </a:bodyPr>
+          <a:lstStyle/>
+          <a:p>
+            <a:pPr algn="l"/>
+            <a:r>
+              <a:rPr sz="900" b="1">
+                <a:solidFill>
+                  <a:srgbClr val="3A5C9E"/>
+                </a:solidFill>
+              </a:rPr>
+              <a:t>“ML RANKS” MEANS</a:t>
+            </a:r>
+          </a:p>
+        </p:txBody>
+      </p:sp>
+      <p:sp>
+        <p:nvSpPr>
+          <p:cNvPr id="12" name="TextBox 11"/>
+          <p:cNvSpPr txBox="1"/>
+          <p:nvPr/>
+        </p:nvSpPr>
+        <p:spPr>
+          <a:xfrm>
+            <a:off x="4553712" y="1865376"/>
+            <a:ext cx="3154680" cy="1143000"/>
+          </a:xfrm>
+          <a:prstGeom prst="rect">
+            <a:avLst/>
+          </a:prstGeom>
+          <a:noFill/>
+        </p:spPr>
+        <p:txBody>
+          <a:bodyPr wrap="square" anchor="t" lIns="0" rIns="0" tIns="0" bIns="0">
+            <a:spAutoFit/>
+          </a:bodyPr>
+          <a:lstStyle/>
+          <a:p>
+            <a:pPr algn="l"/>
+            <a:r>
+              <a:rPr sz="950" b="0">
+                <a:solidFill>
+                  <a:srgbClr val="1B2A41"/>
+                </a:solidFill>
+              </a:rPr>
+              <a:t>The rules still flag every odd payment. A model that has learned from past cases gives each flag a score. The analyst works from the top of the list. Nothing is deleted. Only the order changes.</a:t>
+            </a:r>
+          </a:p>
+        </p:txBody>
+      </p:sp>
+      <p:sp>
+        <p:nvSpPr>
+          <p:cNvPr id="13" name="Rectangle 12"/>
+          <p:cNvSpPr/>
+          <p:nvPr/>
+        </p:nvSpPr>
+        <p:spPr>
+          <a:xfrm>
+            <a:off x="8083296" y="1444752"/>
+            <a:ext cx="3557016" cy="1572768"/>
+          </a:xfrm>
+          <a:prstGeom prst="rect">
+            <a:avLst/>
+          </a:prstGeom>
+          <a:solidFill>
+            <a:srgbClr val="FFFFFF"/>
+          </a:solidFill>
+          <a:ln>
+            <a:noFill/>
+          </a:ln>
+          <a:effectLst/>
+        </p:spPr>
+        <p:style>
+          <a:lnRef idx="1">
+            <a:schemeClr val="accent1"/>
+          </a:lnRef>
+          <a:fillRef idx="3">
+            <a:schemeClr val="accent1"/>
+          </a:fillRef>
+          <a:effectRef idx="2">
+            <a:schemeClr val="accent1"/>
+          </a:effectRef>
+          <a:fontRef idx="minor">
+            <a:schemeClr val="lt1"/>
+          </a:fontRef>
+        </p:style>
+        <p:txBody>
+          <a:bodyPr rtlCol="0" anchor="ctr"/>
+          <a:lstStyle/>
+          <a:p>
+            <a:pPr algn="ctr"/>
+          </a:p>
+        </p:txBody>
+      </p:sp>
+      <p:sp>
+        <p:nvSpPr>
+          <p:cNvPr id="14" name="Rectangle 13"/>
+          <p:cNvSpPr/>
+          <p:nvPr/>
+        </p:nvSpPr>
+        <p:spPr>
+          <a:xfrm>
+            <a:off x="8083296" y="1444752"/>
+            <a:ext cx="3557016" cy="45720"/>
+          </a:xfrm>
+          <a:prstGeom prst="rect">
+            <a:avLst/>
+          </a:prstGeom>
+          <a:solidFill>
+            <a:srgbClr val="C9A227"/>
+          </a:solidFill>
+          <a:ln>
+            <a:noFill/>
+          </a:ln>
+          <a:effectLst/>
+        </p:spPr>
+        <p:style>
+          <a:lnRef idx="1">
+            <a:schemeClr val="accent1"/>
+          </a:lnRef>
+          <a:fillRef idx="3">
+            <a:schemeClr val="accent1"/>
+          </a:fillRef>
+          <a:effectRef idx="2">
+            <a:schemeClr val="accent1"/>
+          </a:effectRef>
+          <a:fontRef idx="minor">
+            <a:schemeClr val="lt1"/>
+          </a:fontRef>
+        </p:style>
+        <p:txBody>
+          <a:bodyPr rtlCol="0" anchor="ctr"/>
+          <a:lstStyle/>
+          <a:p>
+            <a:pPr algn="ctr"/>
+          </a:p>
+        </p:txBody>
+      </p:sp>
+      <p:sp>
+        <p:nvSpPr>
+          <p:cNvPr id="15" name="TextBox 14"/>
+          <p:cNvSpPr txBox="1"/>
+          <p:nvPr/>
+        </p:nvSpPr>
+        <p:spPr>
+          <a:xfrm>
+            <a:off x="8321040" y="1591056"/>
+            <a:ext cx="3099816" cy="274320"/>
+          </a:xfrm>
+          <a:prstGeom prst="rect">
+            <a:avLst/>
+          </a:prstGeom>
+          <a:noFill/>
+        </p:spPr>
+        <p:txBody>
+          <a:bodyPr wrap="square" anchor="t" lIns="0" rIns="0" tIns="0" bIns="0">
+            <a:spAutoFit/>
+          </a:bodyPr>
+          <a:lstStyle/>
+          <a:p>
+            <a:pPr algn="l"/>
+            <a:r>
+              <a:rPr sz="900" b="1">
+                <a:solidFill>
+                  <a:srgbClr val="3A5C9E"/>
+                </a:solidFill>
+              </a:rPr>
+              <a:t>“NLP” MEANS</a:t>
+            </a:r>
+          </a:p>
+        </p:txBody>
+      </p:sp>
+      <p:sp>
+        <p:nvSpPr>
+          <p:cNvPr id="16" name="TextBox 15"/>
+          <p:cNvSpPr txBox="1"/>
+          <p:nvPr/>
+        </p:nvSpPr>
+        <p:spPr>
+          <a:xfrm>
+            <a:off x="8321040" y="1865376"/>
+            <a:ext cx="3099816" cy="1143000"/>
+          </a:xfrm>
+          <a:prstGeom prst="rect">
+            <a:avLst/>
+          </a:prstGeom>
+          <a:noFill/>
+        </p:spPr>
+        <p:txBody>
+          <a:bodyPr wrap="square" anchor="t" lIns="0" rIns="0" tIns="0" bIns="0">
+            <a:spAutoFit/>
+          </a:bodyPr>
+          <a:lstStyle/>
+          <a:p>
+            <a:pPr algn="l"/>
+            <a:r>
+              <a:rPr sz="950" b="0">
+                <a:solidFill>
+                  <a:srgbClr val="1B2A41"/>
+                </a:solidFill>
+              </a:rPr>
+              <a:t>Natural language processing: software that reads text the way OCR reads pixels. It pulls the name and date of birth off a scanned PAN card, matches them to the form, and knows that Rahul Sharma and Sharma Rahul are one person.</a:t>
+            </a:r>
+          </a:p>
+        </p:txBody>
+      </p:sp>
+      <p:sp>
+        <p:nvSpPr>
+          <p:cNvPr id="17" name="Rectangle 16"/>
+          <p:cNvSpPr/>
+          <p:nvPr/>
+        </p:nvSpPr>
+        <p:spPr>
+          <a:xfrm>
+            <a:off x="548640" y="3163824"/>
+            <a:ext cx="3611880" cy="1938528"/>
+          </a:xfrm>
+          <a:prstGeom prst="rect">
+            <a:avLst/>
+          </a:prstGeom>
+          <a:solidFill>
+            <a:srgbClr val="FFFFFF"/>
+          </a:solidFill>
+          <a:ln>
+            <a:noFill/>
+          </a:ln>
+          <a:effectLst/>
+        </p:spPr>
+        <p:style>
+          <a:lnRef idx="1">
+            <a:schemeClr val="accent1"/>
+          </a:lnRef>
+          <a:fillRef idx="3">
+            <a:schemeClr val="accent1"/>
+          </a:fillRef>
+          <a:effectRef idx="2">
+            <a:schemeClr val="accent1"/>
+          </a:effectRef>
+          <a:fontRef idx="minor">
+            <a:schemeClr val="lt1"/>
+          </a:fontRef>
+        </p:style>
+        <p:txBody>
+          <a:bodyPr rtlCol="0" anchor="ctr"/>
+          <a:lstStyle/>
+          <a:p>
+            <a:pPr algn="ctr"/>
+          </a:p>
+        </p:txBody>
+      </p:sp>
+      <p:sp>
+        <p:nvSpPr>
+          <p:cNvPr id="18" name="TextBox 17"/>
+          <p:cNvSpPr txBox="1"/>
+          <p:nvPr/>
+        </p:nvSpPr>
+        <p:spPr>
+          <a:xfrm>
+            <a:off x="786384" y="3310128"/>
+            <a:ext cx="3154680" cy="274320"/>
+          </a:xfrm>
+          <a:prstGeom prst="rect">
+            <a:avLst/>
+          </a:prstGeom>
+          <a:noFill/>
+        </p:spPr>
+        <p:txBody>
+          <a:bodyPr wrap="square" anchor="t" lIns="0" rIns="0" tIns="0" bIns="0">
+            <a:spAutoFit/>
+          </a:bodyPr>
+          <a:lstStyle/>
+          <a:p>
+            <a:pPr algn="l"/>
+            <a:r>
+              <a:rPr sz="900" b="1">
+                <a:solidFill>
+                  <a:srgbClr val="3A5C9E"/>
+                </a:solidFill>
+              </a:rPr>
+              <a:t>TRANSACTION MONITORING</a:t>
+            </a:r>
+          </a:p>
+        </p:txBody>
+      </p:sp>
+      <p:sp>
+        <p:nvSpPr>
+          <p:cNvPr id="19" name="TextBox 18"/>
+          <p:cNvSpPr txBox="1"/>
+          <p:nvPr/>
+        </p:nvSpPr>
+        <p:spPr>
+          <a:xfrm>
+            <a:off x="786384" y="3584448"/>
+            <a:ext cx="3154680" cy="365760"/>
+          </a:xfrm>
+          <a:prstGeom prst="rect">
+            <a:avLst/>
+          </a:prstGeom>
+          <a:noFill/>
+        </p:spPr>
+        <p:txBody>
+          <a:bodyPr wrap="square" anchor="t" lIns="0" rIns="0" tIns="0" bIns="0">
+            <a:spAutoFit/>
+          </a:bodyPr>
+          <a:lstStyle/>
+          <a:p>
+            <a:pPr algn="l"/>
+            <a:r>
+              <a:rPr sz="1400" b="1">
+                <a:solidFill>
+                  <a:srgbClr val="0F2145"/>
+                </a:solidFill>
+                <a:latin typeface="Georgia"/>
+              </a:rPr>
+              <a:t>Rules fire. ML ranks.</a:t>
+            </a:r>
+          </a:p>
+        </p:txBody>
+      </p:sp>
+      <p:sp>
+        <p:nvSpPr>
+          <p:cNvPr id="20" name="TextBox 19"/>
+          <p:cNvSpPr txBox="1"/>
+          <p:nvPr/>
+        </p:nvSpPr>
+        <p:spPr>
+          <a:xfrm>
+            <a:off x="786384" y="3986784"/>
+            <a:ext cx="3154680" cy="1097280"/>
+          </a:xfrm>
+          <a:prstGeom prst="rect">
+            <a:avLst/>
+          </a:prstGeom>
+          <a:noFill/>
+        </p:spPr>
+        <p:txBody>
+          <a:bodyPr wrap="square" anchor="t" lIns="0" rIns="0" tIns="0" bIns="0">
+            <a:spAutoFit/>
+          </a:bodyPr>
+          <a:lstStyle/>
+          <a:p>
+            <a:pPr algn="l"/>
+            <a:r>
+              <a:rPr sz="950" b="0">
+                <a:solidFill>
+                  <a:srgbClr val="1B2A41"/>
+                </a:solidFill>
+              </a:rPr>
+              <a:t>10,000 alerts a month. The model puts the 200 that matter at the top of the queue. The rule still fires; the machine only orders the queue.</a:t>
+            </a:r>
+          </a:p>
+        </p:txBody>
+      </p:sp>
+      <p:sp>
+        <p:nvSpPr>
+          <p:cNvPr id="21" name="Rectangle 20"/>
+          <p:cNvSpPr/>
+          <p:nvPr/>
+        </p:nvSpPr>
+        <p:spPr>
+          <a:xfrm>
+            <a:off x="4315968" y="3163824"/>
+            <a:ext cx="3611880" cy="1938528"/>
+          </a:xfrm>
+          <a:prstGeom prst="rect">
+            <a:avLst/>
+          </a:prstGeom>
+          <a:solidFill>
+            <a:srgbClr val="FFFFFF"/>
+          </a:solidFill>
+          <a:ln>
+            <a:noFill/>
+          </a:ln>
+          <a:effectLst/>
+        </p:spPr>
+        <p:style>
+          <a:lnRef idx="1">
+            <a:schemeClr val="accent1"/>
+          </a:lnRef>
+          <a:fillRef idx="3">
+            <a:schemeClr val="accent1"/>
+          </a:fillRef>
+          <a:effectRef idx="2">
+            <a:schemeClr val="accent1"/>
+          </a:effectRef>
+          <a:fontRef idx="minor">
+            <a:schemeClr val="lt1"/>
+          </a:fontRef>
+        </p:style>
+        <p:txBody>
+          <a:bodyPr rtlCol="0" anchor="ctr"/>
+          <a:lstStyle/>
+          <a:p>
+            <a:pPr algn="ctr"/>
+          </a:p>
+        </p:txBody>
+      </p:sp>
+      <p:sp>
+        <p:nvSpPr>
+          <p:cNvPr id="22" name="TextBox 21"/>
+          <p:cNvSpPr txBox="1"/>
+          <p:nvPr/>
+        </p:nvSpPr>
+        <p:spPr>
+          <a:xfrm>
+            <a:off x="4553712" y="3310128"/>
+            <a:ext cx="3154680" cy="274320"/>
+          </a:xfrm>
+          <a:prstGeom prst="rect">
+            <a:avLst/>
+          </a:prstGeom>
+          <a:noFill/>
+        </p:spPr>
+        <p:txBody>
+          <a:bodyPr wrap="square" anchor="t" lIns="0" rIns="0" tIns="0" bIns="0">
+            <a:spAutoFit/>
+          </a:bodyPr>
+          <a:lstStyle/>
+          <a:p>
+            <a:pPr algn="l"/>
+            <a:r>
+              <a:rPr sz="900" b="1">
+                <a:solidFill>
+                  <a:srgbClr val="3A5C9E"/>
+                </a:solidFill>
+              </a:rPr>
+              <a:t>KYC DOCUMENT AUTOMATION</a:t>
+            </a:r>
+          </a:p>
+        </p:txBody>
+      </p:sp>
+      <p:sp>
+        <p:nvSpPr>
+          <p:cNvPr id="23" name="TextBox 22"/>
+          <p:cNvSpPr txBox="1"/>
+          <p:nvPr/>
+        </p:nvSpPr>
+        <p:spPr>
+          <a:xfrm>
+            <a:off x="4553712" y="3584448"/>
+            <a:ext cx="3154680" cy="365760"/>
+          </a:xfrm>
+          <a:prstGeom prst="rect">
+            <a:avLst/>
+          </a:prstGeom>
+          <a:noFill/>
+        </p:spPr>
+        <p:txBody>
+          <a:bodyPr wrap="square" anchor="t" lIns="0" rIns="0" tIns="0" bIns="0">
+            <a:spAutoFit/>
+          </a:bodyPr>
+          <a:lstStyle/>
+          <a:p>
+            <a:pPr algn="l"/>
+            <a:r>
+              <a:rPr sz="1400" b="1">
+                <a:solidFill>
+                  <a:srgbClr val="0F2145"/>
+                </a:solidFill>
+                <a:latin typeface="Georgia"/>
+              </a:rPr>
+              <a:t>OCR reads. NLP checks.</a:t>
+            </a:r>
+          </a:p>
+        </p:txBody>
+      </p:sp>
+      <p:sp>
+        <p:nvSpPr>
+          <p:cNvPr id="24" name="TextBox 23"/>
+          <p:cNvSpPr txBox="1"/>
+          <p:nvPr/>
+        </p:nvSpPr>
+        <p:spPr>
+          <a:xfrm>
+            <a:off x="4553712" y="3986784"/>
+            <a:ext cx="3154680" cy="1097280"/>
+          </a:xfrm>
+          <a:prstGeom prst="rect">
+            <a:avLst/>
+          </a:prstGeom>
+          <a:noFill/>
+        </p:spPr>
+        <p:txBody>
+          <a:bodyPr wrap="square" anchor="t" lIns="0" rIns="0" tIns="0" bIns="0">
+            <a:spAutoFit/>
+          </a:bodyPr>
+          <a:lstStyle/>
+          <a:p>
+            <a:pPr algn="l"/>
+            <a:r>
+              <a:rPr sz="950" b="0">
+                <a:solidFill>
+                  <a:srgbClr val="1B2A41"/>
+                </a:solidFill>
+              </a:rPr>
+              <a:t>A clean file is onboarded in twenty minutes instead of three days. A blurred, mismatched or expired document still goes to a person.</a:t>
+            </a:r>
+          </a:p>
+        </p:txBody>
+      </p:sp>
+      <p:sp>
+        <p:nvSpPr>
+          <p:cNvPr id="25" name="Rectangle 24"/>
+          <p:cNvSpPr/>
+          <p:nvPr/>
+        </p:nvSpPr>
+        <p:spPr>
+          <a:xfrm>
+            <a:off x="8083296" y="3163824"/>
+            <a:ext cx="3557016" cy="1938528"/>
+          </a:xfrm>
+          <a:prstGeom prst="rect">
+            <a:avLst/>
+          </a:prstGeom>
+          <a:solidFill>
+            <a:srgbClr val="0F2145"/>
+          </a:solidFill>
+          <a:ln>
+            <a:noFill/>
+          </a:ln>
+          <a:effectLst/>
+        </p:spPr>
+        <p:style>
+          <a:lnRef idx="1">
+            <a:schemeClr val="accent1"/>
+          </a:lnRef>
+          <a:fillRef idx="3">
+            <a:schemeClr val="accent1"/>
+          </a:fillRef>
+          <a:effectRef idx="2">
+            <a:schemeClr val="accent1"/>
+          </a:effectRef>
+          <a:fontRef idx="minor">
+            <a:schemeClr val="lt1"/>
+          </a:fontRef>
+        </p:style>
+        <p:txBody>
+          <a:bodyPr rtlCol="0" anchor="ctr"/>
+          <a:lstStyle/>
+          <a:p>
+            <a:pPr algn="ctr"/>
+          </a:p>
+        </p:txBody>
+      </p:sp>
+      <p:sp>
+        <p:nvSpPr>
+          <p:cNvPr id="26" name="TextBox 25"/>
+          <p:cNvSpPr txBox="1"/>
+          <p:nvPr/>
+        </p:nvSpPr>
+        <p:spPr>
+          <a:xfrm>
+            <a:off x="8321040" y="3310128"/>
+            <a:ext cx="3099816" cy="274320"/>
+          </a:xfrm>
+          <a:prstGeom prst="rect">
+            <a:avLst/>
+          </a:prstGeom>
+          <a:noFill/>
+        </p:spPr>
+        <p:txBody>
+          <a:bodyPr wrap="square" anchor="t" lIns="0" rIns="0" tIns="0" bIns="0">
+            <a:spAutoFit/>
+          </a:bodyPr>
+          <a:lstStyle/>
+          <a:p>
+            <a:pPr algn="l"/>
+            <a:r>
+              <a:rPr sz="900" b="1">
+                <a:solidFill>
+                  <a:srgbClr val="C9A227"/>
+                </a:solidFill>
+              </a:rPr>
+              <a:t>THE SUSPICIOUS TRANSACTION REPORT</a:t>
+            </a:r>
+          </a:p>
+        </p:txBody>
+      </p:sp>
+      <p:sp>
+        <p:nvSpPr>
+          <p:cNvPr id="27" name="TextBox 26"/>
+          <p:cNvSpPr txBox="1"/>
+          <p:nvPr/>
+        </p:nvSpPr>
+        <p:spPr>
+          <a:xfrm>
+            <a:off x="8321040" y="3584448"/>
+            <a:ext cx="3099816" cy="365760"/>
+          </a:xfrm>
+          <a:prstGeom prst="rect">
+            <a:avLst/>
+          </a:prstGeom>
+          <a:noFill/>
+        </p:spPr>
+        <p:txBody>
+          <a:bodyPr wrap="square" anchor="t" lIns="0" rIns="0" tIns="0" bIns="0">
+            <a:spAutoFit/>
+          </a:bodyPr>
+          <a:lstStyle/>
+          <a:p>
+            <a:pPr algn="l"/>
+            <a:r>
+              <a:rPr sz="1400" b="1">
+                <a:solidFill>
+                  <a:srgbClr val="FFFFFF"/>
+                </a:solidFill>
+                <a:latin typeface="Georgia"/>
+              </a:rPr>
+              <a:t>AI drafts. A human signs.</a:t>
+            </a:r>
+          </a:p>
+        </p:txBody>
+      </p:sp>
+      <p:sp>
+        <p:nvSpPr>
+          <p:cNvPr id="28" name="TextBox 27"/>
+          <p:cNvSpPr txBox="1"/>
+          <p:nvPr/>
+        </p:nvSpPr>
+        <p:spPr>
+          <a:xfrm>
+            <a:off x="8321040" y="3986784"/>
+            <a:ext cx="3099816" cy="1097280"/>
+          </a:xfrm>
+          <a:prstGeom prst="rect">
+            <a:avLst/>
+          </a:prstGeom>
+          <a:noFill/>
+        </p:spPr>
+        <p:txBody>
+          <a:bodyPr wrap="square" anchor="t" lIns="0" rIns="0" tIns="0" bIns="0">
+            <a:spAutoFit/>
+          </a:bodyPr>
+          <a:lstStyle/>
+          <a:p>
+            <a:pPr algn="l"/>
+            <a:r>
+              <a:rPr sz="950" b="0">
+                <a:solidFill>
+                  <a:srgbClr val="C9D6EE"/>
+                </a:solidFill>
+              </a:rPr>
+              <a:t>FATF Recommendation 20 requires it. India files it to FIU-IND under the PMLA. The model drafts the narrative in four minutes. The officer reads it for twenty, changes it, and signs it.</a:t>
+            </a:r>
+          </a:p>
+        </p:txBody>
+      </p:sp>
+      <p:sp>
+        <p:nvSpPr>
+          <p:cNvPr id="29" name="Rectangle 28"/>
+          <p:cNvSpPr/>
+          <p:nvPr/>
+        </p:nvSpPr>
+        <p:spPr>
+          <a:xfrm>
+            <a:off x="548640" y="5230368"/>
+            <a:ext cx="11091672" cy="420624"/>
+          </a:xfrm>
+          <a:prstGeom prst="rect">
+            <a:avLst/>
+          </a:prstGeom>
+          <a:solidFill>
+            <a:srgbClr val="E9EFF8"/>
+          </a:solidFill>
+          <a:ln>
+            <a:noFill/>
+          </a:ln>
+          <a:effectLst/>
+        </p:spPr>
+        <p:style>
+          <a:lnRef idx="1">
+            <a:schemeClr val="accent1"/>
+          </a:lnRef>
+          <a:fillRef idx="3">
+            <a:schemeClr val="accent1"/>
+          </a:fillRef>
+          <a:effectRef idx="2">
+            <a:schemeClr val="accent1"/>
+          </a:effectRef>
+          <a:fontRef idx="minor">
+            <a:schemeClr val="lt1"/>
+          </a:fontRef>
+        </p:style>
+        <p:txBody>
+          <a:bodyPr rtlCol="0" anchor="ctr"/>
+          <a:lstStyle/>
+          <a:p>
+            <a:pPr algn="ctr"/>
+          </a:p>
+        </p:txBody>
+      </p:sp>
+      <p:sp>
+        <p:nvSpPr>
+          <p:cNvPr id="30" name="Rectangle 29"/>
+          <p:cNvSpPr/>
+          <p:nvPr/>
+        </p:nvSpPr>
+        <p:spPr>
+          <a:xfrm>
+            <a:off x="548640" y="5230368"/>
+            <a:ext cx="64008" cy="420624"/>
           </a:xfrm>
           <a:prstGeom prst="rect">
             <a:avLst/>
@@ -8495,106 +9596,393 @@
       </p:sp>
       <p:sp>
         <p:nvSpPr>
-          <p:cNvPr id="7" name="TextBox 6"/>
-          <p:cNvSpPr txBox="1"/>
-          <p:nvPr/>
-        </p:nvSpPr>
-        <p:spPr>
-          <a:xfrm>
-            <a:off x="822960" y="1508760"/>
-            <a:ext cx="640080" cy="365760"/>
-          </a:xfrm>
-          <a:prstGeom prst="rect">
-            <a:avLst/>
-          </a:prstGeom>
-          <a:noFill/>
-        </p:spPr>
-        <p:txBody>
-          <a:bodyPr wrap="square" anchor="t" lIns="0" rIns="0" tIns="0" bIns="0">
-            <a:spAutoFit/>
-          </a:bodyPr>
-          <a:lstStyle/>
-          <a:p>
-            <a:pPr algn="l"/>
-            <a:r>
-              <a:rPr sz="1400" b="1">
+          <p:cNvPr id="31" name="TextBox 30"/>
+          <p:cNvSpPr txBox="1"/>
+          <p:nvPr/>
+        </p:nvSpPr>
+        <p:spPr>
+          <a:xfrm>
+            <a:off x="868680" y="5230368"/>
+            <a:ext cx="10515600" cy="420624"/>
+          </a:xfrm>
+          <a:prstGeom prst="rect">
+            <a:avLst/>
+          </a:prstGeom>
+          <a:noFill/>
+        </p:spPr>
+        <p:txBody>
+          <a:bodyPr wrap="square" anchor="ctr" lIns="0" rIns="0" tIns="0" bIns="0">
+            <a:spAutoFit/>
+          </a:bodyPr>
+          <a:lstStyle/>
+          <a:p>
+            <a:pPr algn="l"/>
+            <a:r>
+              <a:rPr sz="950" b="1">
                 <a:solidFill>
                   <a:srgbClr val="3A5C9E"/>
                 </a:solidFill>
+              </a:rPr>
+              <a:t>WHAT RBI FINES BANKS FOR UNDER THE KYC MASTER DIRECTION:  </a:t>
+            </a:r>
+            <a:r>
+              <a:rPr sz="950" b="0">
+                <a:solidFill>
+                  <a:srgbClr val="1B2A41"/>
+                </a:solidFill>
+              </a:rPr>
+              <a:t>accounts opened without full verification, periodic KYC updates missed, and monitoring alerts closed without a review. The fine is the small part. The bar on onboarding new customers is the expensive part.</a:t>
+            </a:r>
+          </a:p>
+        </p:txBody>
+      </p:sp>
+      <p:sp>
+        <p:nvSpPr>
+          <p:cNvPr id="32" name="Rectangle 31"/>
+          <p:cNvSpPr/>
+          <p:nvPr/>
+        </p:nvSpPr>
+        <p:spPr>
+          <a:xfrm>
+            <a:off x="548640" y="5760720"/>
+            <a:ext cx="11091672" cy="603504"/>
+          </a:xfrm>
+          <a:prstGeom prst="rect">
+            <a:avLst/>
+          </a:prstGeom>
+          <a:solidFill>
+            <a:srgbClr val="0F2145"/>
+          </a:solidFill>
+          <a:ln>
+            <a:noFill/>
+          </a:ln>
+          <a:effectLst/>
+        </p:spPr>
+        <p:style>
+          <a:lnRef idx="1">
+            <a:schemeClr val="accent1"/>
+          </a:lnRef>
+          <a:fillRef idx="3">
+            <a:schemeClr val="accent1"/>
+          </a:fillRef>
+          <a:effectRef idx="2">
+            <a:schemeClr val="accent1"/>
+          </a:effectRef>
+          <a:fontRef idx="minor">
+            <a:schemeClr val="lt1"/>
+          </a:fontRef>
+        </p:style>
+        <p:txBody>
+          <a:bodyPr rtlCol="0" anchor="ctr"/>
+          <a:lstStyle/>
+          <a:p>
+            <a:pPr algn="ctr"/>
+          </a:p>
+        </p:txBody>
+      </p:sp>
+      <p:sp>
+        <p:nvSpPr>
+          <p:cNvPr id="33" name="Rectangle 32"/>
+          <p:cNvSpPr/>
+          <p:nvPr/>
+        </p:nvSpPr>
+        <p:spPr>
+          <a:xfrm>
+            <a:off x="548640" y="5760720"/>
+            <a:ext cx="64008" cy="603504"/>
+          </a:xfrm>
+          <a:prstGeom prst="rect">
+            <a:avLst/>
+          </a:prstGeom>
+          <a:solidFill>
+            <a:srgbClr val="C9A227"/>
+          </a:solidFill>
+          <a:ln>
+            <a:noFill/>
+          </a:ln>
+          <a:effectLst/>
+        </p:spPr>
+        <p:style>
+          <a:lnRef idx="1">
+            <a:schemeClr val="accent1"/>
+          </a:lnRef>
+          <a:fillRef idx="3">
+            <a:schemeClr val="accent1"/>
+          </a:fillRef>
+          <a:effectRef idx="2">
+            <a:schemeClr val="accent1"/>
+          </a:effectRef>
+          <a:fontRef idx="minor">
+            <a:schemeClr val="lt1"/>
+          </a:fontRef>
+        </p:style>
+        <p:txBody>
+          <a:bodyPr rtlCol="0" anchor="ctr"/>
+          <a:lstStyle/>
+          <a:p>
+            <a:pPr algn="ctr"/>
+          </a:p>
+        </p:txBody>
+      </p:sp>
+      <p:sp>
+        <p:nvSpPr>
+          <p:cNvPr id="34" name="TextBox 33"/>
+          <p:cNvSpPr txBox="1"/>
+          <p:nvPr/>
+        </p:nvSpPr>
+        <p:spPr>
+          <a:xfrm>
+            <a:off x="822960" y="5760720"/>
+            <a:ext cx="10543032" cy="603504"/>
+          </a:xfrm>
+          <a:prstGeom prst="rect">
+            <a:avLst/>
+          </a:prstGeom>
+          <a:noFill/>
+        </p:spPr>
+        <p:txBody>
+          <a:bodyPr wrap="square" anchor="ctr" lIns="0" rIns="0" tIns="0" bIns="0">
+            <a:spAutoFit/>
+          </a:bodyPr>
+          <a:lstStyle/>
+          <a:p>
+            <a:pPr algn="l"/>
+            <a:r>
+              <a:rPr sz="1200" b="1">
+                <a:solidFill>
+                  <a:srgbClr val="C9A227"/>
+                </a:solidFill>
+              </a:rPr>
+              <a:t>The rule for this hour:  </a:t>
+            </a:r>
+            <a:r>
+              <a:rPr sz="1200" b="0">
+                <a:solidFill>
+                  <a:srgbClr val="FFFFFF"/>
+                </a:solidFill>
+              </a:rPr>
+              <a:t>automation earns its place by removing the false alerts, never by removing the signature.</a:t>
+            </a:r>
+          </a:p>
+        </p:txBody>
+      </p:sp>
+      <p:sp>
+        <p:nvSpPr>
+          <p:cNvPr id="35" name="TextBox 34"/>
+          <p:cNvSpPr txBox="1"/>
+          <p:nvPr/>
+        </p:nvSpPr>
+        <p:spPr>
+          <a:xfrm>
+            <a:off x="548640" y="6473952"/>
+            <a:ext cx="7315200" cy="228600"/>
+          </a:xfrm>
+          <a:prstGeom prst="rect">
+            <a:avLst/>
+          </a:prstGeom>
+          <a:noFill/>
+        </p:spPr>
+        <p:txBody>
+          <a:bodyPr wrap="square" anchor="t" lIns="0" rIns="0" tIns="0" bIns="0">
+            <a:spAutoFit/>
+          </a:bodyPr>
+          <a:lstStyle/>
+          <a:p>
+            <a:pPr algn="l"/>
+            <a:r>
+              <a:rPr sz="800" b="0">
+                <a:solidFill>
+                  <a:srgbClr val="5D6B7E"/>
+                </a:solidFill>
+              </a:rPr>
+              <a:t>ISBMS · PGDM 2025–27 · AGENTIC AI &amp; ADVANCED ANALYTICS IN FINANCE</a:t>
+            </a:r>
+          </a:p>
+        </p:txBody>
+      </p:sp>
+      <p:sp>
+        <p:nvSpPr>
+          <p:cNvPr id="36" name="TextBox 35"/>
+          <p:cNvSpPr txBox="1"/>
+          <p:nvPr/>
+        </p:nvSpPr>
+        <p:spPr>
+          <a:xfrm>
+            <a:off x="9262872" y="6473952"/>
+            <a:ext cx="2377440" cy="228600"/>
+          </a:xfrm>
+          <a:prstGeom prst="rect">
+            <a:avLst/>
+          </a:prstGeom>
+          <a:noFill/>
+        </p:spPr>
+        <p:txBody>
+          <a:bodyPr wrap="square" anchor="t" lIns="0" rIns="0" tIns="0" bIns="0">
+            <a:spAutoFit/>
+          </a:bodyPr>
+          <a:lstStyle/>
+          <a:p>
+            <a:pPr algn="r"/>
+            <a:r>
+              <a:rPr sz="800" b="0">
+                <a:solidFill>
+                  <a:srgbClr val="5D6B7E"/>
+                </a:solidFill>
+              </a:rPr>
+              <a:t>MODULE 6  ·  05</a:t>
+            </a:r>
+          </a:p>
+        </p:txBody>
+      </p:sp>
+    </p:spTree>
+  </p:cSld>
+  <p:clrMapOvr>
+    <a:masterClrMapping/>
+  </p:clrMapOvr>
+</p:sld>
+</file>
+
+<file path=ppt/slides/slide6.xml><?xml version="1.0" encoding="utf-8"?>
+<p:sld xmlns:a="http://schemas.openxmlformats.org/drawingml/2006/main" xmlns:p="http://schemas.openxmlformats.org/presentationml/2006/main" xmlns:r="http://schemas.openxmlformats.org/officeDocument/2006/relationships">
+  <p:cSld>
+    <p:bg>
+      <p:bgPr>
+        <a:solidFill>
+          <a:srgbClr val="F7F8FA"/>
+        </a:solidFill>
+        <a:effectLst/>
+      </p:bgPr>
+    </p:bg>
+    <p:spTree>
+      <p:nvGrpSpPr>
+        <p:cNvPr id="1" name=""/>
+        <p:cNvGrpSpPr/>
+        <p:nvPr/>
+      </p:nvGrpSpPr>
+      <p:grpSpPr/>
+      <p:sp>
+        <p:nvSpPr>
+          <p:cNvPr id="2" name="Rectangle 1"/>
+          <p:cNvSpPr/>
+          <p:nvPr/>
+        </p:nvSpPr>
+        <p:spPr>
+          <a:xfrm>
+            <a:off x="548640" y="402336"/>
+            <a:ext cx="118872" cy="118872"/>
+          </a:xfrm>
+          <a:prstGeom prst="rect">
+            <a:avLst/>
+          </a:prstGeom>
+          <a:solidFill>
+            <a:srgbClr val="C9A227"/>
+          </a:solidFill>
+          <a:ln>
+            <a:noFill/>
+          </a:ln>
+          <a:effectLst/>
+        </p:spPr>
+        <p:style>
+          <a:lnRef idx="1">
+            <a:schemeClr val="accent1"/>
+          </a:lnRef>
+          <a:fillRef idx="3">
+            <a:schemeClr val="accent1"/>
+          </a:fillRef>
+          <a:effectRef idx="2">
+            <a:schemeClr val="accent1"/>
+          </a:effectRef>
+          <a:fontRef idx="minor">
+            <a:schemeClr val="lt1"/>
+          </a:fontRef>
+        </p:style>
+        <p:txBody>
+          <a:bodyPr rtlCol="0" anchor="ctr"/>
+          <a:lstStyle/>
+          <a:p>
+            <a:pPr algn="ctr"/>
+          </a:p>
+        </p:txBody>
+      </p:sp>
+      <p:sp>
+        <p:nvSpPr>
+          <p:cNvPr id="3" name="TextBox 2"/>
+          <p:cNvSpPr txBox="1"/>
+          <p:nvPr/>
+        </p:nvSpPr>
+        <p:spPr>
+          <a:xfrm>
+            <a:off x="786384" y="310896"/>
+            <a:ext cx="10817352" cy="274320"/>
+          </a:xfrm>
+          <a:prstGeom prst="rect">
+            <a:avLst/>
+          </a:prstGeom>
+          <a:noFill/>
+        </p:spPr>
+        <p:txBody>
+          <a:bodyPr wrap="square" anchor="t" lIns="0" rIns="0" tIns="0" bIns="0">
+            <a:spAutoFit/>
+          </a:bodyPr>
+          <a:lstStyle/>
+          <a:p>
+            <a:pPr algn="l"/>
+            <a:r>
+              <a:rPr sz="1100" b="1">
+                <a:solidFill>
+                  <a:srgbClr val="C9A227"/>
+                </a:solidFill>
+              </a:rPr>
+              <a:t>HOUR 2 · SCREENING THE NAME</a:t>
+            </a:r>
+          </a:p>
+        </p:txBody>
+      </p:sp>
+      <p:sp>
+        <p:nvSpPr>
+          <p:cNvPr id="4" name="TextBox 3"/>
+          <p:cNvSpPr txBox="1"/>
+          <p:nvPr/>
+        </p:nvSpPr>
+        <p:spPr>
+          <a:xfrm>
+            <a:off x="548640" y="621792"/>
+            <a:ext cx="11091672" cy="731520"/>
+          </a:xfrm>
+          <a:prstGeom prst="rect">
+            <a:avLst/>
+          </a:prstGeom>
+          <a:noFill/>
+        </p:spPr>
+        <p:txBody>
+          <a:bodyPr wrap="square" anchor="t" lIns="0" rIns="0" tIns="0" bIns="0">
+            <a:spAutoFit/>
+          </a:bodyPr>
+          <a:lstStyle/>
+          <a:p>
+            <a:pPr algn="l"/>
+            <a:r>
+              <a:rPr sz="2900" b="1">
+                <a:solidFill>
+                  <a:srgbClr val="0F2145"/>
+                </a:solidFill>
                 <a:latin typeface="Georgia"/>
               </a:rPr>
-              <a:t>Q1</a:t>
-            </a:r>
-          </a:p>
-        </p:txBody>
-      </p:sp>
-      <p:sp>
-        <p:nvSpPr>
-          <p:cNvPr id="8" name="TextBox 7"/>
-          <p:cNvSpPr txBox="1"/>
-          <p:nvPr/>
-        </p:nvSpPr>
-        <p:spPr>
-          <a:xfrm>
-            <a:off x="1554480" y="1499616"/>
-            <a:ext cx="9875520" cy="585216"/>
-          </a:xfrm>
-          <a:prstGeom prst="rect">
-            <a:avLst/>
-          </a:prstGeom>
-          <a:noFill/>
-        </p:spPr>
-        <p:txBody>
-          <a:bodyPr wrap="square" anchor="t" lIns="0" rIns="0" tIns="0" bIns="0">
-            <a:spAutoFit/>
-          </a:bodyPr>
-          <a:lstStyle/>
-          <a:p>
-            <a:pPr algn="l"/>
-            <a:r>
-              <a:rPr sz="1050" b="1">
-                <a:solidFill>
-                  <a:srgbClr val="1B2A41"/>
-                </a:solidFill>
-              </a:rPr>
-              <a:t>A bank holds CET1 capital of ₹2,75,000 crore against risk weighted assets of ₹17,40,000 crore. What is its CET1 ratio, and does a D-SIB pass?</a:t>
-            </a:r>
-          </a:p>
-          <a:p>
-            <a:pPr algn="l">
-              <a:spcBef>
-                <a:spcPts val="200"/>
-              </a:spcBef>
-            </a:pPr>
-            <a:r>
-              <a:rPr sz="900" b="1">
-                <a:solidFill>
-                  <a:srgbClr val="C9A227"/>
-                </a:solidFill>
-              </a:rPr>
-              <a:t>TIP  </a:t>
-            </a:r>
-            <a:r>
-              <a:rPr sz="900" b="0">
-                <a:solidFill>
-                  <a:srgbClr val="5D6B7E"/>
-                </a:solidFill>
-              </a:rPr>
-              <a:t>15.8%. The D-SIB floor is 5.5% + 2.5% buffer + 0.2% surcharge = 8.2%, so it passes with room to spare.</a:t>
-            </a:r>
-          </a:p>
-        </p:txBody>
-      </p:sp>
-      <p:sp>
-        <p:nvSpPr>
-          <p:cNvPr id="9" name="Rectangle 8"/>
+              <a:t>Two screens every new client goes through</a:t>
+            </a:r>
+          </a:p>
+        </p:txBody>
+      </p:sp>
+      <p:sp>
+        <p:nvSpPr>
+          <p:cNvPr id="5" name="Rectangle 4"/>
           <p:cNvSpPr/>
           <p:nvPr/>
         </p:nvSpPr>
         <p:spPr>
           <a:xfrm>
-            <a:off x="548640" y="2176272"/>
-            <a:ext cx="11091672" cy="676656"/>
+            <a:off x="548640" y="1444752"/>
+            <a:ext cx="5422392" cy="2889504"/>
           </a:xfrm>
           <a:prstGeom prst="rect">
             <a:avLst/>
@@ -8631,13 +10019,2538 @@
       </p:sp>
       <p:sp>
         <p:nvSpPr>
+          <p:cNvPr id="6" name="Rectangle 5"/>
+          <p:cNvSpPr/>
+          <p:nvPr/>
+        </p:nvSpPr>
+        <p:spPr>
+          <a:xfrm>
+            <a:off x="548640" y="1444752"/>
+            <a:ext cx="5422392" cy="54864"/>
+          </a:xfrm>
+          <a:prstGeom prst="rect">
+            <a:avLst/>
+          </a:prstGeom>
+          <a:solidFill>
+            <a:srgbClr val="C9A227"/>
+          </a:solidFill>
+          <a:ln>
+            <a:noFill/>
+          </a:ln>
+          <a:effectLst/>
+        </p:spPr>
+        <p:style>
+          <a:lnRef idx="1">
+            <a:schemeClr val="accent1"/>
+          </a:lnRef>
+          <a:fillRef idx="3">
+            <a:schemeClr val="accent1"/>
+          </a:fillRef>
+          <a:effectRef idx="2">
+            <a:schemeClr val="accent1"/>
+          </a:effectRef>
+          <a:fontRef idx="minor">
+            <a:schemeClr val="lt1"/>
+          </a:fontRef>
+        </p:style>
+        <p:txBody>
+          <a:bodyPr rtlCol="0" anchor="ctr"/>
+          <a:lstStyle/>
+          <a:p>
+            <a:pPr algn="ctr"/>
+          </a:p>
+        </p:txBody>
+      </p:sp>
+      <p:sp>
+        <p:nvSpPr>
+          <p:cNvPr id="7" name="TextBox 6"/>
+          <p:cNvSpPr txBox="1"/>
+          <p:nvPr/>
+        </p:nvSpPr>
+        <p:spPr>
+          <a:xfrm>
+            <a:off x="822959" y="1682496"/>
+            <a:ext cx="4846320" cy="274320"/>
+          </a:xfrm>
+          <a:prstGeom prst="rect">
+            <a:avLst/>
+          </a:prstGeom>
+          <a:noFill/>
+        </p:spPr>
+        <p:txBody>
+          <a:bodyPr wrap="square" anchor="t" lIns="0" rIns="0" tIns="0" bIns="0">
+            <a:spAutoFit/>
+          </a:bodyPr>
+          <a:lstStyle/>
+          <a:p>
+            <a:pPr algn="l"/>
+            <a:r>
+              <a:rPr sz="1000" b="1">
+                <a:solidFill>
+                  <a:srgbClr val="3A5C9E"/>
+                </a:solidFill>
+              </a:rPr>
+              <a:t>THE COSIMA CHECK</a:t>
+            </a:r>
+          </a:p>
+        </p:txBody>
+      </p:sp>
+      <p:sp>
+        <p:nvSpPr>
+          <p:cNvPr id="8" name="TextBox 7"/>
+          <p:cNvSpPr txBox="1"/>
+          <p:nvPr/>
+        </p:nvSpPr>
+        <p:spPr>
+          <a:xfrm>
+            <a:off x="822959" y="1956816"/>
+            <a:ext cx="4846320" cy="365760"/>
+          </a:xfrm>
+          <a:prstGeom prst="rect">
+            <a:avLst/>
+          </a:prstGeom>
+          <a:noFill/>
+        </p:spPr>
+        <p:txBody>
+          <a:bodyPr wrap="square" anchor="t" lIns="0" rIns="0" tIns="0" bIns="0">
+            <a:spAutoFit/>
+          </a:bodyPr>
+          <a:lstStyle/>
+          <a:p>
+            <a:pPr algn="l"/>
+            <a:r>
+              <a:rPr sz="1600" b="1">
+                <a:solidFill>
+                  <a:srgbClr val="0F2145"/>
+                </a:solidFill>
+                <a:latin typeface="Georgia"/>
+              </a:rPr>
+              <a:t>Who is this person?</a:t>
+            </a:r>
+          </a:p>
+        </p:txBody>
+      </p:sp>
+      <p:sp>
+        <p:nvSpPr>
+          <p:cNvPr id="9" name="TextBox 8"/>
+          <p:cNvSpPr txBox="1"/>
+          <p:nvPr/>
+        </p:nvSpPr>
+        <p:spPr>
+          <a:xfrm>
+            <a:off x="822959" y="2359152"/>
+            <a:ext cx="4892040" cy="1188720"/>
+          </a:xfrm>
+          <a:prstGeom prst="rect">
+            <a:avLst/>
+          </a:prstGeom>
+          <a:noFill/>
+        </p:spPr>
+        <p:txBody>
+          <a:bodyPr wrap="square" anchor="t" lIns="0" rIns="0" tIns="0" bIns="0">
+            <a:spAutoFit/>
+          </a:bodyPr>
+          <a:lstStyle/>
+          <a:p>
+            <a:pPr algn="l"/>
+            <a:r>
+              <a:rPr sz="950" b="0">
+                <a:solidFill>
+                  <a:srgbClr val="1B2A41"/>
+                </a:solidFill>
+              </a:rPr>
+              <a:t>A name screen. The client, its directors and its beneficial owners are checked against three lists: sanctions (UN, OFAC, EU and India's own), politically exposed persons, and negative news. It runs at onboarding, again on a schedule, and again when money goes to a new counterparty. The answer is a hit, no hit, or a possible match. A possible match goes to an analyst.</a:t>
+            </a:r>
+          </a:p>
+        </p:txBody>
+      </p:sp>
+      <p:sp>
+        <p:nvSpPr>
           <p:cNvPr id="10" name="Rectangle 9"/>
           <p:cNvSpPr/>
           <p:nvPr/>
         </p:nvSpPr>
         <p:spPr>
           <a:xfrm>
-            <a:off x="548640" y="2176272"/>
+            <a:off x="822959" y="3529584"/>
+            <a:ext cx="4873752" cy="457200"/>
+          </a:xfrm>
+          <a:prstGeom prst="rect">
+            <a:avLst/>
+          </a:prstGeom>
+          <a:solidFill>
+            <a:srgbClr val="E9EFF8"/>
+          </a:solidFill>
+          <a:ln>
+            <a:noFill/>
+          </a:ln>
+          <a:effectLst/>
+        </p:spPr>
+        <p:style>
+          <a:lnRef idx="1">
+            <a:schemeClr val="accent1"/>
+          </a:lnRef>
+          <a:fillRef idx="3">
+            <a:schemeClr val="accent1"/>
+          </a:fillRef>
+          <a:effectRef idx="2">
+            <a:schemeClr val="accent1"/>
+          </a:effectRef>
+          <a:fontRef idx="minor">
+            <a:schemeClr val="lt1"/>
+          </a:fontRef>
+        </p:style>
+        <p:txBody>
+          <a:bodyPr rtlCol="0" anchor="ctr"/>
+          <a:lstStyle/>
+          <a:p>
+            <a:pPr algn="ctr"/>
+          </a:p>
+        </p:txBody>
+      </p:sp>
+      <p:sp>
+        <p:nvSpPr>
+          <p:cNvPr id="11" name="TextBox 10"/>
+          <p:cNvSpPr txBox="1"/>
+          <p:nvPr/>
+        </p:nvSpPr>
+        <p:spPr>
+          <a:xfrm>
+            <a:off x="960120" y="3566160"/>
+            <a:ext cx="4617720" cy="402336"/>
+          </a:xfrm>
+          <a:prstGeom prst="rect">
+            <a:avLst/>
+          </a:prstGeom>
+          <a:noFill/>
+        </p:spPr>
+        <p:txBody>
+          <a:bodyPr wrap="square" anchor="ctr" lIns="0" rIns="0" tIns="0" bIns="0">
+            <a:spAutoFit/>
+          </a:bodyPr>
+          <a:lstStyle/>
+          <a:p>
+            <a:pPr algn="l"/>
+            <a:r>
+              <a:rPr sz="800" b="1">
+                <a:solidFill>
+                  <a:srgbClr val="3A5C9E"/>
+                </a:solidFill>
+              </a:rPr>
+              <a:t>EXAMPLE  </a:t>
+            </a:r>
+            <a:r>
+              <a:rPr sz="900" b="0">
+                <a:solidFill>
+                  <a:srgbClr val="1B2A41"/>
+                </a:solidFill>
+              </a:rPr>
+              <a:t>“Rahul Sharma” returns 300 possible matches. The analyst's job is to prove that none of them is this Rahul Sharma.</a:t>
+            </a:r>
+          </a:p>
+        </p:txBody>
+      </p:sp>
+      <p:sp>
+        <p:nvSpPr>
+          <p:cNvPr id="12" name="TextBox 11"/>
+          <p:cNvSpPr txBox="1"/>
+          <p:nvPr/>
+        </p:nvSpPr>
+        <p:spPr>
+          <a:xfrm>
+            <a:off x="822959" y="4023360"/>
+            <a:ext cx="4892040" cy="292608"/>
+          </a:xfrm>
+          <a:prstGeom prst="rect">
+            <a:avLst/>
+          </a:prstGeom>
+          <a:noFill/>
+        </p:spPr>
+        <p:txBody>
+          <a:bodyPr wrap="square" anchor="t" lIns="0" rIns="0" tIns="0" bIns="0">
+            <a:spAutoFit/>
+          </a:bodyPr>
+          <a:lstStyle/>
+          <a:p>
+            <a:pPr algn="l"/>
+            <a:r>
+              <a:rPr sz="800" b="0">
+                <a:solidFill>
+                  <a:srgbClr val="5D6B7E"/>
+                </a:solidFill>
+              </a:rPr>
+              <a:t>Custodians run Cosima checks to screen for sanctioned persons and institutions and PEPs, and use negative-news filters. UBS, News for Banks, 2019.</a:t>
+            </a:r>
+          </a:p>
+        </p:txBody>
+      </p:sp>
+      <p:sp>
+        <p:nvSpPr>
+          <p:cNvPr id="13" name="Rectangle 12"/>
+          <p:cNvSpPr/>
+          <p:nvPr/>
+        </p:nvSpPr>
+        <p:spPr>
+          <a:xfrm>
+            <a:off x="6217920" y="1444752"/>
+            <a:ext cx="5422392" cy="2889504"/>
+          </a:xfrm>
+          <a:prstGeom prst="rect">
+            <a:avLst/>
+          </a:prstGeom>
+          <a:solidFill>
+            <a:srgbClr val="FFFFFF"/>
+          </a:solidFill>
+          <a:ln>
+            <a:noFill/>
+          </a:ln>
+          <a:effectLst/>
+        </p:spPr>
+        <p:style>
+          <a:lnRef idx="1">
+            <a:schemeClr val="accent1"/>
+          </a:lnRef>
+          <a:fillRef idx="3">
+            <a:schemeClr val="accent1"/>
+          </a:fillRef>
+          <a:effectRef idx="2">
+            <a:schemeClr val="accent1"/>
+          </a:effectRef>
+          <a:fontRef idx="minor">
+            <a:schemeClr val="lt1"/>
+          </a:fontRef>
+        </p:style>
+        <p:txBody>
+          <a:bodyPr rtlCol="0" anchor="ctr"/>
+          <a:lstStyle/>
+          <a:p>
+            <a:pPr algn="ctr"/>
+          </a:p>
+        </p:txBody>
+      </p:sp>
+      <p:sp>
+        <p:nvSpPr>
+          <p:cNvPr id="14" name="Rectangle 13"/>
+          <p:cNvSpPr/>
+          <p:nvPr/>
+        </p:nvSpPr>
+        <p:spPr>
+          <a:xfrm>
+            <a:off x="6217920" y="1444752"/>
+            <a:ext cx="5422392" cy="54864"/>
+          </a:xfrm>
+          <a:prstGeom prst="rect">
+            <a:avLst/>
+          </a:prstGeom>
+          <a:solidFill>
+            <a:srgbClr val="C9A227"/>
+          </a:solidFill>
+          <a:ln>
+            <a:noFill/>
+          </a:ln>
+          <a:effectLst/>
+        </p:spPr>
+        <p:style>
+          <a:lnRef idx="1">
+            <a:schemeClr val="accent1"/>
+          </a:lnRef>
+          <a:fillRef idx="3">
+            <a:schemeClr val="accent1"/>
+          </a:fillRef>
+          <a:effectRef idx="2">
+            <a:schemeClr val="accent1"/>
+          </a:effectRef>
+          <a:fontRef idx="minor">
+            <a:schemeClr val="lt1"/>
+          </a:fontRef>
+        </p:style>
+        <p:txBody>
+          <a:bodyPr rtlCol="0" anchor="ctr"/>
+          <a:lstStyle/>
+          <a:p>
+            <a:pPr algn="ctr"/>
+          </a:p>
+        </p:txBody>
+      </p:sp>
+      <p:sp>
+        <p:nvSpPr>
+          <p:cNvPr id="15" name="TextBox 14"/>
+          <p:cNvSpPr txBox="1"/>
+          <p:nvPr/>
+        </p:nvSpPr>
+        <p:spPr>
+          <a:xfrm>
+            <a:off x="6492240" y="1682496"/>
+            <a:ext cx="4846320" cy="274320"/>
+          </a:xfrm>
+          <a:prstGeom prst="rect">
+            <a:avLst/>
+          </a:prstGeom>
+          <a:noFill/>
+        </p:spPr>
+        <p:txBody>
+          <a:bodyPr wrap="square" anchor="t" lIns="0" rIns="0" tIns="0" bIns="0">
+            <a:spAutoFit/>
+          </a:bodyPr>
+          <a:lstStyle/>
+          <a:p>
+            <a:pPr algn="l"/>
+            <a:r>
+              <a:rPr sz="1000" b="1">
+                <a:solidFill>
+                  <a:srgbClr val="3A5C9E"/>
+                </a:solidFill>
+              </a:rPr>
+              <a:t>FACTIVA</a:t>
+            </a:r>
+          </a:p>
+        </p:txBody>
+      </p:sp>
+      <p:sp>
+        <p:nvSpPr>
+          <p:cNvPr id="16" name="TextBox 15"/>
+          <p:cNvSpPr txBox="1"/>
+          <p:nvPr/>
+        </p:nvSpPr>
+        <p:spPr>
+          <a:xfrm>
+            <a:off x="6492240" y="1956816"/>
+            <a:ext cx="4846320" cy="365760"/>
+          </a:xfrm>
+          <a:prstGeom prst="rect">
+            <a:avLst/>
+          </a:prstGeom>
+          <a:noFill/>
+        </p:spPr>
+        <p:txBody>
+          <a:bodyPr wrap="square" anchor="t" lIns="0" rIns="0" tIns="0" bIns="0">
+            <a:spAutoFit/>
+          </a:bodyPr>
+          <a:lstStyle/>
+          <a:p>
+            <a:pPr algn="l"/>
+            <a:r>
+              <a:rPr sz="1600" b="1">
+                <a:solidFill>
+                  <a:srgbClr val="0F2145"/>
+                </a:solidFill>
+                <a:latin typeface="Georgia"/>
+              </a:rPr>
+              <a:t>What has been written about them?</a:t>
+            </a:r>
+          </a:p>
+        </p:txBody>
+      </p:sp>
+      <p:sp>
+        <p:nvSpPr>
+          <p:cNvPr id="17" name="TextBox 16"/>
+          <p:cNvSpPr txBox="1"/>
+          <p:nvPr/>
+        </p:nvSpPr>
+        <p:spPr>
+          <a:xfrm>
+            <a:off x="6492240" y="2359152"/>
+            <a:ext cx="4892040" cy="1188720"/>
+          </a:xfrm>
+          <a:prstGeom prst="rect">
+            <a:avLst/>
+          </a:prstGeom>
+          <a:noFill/>
+        </p:spPr>
+        <p:txBody>
+          <a:bodyPr wrap="square" anchor="t" lIns="0" rIns="0" tIns="0" bIns="0">
+            <a:spAutoFit/>
+          </a:bodyPr>
+          <a:lstStyle/>
+          <a:p>
+            <a:pPr algn="l"/>
+            <a:r>
+              <a:rPr sz="950" b="0">
+                <a:solidFill>
+                  <a:srgbClr val="1B2A41"/>
+                </a:solidFill>
+              </a:rPr>
+              <a:t>Dow Jones's news archive. Thousands of newspapers, wires and trade journals, searchable by name and date. Compliance uses it for adverse-media screening: has this person or company been written about for fraud, bribery, sanctions or a court case? The search result is the raw material for the negative-news part of the screen above.</a:t>
+            </a:r>
+          </a:p>
+        </p:txBody>
+      </p:sp>
+      <p:sp>
+        <p:nvSpPr>
+          <p:cNvPr id="18" name="Rectangle 17"/>
+          <p:cNvSpPr/>
+          <p:nvPr/>
+        </p:nvSpPr>
+        <p:spPr>
+          <a:xfrm>
+            <a:off x="6492240" y="3529584"/>
+            <a:ext cx="4873752" cy="457200"/>
+          </a:xfrm>
+          <a:prstGeom prst="rect">
+            <a:avLst/>
+          </a:prstGeom>
+          <a:solidFill>
+            <a:srgbClr val="E9EFF8"/>
+          </a:solidFill>
+          <a:ln>
+            <a:noFill/>
+          </a:ln>
+          <a:effectLst/>
+        </p:spPr>
+        <p:style>
+          <a:lnRef idx="1">
+            <a:schemeClr val="accent1"/>
+          </a:lnRef>
+          <a:fillRef idx="3">
+            <a:schemeClr val="accent1"/>
+          </a:fillRef>
+          <a:effectRef idx="2">
+            <a:schemeClr val="accent1"/>
+          </a:effectRef>
+          <a:fontRef idx="minor">
+            <a:schemeClr val="lt1"/>
+          </a:fontRef>
+        </p:style>
+        <p:txBody>
+          <a:bodyPr rtlCol="0" anchor="ctr"/>
+          <a:lstStyle/>
+          <a:p>
+            <a:pPr algn="ctr"/>
+          </a:p>
+        </p:txBody>
+      </p:sp>
+      <p:sp>
+        <p:nvSpPr>
+          <p:cNvPr id="19" name="TextBox 18"/>
+          <p:cNvSpPr txBox="1"/>
+          <p:nvPr/>
+        </p:nvSpPr>
+        <p:spPr>
+          <a:xfrm>
+            <a:off x="6629400" y="3566160"/>
+            <a:ext cx="4617720" cy="402336"/>
+          </a:xfrm>
+          <a:prstGeom prst="rect">
+            <a:avLst/>
+          </a:prstGeom>
+          <a:noFill/>
+        </p:spPr>
+        <p:txBody>
+          <a:bodyPr wrap="square" anchor="ctr" lIns="0" rIns="0" tIns="0" bIns="0">
+            <a:spAutoFit/>
+          </a:bodyPr>
+          <a:lstStyle/>
+          <a:p>
+            <a:pPr algn="l"/>
+            <a:r>
+              <a:rPr sz="800" b="1">
+                <a:solidFill>
+                  <a:srgbClr val="3A5C9E"/>
+                </a:solidFill>
+              </a:rPr>
+              <a:t>EXAMPLE  </a:t>
+            </a:r>
+            <a:r>
+              <a:rPr sz="900" b="0">
+                <a:solidFill>
+                  <a:srgbClr val="1B2A41"/>
+                </a:solidFill>
+              </a:rPr>
+              <a:t>Search the promoter's name. Forty articles. Six are about a different person with the same name. Thirty are routine. Four mention an ED investigation. Those four are the file.</a:t>
+            </a:r>
+          </a:p>
+        </p:txBody>
+      </p:sp>
+      <p:sp>
+        <p:nvSpPr>
+          <p:cNvPr id="20" name="TextBox 19"/>
+          <p:cNvSpPr txBox="1"/>
+          <p:nvPr/>
+        </p:nvSpPr>
+        <p:spPr>
+          <a:xfrm>
+            <a:off x="6492240" y="4023360"/>
+            <a:ext cx="4892040" cy="292608"/>
+          </a:xfrm>
+          <a:prstGeom prst="rect">
+            <a:avLst/>
+          </a:prstGeom>
+          <a:noFill/>
+        </p:spPr>
+        <p:txBody>
+          <a:bodyPr wrap="square" anchor="t" lIns="0" rIns="0" tIns="0" bIns="0">
+            <a:spAutoFit/>
+          </a:bodyPr>
+          <a:lstStyle/>
+          <a:p>
+            <a:pPr algn="l"/>
+            <a:r>
+              <a:rPr sz="800" b="0">
+                <a:solidFill>
+                  <a:srgbClr val="5D6B7E"/>
+                </a:solidFill>
+              </a:rPr>
+              <a:t>The cost of screening is not the hits. It is the false positives on common names.</a:t>
+            </a:r>
+          </a:p>
+        </p:txBody>
+      </p:sp>
+      <p:sp>
+        <p:nvSpPr>
+          <p:cNvPr id="21" name="Rectangle 20"/>
+          <p:cNvSpPr/>
+          <p:nvPr/>
+        </p:nvSpPr>
+        <p:spPr>
+          <a:xfrm>
+            <a:off x="548640" y="4480560"/>
+            <a:ext cx="11091672" cy="1188720"/>
+          </a:xfrm>
+          <a:prstGeom prst="rect">
+            <a:avLst/>
+          </a:prstGeom>
+          <a:solidFill>
+            <a:srgbClr val="0F2145"/>
+          </a:solidFill>
+          <a:ln>
+            <a:noFill/>
+          </a:ln>
+          <a:effectLst/>
+        </p:spPr>
+        <p:style>
+          <a:lnRef idx="1">
+            <a:schemeClr val="accent1"/>
+          </a:lnRef>
+          <a:fillRef idx="3">
+            <a:schemeClr val="accent1"/>
+          </a:fillRef>
+          <a:effectRef idx="2">
+            <a:schemeClr val="accent1"/>
+          </a:effectRef>
+          <a:fontRef idx="minor">
+            <a:schemeClr val="lt1"/>
+          </a:fontRef>
+        </p:style>
+        <p:txBody>
+          <a:bodyPr rtlCol="0" anchor="ctr"/>
+          <a:lstStyle/>
+          <a:p>
+            <a:pPr algn="ctr"/>
+          </a:p>
+        </p:txBody>
+      </p:sp>
+      <p:sp>
+        <p:nvSpPr>
+          <p:cNvPr id="22" name="Rectangle 21"/>
+          <p:cNvSpPr/>
+          <p:nvPr/>
+        </p:nvSpPr>
+        <p:spPr>
+          <a:xfrm>
+            <a:off x="548640" y="4480560"/>
+            <a:ext cx="64008" cy="1188720"/>
+          </a:xfrm>
+          <a:prstGeom prst="rect">
+            <a:avLst/>
+          </a:prstGeom>
+          <a:solidFill>
+            <a:srgbClr val="C9A227"/>
+          </a:solidFill>
+          <a:ln>
+            <a:noFill/>
+          </a:ln>
+          <a:effectLst/>
+        </p:spPr>
+        <p:style>
+          <a:lnRef idx="1">
+            <a:schemeClr val="accent1"/>
+          </a:lnRef>
+          <a:fillRef idx="3">
+            <a:schemeClr val="accent1"/>
+          </a:fillRef>
+          <a:effectRef idx="2">
+            <a:schemeClr val="accent1"/>
+          </a:effectRef>
+          <a:fontRef idx="minor">
+            <a:schemeClr val="lt1"/>
+          </a:fontRef>
+        </p:style>
+        <p:txBody>
+          <a:bodyPr rtlCol="0" anchor="ctr"/>
+          <a:lstStyle/>
+          <a:p>
+            <a:pPr algn="ctr"/>
+          </a:p>
+        </p:txBody>
+      </p:sp>
+      <p:sp>
+        <p:nvSpPr>
+          <p:cNvPr id="23" name="TextBox 22"/>
+          <p:cNvSpPr txBox="1"/>
+          <p:nvPr/>
+        </p:nvSpPr>
+        <p:spPr>
+          <a:xfrm>
+            <a:off x="868680" y="4553712"/>
+            <a:ext cx="10515600" cy="274320"/>
+          </a:xfrm>
+          <a:prstGeom prst="rect">
+            <a:avLst/>
+          </a:prstGeom>
+          <a:noFill/>
+        </p:spPr>
+        <p:txBody>
+          <a:bodyPr wrap="square" anchor="t" lIns="0" rIns="0" tIns="0" bIns="0">
+            <a:spAutoFit/>
+          </a:bodyPr>
+          <a:lstStyle/>
+          <a:p>
+            <a:pPr algn="l"/>
+            <a:r>
+              <a:rPr sz="950" b="1">
+                <a:solidFill>
+                  <a:srgbClr val="C9A227"/>
+                </a:solidFill>
+              </a:rPr>
+              <a:t>WHERE AN LLM FITS, AND WHERE IT DOES NOT</a:t>
+            </a:r>
+          </a:p>
+        </p:txBody>
+      </p:sp>
+      <p:sp>
+        <p:nvSpPr>
+          <p:cNvPr id="24" name="TextBox 23"/>
+          <p:cNvSpPr txBox="1"/>
+          <p:nvPr/>
+        </p:nvSpPr>
+        <p:spPr>
+          <a:xfrm>
+            <a:off x="868680" y="4846320"/>
+            <a:ext cx="3429000" cy="777240"/>
+          </a:xfrm>
+          <a:prstGeom prst="rect">
+            <a:avLst/>
+          </a:prstGeom>
+          <a:noFill/>
+        </p:spPr>
+        <p:txBody>
+          <a:bodyPr wrap="square" anchor="t" lIns="0" rIns="0" tIns="0" bIns="0">
+            <a:spAutoFit/>
+          </a:bodyPr>
+          <a:lstStyle/>
+          <a:p>
+            <a:pPr algn="l"/>
+            <a:r>
+              <a:rPr sz="950" b="1">
+                <a:solidFill>
+                  <a:srgbClr val="FFFFFF"/>
+                </a:solidFill>
+              </a:rPr>
+              <a:t>Disambiguate.  </a:t>
+            </a:r>
+            <a:r>
+              <a:rPr sz="950" b="0">
+                <a:solidFill>
+                  <a:srgbClr val="C9D6EE"/>
+                </a:solidFill>
+              </a:rPr>
+              <a:t>Read the 300 possible matches and say which ones share this client's date of birth, city and employer, and which are strangers with the same name.</a:t>
+            </a:r>
+          </a:p>
+        </p:txBody>
+      </p:sp>
+      <p:sp>
+        <p:nvSpPr>
+          <p:cNvPr id="25" name="TextBox 24"/>
+          <p:cNvSpPr txBox="1"/>
+          <p:nvPr/>
+        </p:nvSpPr>
+        <p:spPr>
+          <a:xfrm>
+            <a:off x="4480560" y="4846320"/>
+            <a:ext cx="3429000" cy="777240"/>
+          </a:xfrm>
+          <a:prstGeom prst="rect">
+            <a:avLst/>
+          </a:prstGeom>
+          <a:noFill/>
+        </p:spPr>
+        <p:txBody>
+          <a:bodyPr wrap="square" anchor="t" lIns="0" rIns="0" tIns="0" bIns="0">
+            <a:spAutoFit/>
+          </a:bodyPr>
+          <a:lstStyle/>
+          <a:p>
+            <a:pPr algn="l"/>
+            <a:r>
+              <a:rPr sz="950" b="1">
+                <a:solidFill>
+                  <a:srgbClr val="FFFFFF"/>
+                </a:solidFill>
+              </a:rPr>
+              <a:t>Classify and summarise.  </a:t>
+            </a:r>
+            <a:r>
+              <a:rPr sz="950" b="0">
+                <a:solidFill>
+                  <a:srgbClr val="C9D6EE"/>
+                </a:solidFill>
+              </a:rPr>
+              <a:t>Sort the real hits into fraud, sanctions, litigation or benign, and draft the screening memo with a quote and a link for each one.</a:t>
+            </a:r>
+          </a:p>
+        </p:txBody>
+      </p:sp>
+      <p:sp>
+        <p:nvSpPr>
+          <p:cNvPr id="26" name="TextBox 25"/>
+          <p:cNvSpPr txBox="1"/>
+          <p:nvPr/>
+        </p:nvSpPr>
+        <p:spPr>
+          <a:xfrm>
+            <a:off x="8092440" y="4846320"/>
+            <a:ext cx="3429000" cy="777240"/>
+          </a:xfrm>
+          <a:prstGeom prst="rect">
+            <a:avLst/>
+          </a:prstGeom>
+          <a:noFill/>
+        </p:spPr>
+        <p:txBody>
+          <a:bodyPr wrap="square" anchor="t" lIns="0" rIns="0" tIns="0" bIns="0">
+            <a:spAutoFit/>
+          </a:bodyPr>
+          <a:lstStyle/>
+          <a:p>
+            <a:pPr algn="l"/>
+            <a:r>
+              <a:rPr sz="950" b="1">
+                <a:solidFill>
+                  <a:srgbClr val="FFFFFF"/>
+                </a:solidFill>
+              </a:rPr>
+              <a:t>Never clear.  </a:t>
+            </a:r>
+            <a:r>
+              <a:rPr sz="950" b="0">
+                <a:solidFill>
+                  <a:srgbClr val="C9D6EE"/>
+                </a:solidFill>
+              </a:rPr>
+              <a:t>The model proposes, the analyst disposes. A cleared hit carries the analyst's name, and the memo is checked against the sources before it is filed.</a:t>
+            </a:r>
+          </a:p>
+        </p:txBody>
+      </p:sp>
+      <p:sp>
+        <p:nvSpPr>
+          <p:cNvPr id="27" name="Rectangle 26"/>
+          <p:cNvSpPr/>
+          <p:nvPr/>
+        </p:nvSpPr>
+        <p:spPr>
+          <a:xfrm>
+            <a:off x="548640" y="5760720"/>
+            <a:ext cx="11091672" cy="603504"/>
+          </a:xfrm>
+          <a:prstGeom prst="rect">
+            <a:avLst/>
+          </a:prstGeom>
+          <a:solidFill>
+            <a:srgbClr val="0F2145"/>
+          </a:solidFill>
+          <a:ln>
+            <a:noFill/>
+          </a:ln>
+          <a:effectLst/>
+        </p:spPr>
+        <p:style>
+          <a:lnRef idx="1">
+            <a:schemeClr val="accent1"/>
+          </a:lnRef>
+          <a:fillRef idx="3">
+            <a:schemeClr val="accent1"/>
+          </a:fillRef>
+          <a:effectRef idx="2">
+            <a:schemeClr val="accent1"/>
+          </a:effectRef>
+          <a:fontRef idx="minor">
+            <a:schemeClr val="lt1"/>
+          </a:fontRef>
+        </p:style>
+        <p:txBody>
+          <a:bodyPr rtlCol="0" anchor="ctr"/>
+          <a:lstStyle/>
+          <a:p>
+            <a:pPr algn="ctr"/>
+          </a:p>
+        </p:txBody>
+      </p:sp>
+      <p:sp>
+        <p:nvSpPr>
+          <p:cNvPr id="28" name="Rectangle 27"/>
+          <p:cNvSpPr/>
+          <p:nvPr/>
+        </p:nvSpPr>
+        <p:spPr>
+          <a:xfrm>
+            <a:off x="548640" y="5760720"/>
+            <a:ext cx="64008" cy="603504"/>
+          </a:xfrm>
+          <a:prstGeom prst="rect">
+            <a:avLst/>
+          </a:prstGeom>
+          <a:solidFill>
+            <a:srgbClr val="C9A227"/>
+          </a:solidFill>
+          <a:ln>
+            <a:noFill/>
+          </a:ln>
+          <a:effectLst/>
+        </p:spPr>
+        <p:style>
+          <a:lnRef idx="1">
+            <a:schemeClr val="accent1"/>
+          </a:lnRef>
+          <a:fillRef idx="3">
+            <a:schemeClr val="accent1"/>
+          </a:fillRef>
+          <a:effectRef idx="2">
+            <a:schemeClr val="accent1"/>
+          </a:effectRef>
+          <a:fontRef idx="minor">
+            <a:schemeClr val="lt1"/>
+          </a:fontRef>
+        </p:style>
+        <p:txBody>
+          <a:bodyPr rtlCol="0" anchor="ctr"/>
+          <a:lstStyle/>
+          <a:p>
+            <a:pPr algn="ctr"/>
+          </a:p>
+        </p:txBody>
+      </p:sp>
+      <p:sp>
+        <p:nvSpPr>
+          <p:cNvPr id="29" name="TextBox 28"/>
+          <p:cNvSpPr txBox="1"/>
+          <p:nvPr/>
+        </p:nvSpPr>
+        <p:spPr>
+          <a:xfrm>
+            <a:off x="822960" y="5760720"/>
+            <a:ext cx="10543032" cy="603504"/>
+          </a:xfrm>
+          <a:prstGeom prst="rect">
+            <a:avLst/>
+          </a:prstGeom>
+          <a:noFill/>
+        </p:spPr>
+        <p:txBody>
+          <a:bodyPr wrap="square" anchor="ctr" lIns="0" rIns="0" tIns="0" bIns="0">
+            <a:spAutoFit/>
+          </a:bodyPr>
+          <a:lstStyle/>
+          <a:p>
+            <a:pPr algn="l"/>
+            <a:r>
+              <a:rPr sz="1200" b="1">
+                <a:solidFill>
+                  <a:srgbClr val="C9A227"/>
+                </a:solidFill>
+              </a:rPr>
+              <a:t>Why this is the best place to start with an LLM:  </a:t>
+            </a:r>
+            <a:r>
+              <a:rPr sz="1200" b="0">
+                <a:solidFill>
+                  <a:srgbClr val="FFFFFF"/>
+                </a:solidFill>
+              </a:rPr>
+              <a:t>an analyst spends most of the day proving that 299 Rahul Sharmas are not the client. That is reading, and reading is what the model is for.</a:t>
+            </a:r>
+          </a:p>
+        </p:txBody>
+      </p:sp>
+      <p:sp>
+        <p:nvSpPr>
+          <p:cNvPr id="30" name="TextBox 29"/>
+          <p:cNvSpPr txBox="1"/>
+          <p:nvPr/>
+        </p:nvSpPr>
+        <p:spPr>
+          <a:xfrm>
+            <a:off x="548640" y="6473952"/>
+            <a:ext cx="7315200" cy="228600"/>
+          </a:xfrm>
+          <a:prstGeom prst="rect">
+            <a:avLst/>
+          </a:prstGeom>
+          <a:noFill/>
+        </p:spPr>
+        <p:txBody>
+          <a:bodyPr wrap="square" anchor="t" lIns="0" rIns="0" tIns="0" bIns="0">
+            <a:spAutoFit/>
+          </a:bodyPr>
+          <a:lstStyle/>
+          <a:p>
+            <a:pPr algn="l"/>
+            <a:r>
+              <a:rPr sz="800" b="0">
+                <a:solidFill>
+                  <a:srgbClr val="5D6B7E"/>
+                </a:solidFill>
+              </a:rPr>
+              <a:t>ISBMS · PGDM 2025–27 · AGENTIC AI &amp; ADVANCED ANALYTICS IN FINANCE</a:t>
+            </a:r>
+          </a:p>
+        </p:txBody>
+      </p:sp>
+      <p:sp>
+        <p:nvSpPr>
+          <p:cNvPr id="31" name="TextBox 30"/>
+          <p:cNvSpPr txBox="1"/>
+          <p:nvPr/>
+        </p:nvSpPr>
+        <p:spPr>
+          <a:xfrm>
+            <a:off x="9262872" y="6473952"/>
+            <a:ext cx="2377440" cy="228600"/>
+          </a:xfrm>
+          <a:prstGeom prst="rect">
+            <a:avLst/>
+          </a:prstGeom>
+          <a:noFill/>
+        </p:spPr>
+        <p:txBody>
+          <a:bodyPr wrap="square" anchor="t" lIns="0" rIns="0" tIns="0" bIns="0">
+            <a:spAutoFit/>
+          </a:bodyPr>
+          <a:lstStyle/>
+          <a:p>
+            <a:pPr algn="r"/>
+            <a:r>
+              <a:rPr sz="800" b="0">
+                <a:solidFill>
+                  <a:srgbClr val="5D6B7E"/>
+                </a:solidFill>
+              </a:rPr>
+              <a:t>MODULE 6  ·  06</a:t>
+            </a:r>
+          </a:p>
+        </p:txBody>
+      </p:sp>
+    </p:spTree>
+  </p:cSld>
+  <p:clrMapOvr>
+    <a:masterClrMapping/>
+  </p:clrMapOvr>
+</p:sld>
+</file>
+
+<file path=ppt/slides/slide7.xml><?xml version="1.0" encoding="utf-8"?>
+<p:sld xmlns:a="http://schemas.openxmlformats.org/drawingml/2006/main" xmlns:p="http://schemas.openxmlformats.org/presentationml/2006/main" xmlns:r="http://schemas.openxmlformats.org/officeDocument/2006/relationships">
+  <p:cSld>
+    <p:bg>
+      <p:bgPr>
+        <a:solidFill>
+          <a:srgbClr val="F7F8FA"/>
+        </a:solidFill>
+        <a:effectLst/>
+      </p:bgPr>
+    </p:bg>
+    <p:spTree>
+      <p:nvGrpSpPr>
+        <p:cNvPr id="1" name=""/>
+        <p:cNvGrpSpPr/>
+        <p:nvPr/>
+      </p:nvGrpSpPr>
+      <p:grpSpPr/>
+      <p:sp>
+        <p:nvSpPr>
+          <p:cNvPr id="2" name="Rectangle 1"/>
+          <p:cNvSpPr/>
+          <p:nvPr/>
+        </p:nvSpPr>
+        <p:spPr>
+          <a:xfrm>
+            <a:off x="548640" y="402336"/>
+            <a:ext cx="118872" cy="118872"/>
+          </a:xfrm>
+          <a:prstGeom prst="rect">
+            <a:avLst/>
+          </a:prstGeom>
+          <a:solidFill>
+            <a:srgbClr val="C9A227"/>
+          </a:solidFill>
+          <a:ln>
+            <a:noFill/>
+          </a:ln>
+          <a:effectLst/>
+        </p:spPr>
+        <p:style>
+          <a:lnRef idx="1">
+            <a:schemeClr val="accent1"/>
+          </a:lnRef>
+          <a:fillRef idx="3">
+            <a:schemeClr val="accent1"/>
+          </a:fillRef>
+          <a:effectRef idx="2">
+            <a:schemeClr val="accent1"/>
+          </a:effectRef>
+          <a:fontRef idx="minor">
+            <a:schemeClr val="lt1"/>
+          </a:fontRef>
+        </p:style>
+        <p:txBody>
+          <a:bodyPr rtlCol="0" anchor="ctr"/>
+          <a:lstStyle/>
+          <a:p>
+            <a:pPr algn="ctr"/>
+          </a:p>
+        </p:txBody>
+      </p:sp>
+      <p:sp>
+        <p:nvSpPr>
+          <p:cNvPr id="3" name="TextBox 2"/>
+          <p:cNvSpPr txBox="1"/>
+          <p:nvPr/>
+        </p:nvSpPr>
+        <p:spPr>
+          <a:xfrm>
+            <a:off x="786384" y="310896"/>
+            <a:ext cx="10817352" cy="274320"/>
+          </a:xfrm>
+          <a:prstGeom prst="rect">
+            <a:avLst/>
+          </a:prstGeom>
+          <a:noFill/>
+        </p:spPr>
+        <p:txBody>
+          <a:bodyPr wrap="square" anchor="t" lIns="0" rIns="0" tIns="0" bIns="0">
+            <a:spAutoFit/>
+          </a:bodyPr>
+          <a:lstStyle/>
+          <a:p>
+            <a:pPr algn="l"/>
+            <a:r>
+              <a:rPr sz="1100" b="1">
+                <a:solidFill>
+                  <a:srgbClr val="C9A227"/>
+                </a:solidFill>
+              </a:rPr>
+              <a:t>HOUR 3 · THE LAB</a:t>
+            </a:r>
+          </a:p>
+        </p:txBody>
+      </p:sp>
+      <p:sp>
+        <p:nvSpPr>
+          <p:cNvPr id="4" name="TextBox 3"/>
+          <p:cNvSpPr txBox="1"/>
+          <p:nvPr/>
+        </p:nvSpPr>
+        <p:spPr>
+          <a:xfrm>
+            <a:off x="548640" y="621792"/>
+            <a:ext cx="11091672" cy="731520"/>
+          </a:xfrm>
+          <a:prstGeom prst="rect">
+            <a:avLst/>
+          </a:prstGeom>
+          <a:noFill/>
+        </p:spPr>
+        <p:txBody>
+          <a:bodyPr wrap="square" anchor="t" lIns="0" rIns="0" tIns="0" bIns="0">
+            <a:spAutoFit/>
+          </a:bodyPr>
+          <a:lstStyle/>
+          <a:p>
+            <a:pPr algn="l"/>
+            <a:r>
+              <a:rPr sz="2900" b="1">
+                <a:solidFill>
+                  <a:srgbClr val="0F2145"/>
+                </a:solidFill>
+                <a:latin typeface="Georgia"/>
+              </a:rPr>
+              <a:t>One sentence, one Word document, one check</a:t>
+            </a:r>
+          </a:p>
+        </p:txBody>
+      </p:sp>
+      <p:sp>
+        <p:nvSpPr>
+          <p:cNvPr id="5" name="Rectangle 4"/>
+          <p:cNvSpPr/>
+          <p:nvPr/>
+        </p:nvSpPr>
+        <p:spPr>
+          <a:xfrm>
+            <a:off x="548640" y="1444752"/>
+            <a:ext cx="11091672" cy="768096"/>
+          </a:xfrm>
+          <a:prstGeom prst="rect">
+            <a:avLst/>
+          </a:prstGeom>
+          <a:solidFill>
+            <a:srgbClr val="0B1936"/>
+          </a:solidFill>
+          <a:ln>
+            <a:noFill/>
+          </a:ln>
+          <a:effectLst/>
+        </p:spPr>
+        <p:style>
+          <a:lnRef idx="1">
+            <a:schemeClr val="accent1"/>
+          </a:lnRef>
+          <a:fillRef idx="3">
+            <a:schemeClr val="accent1"/>
+          </a:fillRef>
+          <a:effectRef idx="2">
+            <a:schemeClr val="accent1"/>
+          </a:effectRef>
+          <a:fontRef idx="minor">
+            <a:schemeClr val="lt1"/>
+          </a:fontRef>
+        </p:style>
+        <p:txBody>
+          <a:bodyPr rtlCol="0" anchor="ctr"/>
+          <a:lstStyle/>
+          <a:p>
+            <a:pPr algn="ctr"/>
+          </a:p>
+        </p:txBody>
+      </p:sp>
+      <p:sp>
+        <p:nvSpPr>
+          <p:cNvPr id="6" name="Rectangle 5"/>
+          <p:cNvSpPr/>
+          <p:nvPr/>
+        </p:nvSpPr>
+        <p:spPr>
+          <a:xfrm>
+            <a:off x="548640" y="1444752"/>
+            <a:ext cx="64008" cy="768096"/>
+          </a:xfrm>
+          <a:prstGeom prst="rect">
+            <a:avLst/>
+          </a:prstGeom>
+          <a:solidFill>
+            <a:srgbClr val="C9A227"/>
+          </a:solidFill>
+          <a:ln>
+            <a:noFill/>
+          </a:ln>
+          <a:effectLst/>
+        </p:spPr>
+        <p:style>
+          <a:lnRef idx="1">
+            <a:schemeClr val="accent1"/>
+          </a:lnRef>
+          <a:fillRef idx="3">
+            <a:schemeClr val="accent1"/>
+          </a:fillRef>
+          <a:effectRef idx="2">
+            <a:schemeClr val="accent1"/>
+          </a:effectRef>
+          <a:fontRef idx="minor">
+            <a:schemeClr val="lt1"/>
+          </a:fontRef>
+        </p:style>
+        <p:txBody>
+          <a:bodyPr rtlCol="0" anchor="ctr"/>
+          <a:lstStyle/>
+          <a:p>
+            <a:pPr algn="ctr"/>
+          </a:p>
+        </p:txBody>
+      </p:sp>
+      <p:sp>
+        <p:nvSpPr>
+          <p:cNvPr id="7" name="TextBox 6"/>
+          <p:cNvSpPr txBox="1"/>
+          <p:nvPr/>
+        </p:nvSpPr>
+        <p:spPr>
+          <a:xfrm>
+            <a:off x="868680" y="1444752"/>
+            <a:ext cx="10515600" cy="768096"/>
+          </a:xfrm>
+          <a:prstGeom prst="rect">
+            <a:avLst/>
+          </a:prstGeom>
+          <a:noFill/>
+        </p:spPr>
+        <p:txBody>
+          <a:bodyPr wrap="square" anchor="ctr" lIns="0" rIns="0" tIns="0" bIns="0">
+            <a:spAutoFit/>
+          </a:bodyPr>
+          <a:lstStyle/>
+          <a:p>
+            <a:pPr algn="l"/>
+            <a:r>
+              <a:rPr sz="850" b="1">
+                <a:solidFill>
+                  <a:srgbClr val="C9A227"/>
+                </a:solidFill>
+              </a:rPr>
+              <a:t>THE SENTENCE WE TYPE</a:t>
+            </a:r>
+          </a:p>
+          <a:p>
+            <a:pPr algn="l">
+              <a:spcBef>
+                <a:spcPts val="200"/>
+              </a:spcBef>
+            </a:pPr>
+            <a:r>
+              <a:rPr sz="1200" b="1">
+                <a:solidFill>
+                  <a:srgbClr val="FFFFFF"/>
+                </a:solidFill>
+                <a:latin typeface="Georgia"/>
+              </a:rPr>
+              <a:t>“Here is a bank's capital, RWA and leverage data in bank_data.json. Compute CET1, Tier 1, total capital, leverage, LCR and NSFR, compare each with the RBI minimum, and write a Pillar 3 disclosure in Word with the DF-2 and DF-18 tables.”</a:t>
+            </a:r>
+          </a:p>
+        </p:txBody>
+      </p:sp>
+      <p:sp>
+        <p:nvSpPr>
+          <p:cNvPr id="8" name="Rectangle 7"/>
+          <p:cNvSpPr/>
+          <p:nvPr/>
+        </p:nvSpPr>
+        <p:spPr>
+          <a:xfrm>
+            <a:off x="548640" y="2359152"/>
+            <a:ext cx="3611880" cy="3054096"/>
+          </a:xfrm>
+          <a:prstGeom prst="rect">
+            <a:avLst/>
+          </a:prstGeom>
+          <a:solidFill>
+            <a:srgbClr val="FFFFFF"/>
+          </a:solidFill>
+          <a:ln>
+            <a:noFill/>
+          </a:ln>
+          <a:effectLst/>
+        </p:spPr>
+        <p:style>
+          <a:lnRef idx="1">
+            <a:schemeClr val="accent1"/>
+          </a:lnRef>
+          <a:fillRef idx="3">
+            <a:schemeClr val="accent1"/>
+          </a:fillRef>
+          <a:effectRef idx="2">
+            <a:schemeClr val="accent1"/>
+          </a:effectRef>
+          <a:fontRef idx="minor">
+            <a:schemeClr val="lt1"/>
+          </a:fontRef>
+        </p:style>
+        <p:txBody>
+          <a:bodyPr rtlCol="0" anchor="ctr"/>
+          <a:lstStyle/>
+          <a:p>
+            <a:pPr algn="ctr"/>
+          </a:p>
+        </p:txBody>
+      </p:sp>
+      <p:sp>
+        <p:nvSpPr>
+          <p:cNvPr id="9" name="TextBox 8"/>
+          <p:cNvSpPr txBox="1"/>
+          <p:nvPr/>
+        </p:nvSpPr>
+        <p:spPr>
+          <a:xfrm>
+            <a:off x="804672" y="2560320"/>
+            <a:ext cx="3099816" cy="274320"/>
+          </a:xfrm>
+          <a:prstGeom prst="rect">
+            <a:avLst/>
+          </a:prstGeom>
+          <a:noFill/>
+        </p:spPr>
+        <p:txBody>
+          <a:bodyPr wrap="square" anchor="t" lIns="0" rIns="0" tIns="0" bIns="0">
+            <a:spAutoFit/>
+          </a:bodyPr>
+          <a:lstStyle/>
+          <a:p>
+            <a:pPr algn="l"/>
+            <a:r>
+              <a:rPr sz="950" b="1">
+                <a:solidFill>
+                  <a:srgbClr val="3A5C9E"/>
+                </a:solidFill>
+              </a:rPr>
+              <a:t>PART A  ·  30 MIN</a:t>
+            </a:r>
+          </a:p>
+        </p:txBody>
+      </p:sp>
+      <p:sp>
+        <p:nvSpPr>
+          <p:cNvPr id="10" name="TextBox 9"/>
+          <p:cNvSpPr txBox="1"/>
+          <p:nvPr/>
+        </p:nvSpPr>
+        <p:spPr>
+          <a:xfrm>
+            <a:off x="804672" y="2871216"/>
+            <a:ext cx="3099816" cy="402336"/>
+          </a:xfrm>
+          <a:prstGeom prst="rect">
+            <a:avLst/>
+          </a:prstGeom>
+          <a:noFill/>
+        </p:spPr>
+        <p:txBody>
+          <a:bodyPr wrap="square" anchor="t" lIns="0" rIns="0" tIns="0" bIns="0">
+            <a:spAutoFit/>
+          </a:bodyPr>
+          <a:lstStyle/>
+          <a:p>
+            <a:pPr algn="l"/>
+            <a:r>
+              <a:rPr sz="1700" b="1">
+                <a:solidFill>
+                  <a:srgbClr val="0F2145"/>
+                </a:solidFill>
+                <a:latin typeface="Georgia"/>
+              </a:rPr>
+              <a:t>Build it</a:t>
+            </a:r>
+          </a:p>
+        </p:txBody>
+      </p:sp>
+      <p:sp>
+        <p:nvSpPr>
+          <p:cNvPr id="11" name="TextBox 10"/>
+          <p:cNvSpPr txBox="1"/>
+          <p:nvPr/>
+        </p:nvSpPr>
+        <p:spPr>
+          <a:xfrm>
+            <a:off x="804672" y="3401568"/>
+            <a:ext cx="3099816" cy="493776"/>
+          </a:xfrm>
+          <a:prstGeom prst="rect">
+            <a:avLst/>
+          </a:prstGeom>
+          <a:noFill/>
+        </p:spPr>
+        <p:txBody>
+          <a:bodyPr wrap="square" anchor="t" lIns="0" rIns="0" tIns="0" bIns="0">
+            <a:spAutoFit/>
+          </a:bodyPr>
+          <a:lstStyle/>
+          <a:p>
+            <a:pPr algn="l"/>
+            <a:r>
+              <a:rPr sz="1000" b="1">
+                <a:solidFill>
+                  <a:srgbClr val="C9A227"/>
+                </a:solidFill>
+              </a:rPr>
+              <a:t>▪  </a:t>
+            </a:r>
+            <a:r>
+              <a:rPr sz="1000" b="0">
+                <a:solidFill>
+                  <a:srgbClr val="1B2A41"/>
+                </a:solidFill>
+              </a:rPr>
+              <a:t>Real data: ICICI Bank's published capital and leverage figures, March 2025</a:t>
+            </a:r>
+          </a:p>
+        </p:txBody>
+      </p:sp>
+      <p:sp>
+        <p:nvSpPr>
+          <p:cNvPr id="12" name="TextBox 11"/>
+          <p:cNvSpPr txBox="1"/>
+          <p:nvPr/>
+        </p:nvSpPr>
+        <p:spPr>
+          <a:xfrm>
+            <a:off x="804672" y="3913632"/>
+            <a:ext cx="3099816" cy="493776"/>
+          </a:xfrm>
+          <a:prstGeom prst="rect">
+            <a:avLst/>
+          </a:prstGeom>
+          <a:noFill/>
+        </p:spPr>
+        <p:txBody>
+          <a:bodyPr wrap="square" anchor="t" lIns="0" rIns="0" tIns="0" bIns="0">
+            <a:spAutoFit/>
+          </a:bodyPr>
+          <a:lstStyle/>
+          <a:p>
+            <a:pPr algn="l"/>
+            <a:r>
+              <a:rPr sz="1000" b="1">
+                <a:solidFill>
+                  <a:srgbClr val="C9A227"/>
+                </a:solidFill>
+              </a:rPr>
+              <a:t>▪  </a:t>
+            </a:r>
+            <a:r>
+              <a:rPr sz="1000" b="0">
+                <a:solidFill>
+                  <a:srgbClr val="1B2A41"/>
+                </a:solidFill>
+              </a:rPr>
+              <a:t>Six ratios, each one division</a:t>
+            </a:r>
+          </a:p>
+        </p:txBody>
+      </p:sp>
+      <p:sp>
+        <p:nvSpPr>
+          <p:cNvPr id="13" name="TextBox 12"/>
+          <p:cNvSpPr txBox="1"/>
+          <p:nvPr/>
+        </p:nvSpPr>
+        <p:spPr>
+          <a:xfrm>
+            <a:off x="804672" y="4425696"/>
+            <a:ext cx="3099816" cy="493776"/>
+          </a:xfrm>
+          <a:prstGeom prst="rect">
+            <a:avLst/>
+          </a:prstGeom>
+          <a:noFill/>
+        </p:spPr>
+        <p:txBody>
+          <a:bodyPr wrap="square" anchor="t" lIns="0" rIns="0" tIns="0" bIns="0">
+            <a:spAutoFit/>
+          </a:bodyPr>
+          <a:lstStyle/>
+          <a:p>
+            <a:pPr algn="l"/>
+            <a:r>
+              <a:rPr sz="1000" b="1">
+                <a:solidFill>
+                  <a:srgbClr val="C9A227"/>
+                </a:solidFill>
+              </a:rPr>
+              <a:t>▪  </a:t>
+            </a:r>
+            <a:r>
+              <a:rPr sz="1000" b="0">
+                <a:solidFill>
+                  <a:srgbClr val="1B2A41"/>
+                </a:solidFill>
+              </a:rPr>
+              <a:t>Each ratio next to the RBI floor with buffers</a:t>
+            </a:r>
+          </a:p>
+        </p:txBody>
+      </p:sp>
+      <p:sp>
+        <p:nvSpPr>
+          <p:cNvPr id="14" name="TextBox 13"/>
+          <p:cNvSpPr txBox="1"/>
+          <p:nvPr/>
+        </p:nvSpPr>
+        <p:spPr>
+          <a:xfrm>
+            <a:off x="804672" y="4937760"/>
+            <a:ext cx="3099816" cy="493776"/>
+          </a:xfrm>
+          <a:prstGeom prst="rect">
+            <a:avLst/>
+          </a:prstGeom>
+          <a:noFill/>
+        </p:spPr>
+        <p:txBody>
+          <a:bodyPr wrap="square" anchor="t" lIns="0" rIns="0" tIns="0" bIns="0">
+            <a:spAutoFit/>
+          </a:bodyPr>
+          <a:lstStyle/>
+          <a:p>
+            <a:pPr algn="l"/>
+            <a:r>
+              <a:rPr sz="1000" b="1">
+                <a:solidFill>
+                  <a:srgbClr val="C9A227"/>
+                </a:solidFill>
+              </a:rPr>
+              <a:t>▪  </a:t>
+            </a:r>
+            <a:r>
+              <a:rPr sz="1000" b="0">
+                <a:solidFill>
+                  <a:srgbClr val="1B2A41"/>
+                </a:solidFill>
+              </a:rPr>
+              <a:t>A Word document in the RBI table layout, written by python-docx</a:t>
+            </a:r>
+          </a:p>
+        </p:txBody>
+      </p:sp>
+      <p:sp>
+        <p:nvSpPr>
+          <p:cNvPr id="15" name="Rectangle 14"/>
+          <p:cNvSpPr/>
+          <p:nvPr/>
+        </p:nvSpPr>
+        <p:spPr>
+          <a:xfrm>
+            <a:off x="4315968" y="2359152"/>
+            <a:ext cx="3611880" cy="3054096"/>
+          </a:xfrm>
+          <a:prstGeom prst="rect">
+            <a:avLst/>
+          </a:prstGeom>
+          <a:solidFill>
+            <a:srgbClr val="FFFFFF"/>
+          </a:solidFill>
+          <a:ln>
+            <a:noFill/>
+          </a:ln>
+          <a:effectLst/>
+        </p:spPr>
+        <p:style>
+          <a:lnRef idx="1">
+            <a:schemeClr val="accent1"/>
+          </a:lnRef>
+          <a:fillRef idx="3">
+            <a:schemeClr val="accent1"/>
+          </a:fillRef>
+          <a:effectRef idx="2">
+            <a:schemeClr val="accent1"/>
+          </a:effectRef>
+          <a:fontRef idx="minor">
+            <a:schemeClr val="lt1"/>
+          </a:fontRef>
+        </p:style>
+        <p:txBody>
+          <a:bodyPr rtlCol="0" anchor="ctr"/>
+          <a:lstStyle/>
+          <a:p>
+            <a:pPr algn="ctr"/>
+          </a:p>
+        </p:txBody>
+      </p:sp>
+      <p:sp>
+        <p:nvSpPr>
+          <p:cNvPr id="16" name="TextBox 15"/>
+          <p:cNvSpPr txBox="1"/>
+          <p:nvPr/>
+        </p:nvSpPr>
+        <p:spPr>
+          <a:xfrm>
+            <a:off x="4572000" y="2560320"/>
+            <a:ext cx="3099816" cy="274320"/>
+          </a:xfrm>
+          <a:prstGeom prst="rect">
+            <a:avLst/>
+          </a:prstGeom>
+          <a:noFill/>
+        </p:spPr>
+        <p:txBody>
+          <a:bodyPr wrap="square" anchor="t" lIns="0" rIns="0" tIns="0" bIns="0">
+            <a:spAutoFit/>
+          </a:bodyPr>
+          <a:lstStyle/>
+          <a:p>
+            <a:pPr algn="l"/>
+            <a:r>
+              <a:rPr sz="950" b="1">
+                <a:solidFill>
+                  <a:srgbClr val="3A5C9E"/>
+                </a:solidFill>
+              </a:rPr>
+              <a:t>PART B  ·  15 MIN</a:t>
+            </a:r>
+          </a:p>
+        </p:txBody>
+      </p:sp>
+      <p:sp>
+        <p:nvSpPr>
+          <p:cNvPr id="17" name="TextBox 16"/>
+          <p:cNvSpPr txBox="1"/>
+          <p:nvPr/>
+        </p:nvSpPr>
+        <p:spPr>
+          <a:xfrm>
+            <a:off x="4572000" y="2871216"/>
+            <a:ext cx="3099816" cy="402336"/>
+          </a:xfrm>
+          <a:prstGeom prst="rect">
+            <a:avLst/>
+          </a:prstGeom>
+          <a:noFill/>
+        </p:spPr>
+        <p:txBody>
+          <a:bodyPr wrap="square" anchor="t" lIns="0" rIns="0" tIns="0" bIns="0">
+            <a:spAutoFit/>
+          </a:bodyPr>
+          <a:lstStyle/>
+          <a:p>
+            <a:pPr algn="l"/>
+            <a:r>
+              <a:rPr sz="1700" b="1">
+                <a:solidFill>
+                  <a:srgbClr val="0F2145"/>
+                </a:solidFill>
+                <a:latin typeface="Georgia"/>
+              </a:rPr>
+              <a:t>Check it</a:t>
+            </a:r>
+          </a:p>
+        </p:txBody>
+      </p:sp>
+      <p:sp>
+        <p:nvSpPr>
+          <p:cNvPr id="18" name="TextBox 17"/>
+          <p:cNvSpPr txBox="1"/>
+          <p:nvPr/>
+        </p:nvSpPr>
+        <p:spPr>
+          <a:xfrm>
+            <a:off x="4572000" y="3401568"/>
+            <a:ext cx="3099816" cy="493776"/>
+          </a:xfrm>
+          <a:prstGeom prst="rect">
+            <a:avLst/>
+          </a:prstGeom>
+          <a:noFill/>
+        </p:spPr>
+        <p:txBody>
+          <a:bodyPr wrap="square" anchor="t" lIns="0" rIns="0" tIns="0" bIns="0">
+            <a:spAutoFit/>
+          </a:bodyPr>
+          <a:lstStyle/>
+          <a:p>
+            <a:pPr algn="l"/>
+            <a:r>
+              <a:rPr sz="1000" b="1">
+                <a:solidFill>
+                  <a:srgbClr val="C9A227"/>
+                </a:solidFill>
+              </a:rPr>
+              <a:t>▪  </a:t>
+            </a:r>
+            <a:r>
+              <a:rPr sz="1000" b="0">
+                <a:solidFill>
+                  <a:srgbClr val="1B2A41"/>
+                </a:solidFill>
+              </a:rPr>
+              <a:t>The bank printed its own ratios: 15.81, 15.81, 16.41 and 10.37</a:t>
+            </a:r>
+          </a:p>
+        </p:txBody>
+      </p:sp>
+      <p:sp>
+        <p:nvSpPr>
+          <p:cNvPr id="19" name="TextBox 18"/>
+          <p:cNvSpPr txBox="1"/>
+          <p:nvPr/>
+        </p:nvSpPr>
+        <p:spPr>
+          <a:xfrm>
+            <a:off x="4572000" y="3913632"/>
+            <a:ext cx="3099816" cy="493776"/>
+          </a:xfrm>
+          <a:prstGeom prst="rect">
+            <a:avLst/>
+          </a:prstGeom>
+          <a:noFill/>
+        </p:spPr>
+        <p:txBody>
+          <a:bodyPr wrap="square" anchor="t" lIns="0" rIns="0" tIns="0" bIns="0">
+            <a:spAutoFit/>
+          </a:bodyPr>
+          <a:lstStyle/>
+          <a:p>
+            <a:pPr algn="l"/>
+            <a:r>
+              <a:rPr sz="1000" b="1">
+                <a:solidFill>
+                  <a:srgbClr val="C9A227"/>
+                </a:solidFill>
+              </a:rPr>
+              <a:t>▪  </a:t>
+            </a:r>
+            <a:r>
+              <a:rPr sz="1000" b="0">
+                <a:solidFill>
+                  <a:srgbClr val="1B2A41"/>
+                </a:solidFill>
+              </a:rPr>
+              <a:t>Your document must land on the same four numbers</a:t>
+            </a:r>
+          </a:p>
+        </p:txBody>
+      </p:sp>
+      <p:sp>
+        <p:nvSpPr>
+          <p:cNvPr id="20" name="TextBox 19"/>
+          <p:cNvSpPr txBox="1"/>
+          <p:nvPr/>
+        </p:nvSpPr>
+        <p:spPr>
+          <a:xfrm>
+            <a:off x="4572000" y="4425696"/>
+            <a:ext cx="3099816" cy="493776"/>
+          </a:xfrm>
+          <a:prstGeom prst="rect">
+            <a:avLst/>
+          </a:prstGeom>
+          <a:noFill/>
+        </p:spPr>
+        <p:txBody>
+          <a:bodyPr wrap="square" anchor="t" lIns="0" rIns="0" tIns="0" bIns="0">
+            <a:spAutoFit/>
+          </a:bodyPr>
+          <a:lstStyle/>
+          <a:p>
+            <a:pPr algn="l"/>
+            <a:r>
+              <a:rPr sz="1000" b="1">
+                <a:solidFill>
+                  <a:srgbClr val="C9A227"/>
+                </a:solidFill>
+              </a:rPr>
+              <a:t>▪  </a:t>
+            </a:r>
+            <a:r>
+              <a:rPr sz="1000" b="0">
+                <a:solidFill>
+                  <a:srgbClr val="1B2A41"/>
+                </a:solidFill>
+              </a:rPr>
+              <a:t>A mismatch means a wrong input or a wrong formula</a:t>
+            </a:r>
+          </a:p>
+        </p:txBody>
+      </p:sp>
+      <p:sp>
+        <p:nvSpPr>
+          <p:cNvPr id="21" name="TextBox 20"/>
+          <p:cNvSpPr txBox="1"/>
+          <p:nvPr/>
+        </p:nvSpPr>
+        <p:spPr>
+          <a:xfrm>
+            <a:off x="4572000" y="4937760"/>
+            <a:ext cx="3099816" cy="493776"/>
+          </a:xfrm>
+          <a:prstGeom prst="rect">
+            <a:avLst/>
+          </a:prstGeom>
+          <a:noFill/>
+        </p:spPr>
+        <p:txBody>
+          <a:bodyPr wrap="square" anchor="t" lIns="0" rIns="0" tIns="0" bIns="0">
+            <a:spAutoFit/>
+          </a:bodyPr>
+          <a:lstStyle/>
+          <a:p>
+            <a:pPr algn="l"/>
+            <a:r>
+              <a:rPr sz="1000" b="1">
+                <a:solidFill>
+                  <a:srgbClr val="C9A227"/>
+                </a:solidFill>
+              </a:rPr>
+              <a:t>▪  </a:t>
+            </a:r>
+            <a:r>
+              <a:rPr sz="1000" b="0">
+                <a:solidFill>
+                  <a:srgbClr val="1B2A41"/>
+                </a:solidFill>
+              </a:rPr>
+              <a:t>A document that does not reconcile is not issued</a:t>
+            </a:r>
+          </a:p>
+        </p:txBody>
+      </p:sp>
+      <p:sp>
+        <p:nvSpPr>
+          <p:cNvPr id="22" name="Rectangle 21"/>
+          <p:cNvSpPr/>
+          <p:nvPr/>
+        </p:nvSpPr>
+        <p:spPr>
+          <a:xfrm>
+            <a:off x="8083296" y="2359152"/>
+            <a:ext cx="3557016" cy="3054096"/>
+          </a:xfrm>
+          <a:prstGeom prst="rect">
+            <a:avLst/>
+          </a:prstGeom>
+          <a:solidFill>
+            <a:srgbClr val="0F2145"/>
+          </a:solidFill>
+          <a:ln>
+            <a:noFill/>
+          </a:ln>
+          <a:effectLst/>
+        </p:spPr>
+        <p:style>
+          <a:lnRef idx="1">
+            <a:schemeClr val="accent1"/>
+          </a:lnRef>
+          <a:fillRef idx="3">
+            <a:schemeClr val="accent1"/>
+          </a:fillRef>
+          <a:effectRef idx="2">
+            <a:schemeClr val="accent1"/>
+          </a:effectRef>
+          <a:fontRef idx="minor">
+            <a:schemeClr val="lt1"/>
+          </a:fontRef>
+        </p:style>
+        <p:txBody>
+          <a:bodyPr rtlCol="0" anchor="ctr"/>
+          <a:lstStyle/>
+          <a:p>
+            <a:pPr algn="ctr"/>
+          </a:p>
+        </p:txBody>
+      </p:sp>
+      <p:sp>
+        <p:nvSpPr>
+          <p:cNvPr id="23" name="TextBox 22"/>
+          <p:cNvSpPr txBox="1"/>
+          <p:nvPr/>
+        </p:nvSpPr>
+        <p:spPr>
+          <a:xfrm>
+            <a:off x="8339327" y="2560320"/>
+            <a:ext cx="3044952" cy="274320"/>
+          </a:xfrm>
+          <a:prstGeom prst="rect">
+            <a:avLst/>
+          </a:prstGeom>
+          <a:noFill/>
+        </p:spPr>
+        <p:txBody>
+          <a:bodyPr wrap="square" anchor="t" lIns="0" rIns="0" tIns="0" bIns="0">
+            <a:spAutoFit/>
+          </a:bodyPr>
+          <a:lstStyle/>
+          <a:p>
+            <a:pPr algn="l"/>
+            <a:r>
+              <a:rPr sz="950" b="1">
+                <a:solidFill>
+                  <a:srgbClr val="C9A227"/>
+                </a:solidFill>
+              </a:rPr>
+              <a:t>PART C  ·  15 MIN</a:t>
+            </a:r>
+          </a:p>
+        </p:txBody>
+      </p:sp>
+      <p:sp>
+        <p:nvSpPr>
+          <p:cNvPr id="24" name="TextBox 23"/>
+          <p:cNvSpPr txBox="1"/>
+          <p:nvPr/>
+        </p:nvSpPr>
+        <p:spPr>
+          <a:xfrm>
+            <a:off x="8339327" y="2871216"/>
+            <a:ext cx="3044952" cy="402336"/>
+          </a:xfrm>
+          <a:prstGeom prst="rect">
+            <a:avLst/>
+          </a:prstGeom>
+          <a:noFill/>
+        </p:spPr>
+        <p:txBody>
+          <a:bodyPr wrap="square" anchor="t" lIns="0" rIns="0" tIns="0" bIns="0">
+            <a:spAutoFit/>
+          </a:bodyPr>
+          <a:lstStyle/>
+          <a:p>
+            <a:pPr algn="l"/>
+            <a:r>
+              <a:rPr sz="1700" b="1">
+                <a:solidFill>
+                  <a:srgbClr val="FFFFFF"/>
+                </a:solidFill>
+                <a:latin typeface="Georgia"/>
+              </a:rPr>
+              <a:t>Review it</a:t>
+            </a:r>
+          </a:p>
+        </p:txBody>
+      </p:sp>
+      <p:sp>
+        <p:nvSpPr>
+          <p:cNvPr id="25" name="TextBox 24"/>
+          <p:cNvSpPr txBox="1"/>
+          <p:nvPr/>
+        </p:nvSpPr>
+        <p:spPr>
+          <a:xfrm>
+            <a:off x="8339327" y="3401568"/>
+            <a:ext cx="3044952" cy="493776"/>
+          </a:xfrm>
+          <a:prstGeom prst="rect">
+            <a:avLst/>
+          </a:prstGeom>
+          <a:noFill/>
+        </p:spPr>
+        <p:txBody>
+          <a:bodyPr wrap="square" anchor="t" lIns="0" rIns="0" tIns="0" bIns="0">
+            <a:spAutoFit/>
+          </a:bodyPr>
+          <a:lstStyle/>
+          <a:p>
+            <a:pPr algn="l"/>
+            <a:r>
+              <a:rPr sz="1000" b="1">
+                <a:solidFill>
+                  <a:srgbClr val="C9A227"/>
+                </a:solidFill>
+              </a:rPr>
+              <a:t>▪  </a:t>
+            </a:r>
+            <a:r>
+              <a:rPr sz="1000" b="0">
+                <a:solidFill>
+                  <a:srgbClr val="C9D6EE"/>
+                </a:solidFill>
+              </a:rPr>
+              <a:t>Swap documents with the next desk</a:t>
+            </a:r>
+          </a:p>
+        </p:txBody>
+      </p:sp>
+      <p:sp>
+        <p:nvSpPr>
+          <p:cNvPr id="26" name="TextBox 25"/>
+          <p:cNvSpPr txBox="1"/>
+          <p:nvPr/>
+        </p:nvSpPr>
+        <p:spPr>
+          <a:xfrm>
+            <a:off x="8339327" y="3913632"/>
+            <a:ext cx="3044952" cy="493776"/>
+          </a:xfrm>
+          <a:prstGeom prst="rect">
+            <a:avLst/>
+          </a:prstGeom>
+          <a:noFill/>
+        </p:spPr>
+        <p:txBody>
+          <a:bodyPr wrap="square" anchor="t" lIns="0" rIns="0" tIns="0" bIns="0">
+            <a:spAutoFit/>
+          </a:bodyPr>
+          <a:lstStyle/>
+          <a:p>
+            <a:pPr algn="l"/>
+            <a:r>
+              <a:rPr sz="1000" b="1">
+                <a:solidFill>
+                  <a:srgbClr val="C9A227"/>
+                </a:solidFill>
+              </a:rPr>
+              <a:t>▪  </a:t>
+            </a:r>
+            <a:r>
+              <a:rPr sz="1000" b="0">
+                <a:solidFill>
+                  <a:srgbClr val="C9D6EE"/>
+                </a:solidFill>
+              </a:rPr>
+              <a:t>Paste the two ratio tables into any free AI chat and ask for a commentary</a:t>
+            </a:r>
+          </a:p>
+        </p:txBody>
+      </p:sp>
+      <p:sp>
+        <p:nvSpPr>
+          <p:cNvPr id="27" name="TextBox 26"/>
+          <p:cNvSpPr txBox="1"/>
+          <p:nvPr/>
+        </p:nvSpPr>
+        <p:spPr>
+          <a:xfrm>
+            <a:off x="8339327" y="4425696"/>
+            <a:ext cx="3044952" cy="493776"/>
+          </a:xfrm>
+          <a:prstGeom prst="rect">
+            <a:avLst/>
+          </a:prstGeom>
+          <a:noFill/>
+        </p:spPr>
+        <p:txBody>
+          <a:bodyPr wrap="square" anchor="t" lIns="0" rIns="0" tIns="0" bIns="0">
+            <a:spAutoFit/>
+          </a:bodyPr>
+          <a:lstStyle/>
+          <a:p>
+            <a:pPr algn="l"/>
+            <a:r>
+              <a:rPr sz="1000" b="1">
+                <a:solidFill>
+                  <a:srgbClr val="C9A227"/>
+                </a:solidFill>
+              </a:rPr>
+              <a:t>▪  </a:t>
+            </a:r>
+            <a:r>
+              <a:rPr sz="1000" b="0">
+                <a:solidFill>
+                  <a:srgbClr val="C9D6EE"/>
+                </a:solidFill>
+              </a:rPr>
+              <a:t>Check every number in its paragraph against your tables</a:t>
+            </a:r>
+          </a:p>
+        </p:txBody>
+      </p:sp>
+      <p:sp>
+        <p:nvSpPr>
+          <p:cNvPr id="28" name="TextBox 27"/>
+          <p:cNvSpPr txBox="1"/>
+          <p:nvPr/>
+        </p:nvSpPr>
+        <p:spPr>
+          <a:xfrm>
+            <a:off x="8339327" y="4937760"/>
+            <a:ext cx="3044952" cy="493776"/>
+          </a:xfrm>
+          <a:prstGeom prst="rect">
+            <a:avLst/>
+          </a:prstGeom>
+          <a:noFill/>
+        </p:spPr>
+        <p:txBody>
+          <a:bodyPr wrap="square" anchor="t" lIns="0" rIns="0" tIns="0" bIns="0">
+            <a:spAutoFit/>
+          </a:bodyPr>
+          <a:lstStyle/>
+          <a:p>
+            <a:pPr algn="l"/>
+            <a:r>
+              <a:rPr sz="1000" b="1">
+                <a:solidFill>
+                  <a:srgbClr val="C9A227"/>
+                </a:solidFill>
+              </a:rPr>
+              <a:t>▪  </a:t>
+            </a:r>
+            <a:r>
+              <a:rPr sz="1000" b="0">
+                <a:solidFill>
+                  <a:srgbClr val="C9D6EE"/>
+                </a:solidFill>
+              </a:rPr>
+              <a:t>Keep only the sentences that survive</a:t>
+            </a:r>
+          </a:p>
+        </p:txBody>
+      </p:sp>
+      <p:sp>
+        <p:nvSpPr>
+          <p:cNvPr id="29" name="Rectangle 28"/>
+          <p:cNvSpPr/>
+          <p:nvPr/>
+        </p:nvSpPr>
+        <p:spPr>
+          <a:xfrm>
+            <a:off x="548640" y="5760720"/>
+            <a:ext cx="11091672" cy="603504"/>
+          </a:xfrm>
+          <a:prstGeom prst="rect">
+            <a:avLst/>
+          </a:prstGeom>
+          <a:solidFill>
+            <a:srgbClr val="0F2145"/>
+          </a:solidFill>
+          <a:ln>
+            <a:noFill/>
+          </a:ln>
+          <a:effectLst/>
+        </p:spPr>
+        <p:style>
+          <a:lnRef idx="1">
+            <a:schemeClr val="accent1"/>
+          </a:lnRef>
+          <a:fillRef idx="3">
+            <a:schemeClr val="accent1"/>
+          </a:fillRef>
+          <a:effectRef idx="2">
+            <a:schemeClr val="accent1"/>
+          </a:effectRef>
+          <a:fontRef idx="minor">
+            <a:schemeClr val="lt1"/>
+          </a:fontRef>
+        </p:style>
+        <p:txBody>
+          <a:bodyPr rtlCol="0" anchor="ctr"/>
+          <a:lstStyle/>
+          <a:p>
+            <a:pPr algn="ctr"/>
+          </a:p>
+        </p:txBody>
+      </p:sp>
+      <p:sp>
+        <p:nvSpPr>
+          <p:cNvPr id="30" name="Rectangle 29"/>
+          <p:cNvSpPr/>
+          <p:nvPr/>
+        </p:nvSpPr>
+        <p:spPr>
+          <a:xfrm>
+            <a:off x="548640" y="5760720"/>
+            <a:ext cx="64008" cy="603504"/>
+          </a:xfrm>
+          <a:prstGeom prst="rect">
+            <a:avLst/>
+          </a:prstGeom>
+          <a:solidFill>
+            <a:srgbClr val="C9A227"/>
+          </a:solidFill>
+          <a:ln>
+            <a:noFill/>
+          </a:ln>
+          <a:effectLst/>
+        </p:spPr>
+        <p:style>
+          <a:lnRef idx="1">
+            <a:schemeClr val="accent1"/>
+          </a:lnRef>
+          <a:fillRef idx="3">
+            <a:schemeClr val="accent1"/>
+          </a:fillRef>
+          <a:effectRef idx="2">
+            <a:schemeClr val="accent1"/>
+          </a:effectRef>
+          <a:fontRef idx="minor">
+            <a:schemeClr val="lt1"/>
+          </a:fontRef>
+        </p:style>
+        <p:txBody>
+          <a:bodyPr rtlCol="0" anchor="ctr"/>
+          <a:lstStyle/>
+          <a:p>
+            <a:pPr algn="ctr"/>
+          </a:p>
+        </p:txBody>
+      </p:sp>
+      <p:sp>
+        <p:nvSpPr>
+          <p:cNvPr id="31" name="TextBox 30"/>
+          <p:cNvSpPr txBox="1"/>
+          <p:nvPr/>
+        </p:nvSpPr>
+        <p:spPr>
+          <a:xfrm>
+            <a:off x="822960" y="5760720"/>
+            <a:ext cx="10543032" cy="603504"/>
+          </a:xfrm>
+          <a:prstGeom prst="rect">
+            <a:avLst/>
+          </a:prstGeom>
+          <a:noFill/>
+        </p:spPr>
+        <p:txBody>
+          <a:bodyPr wrap="square" anchor="ctr" lIns="0" rIns="0" tIns="0" bIns="0">
+            <a:spAutoFit/>
+          </a:bodyPr>
+          <a:lstStyle/>
+          <a:p>
+            <a:pPr algn="l"/>
+            <a:r>
+              <a:rPr sz="1200" b="1">
+                <a:solidFill>
+                  <a:srgbClr val="C9A227"/>
+                </a:solidFill>
+              </a:rPr>
+              <a:t>Why Part B matters most:  </a:t>
+            </a:r>
+            <a:r>
+              <a:rPr sz="1200" b="0">
+                <a:solidFill>
+                  <a:srgbClr val="FFFFFF"/>
+                </a:solidFill>
+              </a:rPr>
+              <a:t>generating the document takes thirty minutes. Finding out it disagrees with the bank's own number takes five, and it is the only step that makes the document worth anything.</a:t>
+            </a:r>
+          </a:p>
+        </p:txBody>
+      </p:sp>
+      <p:sp>
+        <p:nvSpPr>
+          <p:cNvPr id="32" name="TextBox 31"/>
+          <p:cNvSpPr txBox="1"/>
+          <p:nvPr/>
+        </p:nvSpPr>
+        <p:spPr>
+          <a:xfrm>
+            <a:off x="548640" y="6473952"/>
+            <a:ext cx="7315200" cy="228600"/>
+          </a:xfrm>
+          <a:prstGeom prst="rect">
+            <a:avLst/>
+          </a:prstGeom>
+          <a:noFill/>
+        </p:spPr>
+        <p:txBody>
+          <a:bodyPr wrap="square" anchor="t" lIns="0" rIns="0" tIns="0" bIns="0">
+            <a:spAutoFit/>
+          </a:bodyPr>
+          <a:lstStyle/>
+          <a:p>
+            <a:pPr algn="l"/>
+            <a:r>
+              <a:rPr sz="800" b="0">
+                <a:solidFill>
+                  <a:srgbClr val="5D6B7E"/>
+                </a:solidFill>
+              </a:rPr>
+              <a:t>ISBMS · PGDM 2025–27 · AGENTIC AI &amp; ADVANCED ANALYTICS IN FINANCE</a:t>
+            </a:r>
+          </a:p>
+        </p:txBody>
+      </p:sp>
+      <p:sp>
+        <p:nvSpPr>
+          <p:cNvPr id="33" name="TextBox 32"/>
+          <p:cNvSpPr txBox="1"/>
+          <p:nvPr/>
+        </p:nvSpPr>
+        <p:spPr>
+          <a:xfrm>
+            <a:off x="9262872" y="6473952"/>
+            <a:ext cx="2377440" cy="228600"/>
+          </a:xfrm>
+          <a:prstGeom prst="rect">
+            <a:avLst/>
+          </a:prstGeom>
+          <a:noFill/>
+        </p:spPr>
+        <p:txBody>
+          <a:bodyPr wrap="square" anchor="t" lIns="0" rIns="0" tIns="0" bIns="0">
+            <a:spAutoFit/>
+          </a:bodyPr>
+          <a:lstStyle/>
+          <a:p>
+            <a:pPr algn="r"/>
+            <a:r>
+              <a:rPr sz="800" b="0">
+                <a:solidFill>
+                  <a:srgbClr val="5D6B7E"/>
+                </a:solidFill>
+              </a:rPr>
+              <a:t>MODULE 6  ·  07</a:t>
+            </a:r>
+          </a:p>
+        </p:txBody>
+      </p:sp>
+    </p:spTree>
+  </p:cSld>
+  <p:clrMapOvr>
+    <a:masterClrMapping/>
+  </p:clrMapOvr>
+</p:sld>
+</file>
+
+<file path=ppt/slides/slide8.xml><?xml version="1.0" encoding="utf-8"?>
+<p:sld xmlns:a="http://schemas.openxmlformats.org/drawingml/2006/main" xmlns:p="http://schemas.openxmlformats.org/presentationml/2006/main" xmlns:r="http://schemas.openxmlformats.org/officeDocument/2006/relationships">
+  <p:cSld>
+    <p:bg>
+      <p:bgPr>
+        <a:solidFill>
+          <a:srgbClr val="F7F8FA"/>
+        </a:solidFill>
+        <a:effectLst/>
+      </p:bgPr>
+    </p:bg>
+    <p:spTree>
+      <p:nvGrpSpPr>
+        <p:cNvPr id="1" name=""/>
+        <p:cNvGrpSpPr/>
+        <p:nvPr/>
+      </p:nvGrpSpPr>
+      <p:grpSpPr/>
+      <p:sp>
+        <p:nvSpPr>
+          <p:cNvPr id="2" name="Rectangle 1"/>
+          <p:cNvSpPr/>
+          <p:nvPr/>
+        </p:nvSpPr>
+        <p:spPr>
+          <a:xfrm>
+            <a:off x="548640" y="402336"/>
+            <a:ext cx="118872" cy="118872"/>
+          </a:xfrm>
+          <a:prstGeom prst="rect">
+            <a:avLst/>
+          </a:prstGeom>
+          <a:solidFill>
+            <a:srgbClr val="C9A227"/>
+          </a:solidFill>
+          <a:ln>
+            <a:noFill/>
+          </a:ln>
+          <a:effectLst/>
+        </p:spPr>
+        <p:style>
+          <a:lnRef idx="1">
+            <a:schemeClr val="accent1"/>
+          </a:lnRef>
+          <a:fillRef idx="3">
+            <a:schemeClr val="accent1"/>
+          </a:fillRef>
+          <a:effectRef idx="2">
+            <a:schemeClr val="accent1"/>
+          </a:effectRef>
+          <a:fontRef idx="minor">
+            <a:schemeClr val="lt1"/>
+          </a:fontRef>
+        </p:style>
+        <p:txBody>
+          <a:bodyPr rtlCol="0" anchor="ctr"/>
+          <a:lstStyle/>
+          <a:p>
+            <a:pPr algn="ctr"/>
+          </a:p>
+        </p:txBody>
+      </p:sp>
+      <p:sp>
+        <p:nvSpPr>
+          <p:cNvPr id="3" name="TextBox 2"/>
+          <p:cNvSpPr txBox="1"/>
+          <p:nvPr/>
+        </p:nvSpPr>
+        <p:spPr>
+          <a:xfrm>
+            <a:off x="786384" y="310896"/>
+            <a:ext cx="10817352" cy="274320"/>
+          </a:xfrm>
+          <a:prstGeom prst="rect">
+            <a:avLst/>
+          </a:prstGeom>
+          <a:noFill/>
+        </p:spPr>
+        <p:txBody>
+          <a:bodyPr wrap="square" anchor="t" lIns="0" rIns="0" tIns="0" bIns="0">
+            <a:spAutoFit/>
+          </a:bodyPr>
+          <a:lstStyle/>
+          <a:p>
+            <a:pPr algn="l"/>
+            <a:r>
+              <a:rPr sz="1100" b="1">
+                <a:solidFill>
+                  <a:srgbClr val="C9A227"/>
+                </a:solidFill>
+              </a:rPr>
+              <a:t>PRACTICE QUESTIONS</a:t>
+            </a:r>
+          </a:p>
+        </p:txBody>
+      </p:sp>
+      <p:sp>
+        <p:nvSpPr>
+          <p:cNvPr id="4" name="TextBox 3"/>
+          <p:cNvSpPr txBox="1"/>
+          <p:nvPr/>
+        </p:nvSpPr>
+        <p:spPr>
+          <a:xfrm>
+            <a:off x="548640" y="621792"/>
+            <a:ext cx="11091672" cy="731520"/>
+          </a:xfrm>
+          <a:prstGeom prst="rect">
+            <a:avLst/>
+          </a:prstGeom>
+          <a:noFill/>
+        </p:spPr>
+        <p:txBody>
+          <a:bodyPr wrap="square" anchor="t" lIns="0" rIns="0" tIns="0" bIns="0">
+            <a:spAutoFit/>
+          </a:bodyPr>
+          <a:lstStyle/>
+          <a:p>
+            <a:pPr algn="l"/>
+            <a:r>
+              <a:rPr sz="2900" b="1">
+                <a:solidFill>
+                  <a:srgbClr val="0F2145"/>
+                </a:solidFill>
+                <a:latin typeface="Georgia"/>
+              </a:rPr>
+              <a:t>Ten questions before the exam</a:t>
+            </a:r>
+          </a:p>
+        </p:txBody>
+      </p:sp>
+      <p:sp>
+        <p:nvSpPr>
+          <p:cNvPr id="5" name="Rectangle 4"/>
+          <p:cNvSpPr/>
+          <p:nvPr/>
+        </p:nvSpPr>
+        <p:spPr>
+          <a:xfrm>
+            <a:off x="548640" y="1444752"/>
+            <a:ext cx="11091672" cy="676656"/>
+          </a:xfrm>
+          <a:prstGeom prst="rect">
+            <a:avLst/>
+          </a:prstGeom>
+          <a:solidFill>
+            <a:srgbClr val="FFFFFF"/>
+          </a:solidFill>
+          <a:ln>
+            <a:noFill/>
+          </a:ln>
+          <a:effectLst/>
+        </p:spPr>
+        <p:style>
+          <a:lnRef idx="1">
+            <a:schemeClr val="accent1"/>
+          </a:lnRef>
+          <a:fillRef idx="3">
+            <a:schemeClr val="accent1"/>
+          </a:fillRef>
+          <a:effectRef idx="2">
+            <a:schemeClr val="accent1"/>
+          </a:effectRef>
+          <a:fontRef idx="minor">
+            <a:schemeClr val="lt1"/>
+          </a:fontRef>
+        </p:style>
+        <p:txBody>
+          <a:bodyPr rtlCol="0" anchor="ctr"/>
+          <a:lstStyle/>
+          <a:p>
+            <a:pPr algn="ctr"/>
+          </a:p>
+        </p:txBody>
+      </p:sp>
+      <p:sp>
+        <p:nvSpPr>
+          <p:cNvPr id="6" name="Rectangle 5"/>
+          <p:cNvSpPr/>
+          <p:nvPr/>
+        </p:nvSpPr>
+        <p:spPr>
+          <a:xfrm>
+            <a:off x="548640" y="1444752"/>
             <a:ext cx="64008" cy="676656"/>
           </a:xfrm>
           <a:prstGeom prst="rect">
@@ -8675,13 +12588,13 @@
       </p:sp>
       <p:sp>
         <p:nvSpPr>
-          <p:cNvPr id="11" name="TextBox 10"/>
-          <p:cNvSpPr txBox="1"/>
-          <p:nvPr/>
-        </p:nvSpPr>
-        <p:spPr>
-          <a:xfrm>
-            <a:off x="822960" y="2240279"/>
+          <p:cNvPr id="7" name="TextBox 6"/>
+          <p:cNvSpPr txBox="1"/>
+          <p:nvPr/>
+        </p:nvSpPr>
+        <p:spPr>
+          <a:xfrm>
+            <a:off x="822960" y="1508760"/>
             <a:ext cx="640080" cy="365760"/>
           </a:xfrm>
           <a:prstGeom prst="rect">
@@ -8703,20 +12616,20 @@
                 </a:solidFill>
                 <a:latin typeface="Georgia"/>
               </a:rPr>
-              <a:t>Q2</a:t>
-            </a:r>
-          </a:p>
-        </p:txBody>
-      </p:sp>
-      <p:sp>
-        <p:nvSpPr>
-          <p:cNvPr id="12" name="TextBox 11"/>
-          <p:cNvSpPr txBox="1"/>
-          <p:nvPr/>
-        </p:nvSpPr>
-        <p:spPr>
-          <a:xfrm>
-            <a:off x="1554480" y="2231136"/>
+              <a:t>Q1</a:t>
+            </a:r>
+          </a:p>
+        </p:txBody>
+      </p:sp>
+      <p:sp>
+        <p:nvSpPr>
+          <p:cNvPr id="8" name="TextBox 7"/>
+          <p:cNvSpPr txBox="1"/>
+          <p:nvPr/>
+        </p:nvSpPr>
+        <p:spPr>
+          <a:xfrm>
+            <a:off x="1554480" y="1499616"/>
             <a:ext cx="9875520" cy="585216"/>
           </a:xfrm>
           <a:prstGeom prst="rect">
@@ -8737,7 +12650,7 @@
                   <a:srgbClr val="1B2A41"/>
                 </a:solidFill>
               </a:rPr>
-              <a:t>The minimum total capital ratio for this bank is 11.7%. Show where each part of that number comes from.</a:t>
+              <a:t>A bank holds CET1 capital of ₹2,75,000 crore against risk weighted assets of ₹17,40,000 crore. What is its CET1 ratio, and does a D-SIB pass?</a:t>
             </a:r>
           </a:p>
           <a:p>
@@ -8760,20 +12673,20 @@
                   <a:srgbClr val="5D6B7E"/>
                 </a:solidFill>
               </a:rPr>
-              <a:t>9.0% base requirement, plus the 2.5% capital conservation buffer, plus the 0.2% D-SIB surcharge.</a:t>
-            </a:r>
-          </a:p>
-        </p:txBody>
-      </p:sp>
-      <p:sp>
-        <p:nvSpPr>
-          <p:cNvPr id="13" name="Rectangle 12"/>
+              <a:t>15.8%. The D-SIB floor is 5.5% + 2.5% buffer + 0.2% surcharge = 8.2%, so it passes with room to spare.</a:t>
+            </a:r>
+          </a:p>
+        </p:txBody>
+      </p:sp>
+      <p:sp>
+        <p:nvSpPr>
+          <p:cNvPr id="9" name="Rectangle 8"/>
           <p:cNvSpPr/>
           <p:nvPr/>
         </p:nvSpPr>
         <p:spPr>
           <a:xfrm>
-            <a:off x="548640" y="2907791"/>
+            <a:off x="548640" y="2176272"/>
             <a:ext cx="11091672" cy="676656"/>
           </a:xfrm>
           <a:prstGeom prst="rect">
@@ -8811,13 +12724,13 @@
       </p:sp>
       <p:sp>
         <p:nvSpPr>
-          <p:cNvPr id="14" name="Rectangle 13"/>
+          <p:cNvPr id="10" name="Rectangle 9"/>
           <p:cNvSpPr/>
           <p:nvPr/>
         </p:nvSpPr>
         <p:spPr>
           <a:xfrm>
-            <a:off x="548640" y="2907791"/>
+            <a:off x="548640" y="2176272"/>
             <a:ext cx="64008" cy="676656"/>
           </a:xfrm>
           <a:prstGeom prst="rect">
@@ -8855,13 +12768,13 @@
       </p:sp>
       <p:sp>
         <p:nvSpPr>
-          <p:cNvPr id="15" name="TextBox 14"/>
-          <p:cNvSpPr txBox="1"/>
-          <p:nvPr/>
-        </p:nvSpPr>
-        <p:spPr>
-          <a:xfrm>
-            <a:off x="822960" y="2971799"/>
+          <p:cNvPr id="11" name="TextBox 10"/>
+          <p:cNvSpPr txBox="1"/>
+          <p:nvPr/>
+        </p:nvSpPr>
+        <p:spPr>
+          <a:xfrm>
+            <a:off x="822960" y="2240279"/>
             <a:ext cx="640080" cy="365760"/>
           </a:xfrm>
           <a:prstGeom prst="rect">
@@ -8883,20 +12796,20 @@
                 </a:solidFill>
                 <a:latin typeface="Georgia"/>
               </a:rPr>
-              <a:t>Q3</a:t>
-            </a:r>
-          </a:p>
-        </p:txBody>
-      </p:sp>
-      <p:sp>
-        <p:nvSpPr>
-          <p:cNvPr id="16" name="TextBox 15"/>
-          <p:cNvSpPr txBox="1"/>
-          <p:nvPr/>
-        </p:nvSpPr>
-        <p:spPr>
-          <a:xfrm>
-            <a:off x="1554480" y="2962656"/>
+              <a:t>Q2</a:t>
+            </a:r>
+          </a:p>
+        </p:txBody>
+      </p:sp>
+      <p:sp>
+        <p:nvSpPr>
+          <p:cNvPr id="12" name="TextBox 11"/>
+          <p:cNvSpPr txBox="1"/>
+          <p:nvPr/>
+        </p:nvSpPr>
+        <p:spPr>
+          <a:xfrm>
+            <a:off x="1554480" y="2231136"/>
             <a:ext cx="9875520" cy="585216"/>
           </a:xfrm>
           <a:prstGeom prst="rect">
@@ -8917,7 +12830,7 @@
                   <a:srgbClr val="1B2A41"/>
                 </a:solidFill>
               </a:rPr>
-              <a:t>Say what question the LCR answers, without using the word ratio.</a:t>
+              <a:t>The minimum total capital ratio for this bank is 11.7%. Show where each part of that number comes from.</a:t>
             </a:r>
           </a:p>
           <a:p>
@@ -8940,20 +12853,20 @@
                   <a:srgbClr val="5D6B7E"/>
                 </a:solidFill>
               </a:rPr>
-              <a:t>Can the bank pay 30 days of outflows in a stress from assets it can sell today? At 100% or more, yes.</a:t>
-            </a:r>
-          </a:p>
-        </p:txBody>
-      </p:sp>
-      <p:sp>
-        <p:nvSpPr>
-          <p:cNvPr id="17" name="Rectangle 16"/>
+              <a:t>9.0% base requirement, plus the 2.5% capital conservation buffer, plus the 0.2% D-SIB surcharge.</a:t>
+            </a:r>
+          </a:p>
+        </p:txBody>
+      </p:sp>
+      <p:sp>
+        <p:nvSpPr>
+          <p:cNvPr id="13" name="Rectangle 12"/>
           <p:cNvSpPr/>
           <p:nvPr/>
         </p:nvSpPr>
         <p:spPr>
           <a:xfrm>
-            <a:off x="548640" y="3639311"/>
+            <a:off x="548640" y="2907791"/>
             <a:ext cx="11091672" cy="676656"/>
           </a:xfrm>
           <a:prstGeom prst="rect">
@@ -8991,13 +12904,13 @@
       </p:sp>
       <p:sp>
         <p:nvSpPr>
-          <p:cNvPr id="18" name="Rectangle 17"/>
+          <p:cNvPr id="14" name="Rectangle 13"/>
           <p:cNvSpPr/>
           <p:nvPr/>
         </p:nvSpPr>
         <p:spPr>
           <a:xfrm>
-            <a:off x="548640" y="3639311"/>
+            <a:off x="548640" y="2907791"/>
             <a:ext cx="64008" cy="676656"/>
           </a:xfrm>
           <a:prstGeom prst="rect">
@@ -9035,13 +12948,13 @@
       </p:sp>
       <p:sp>
         <p:nvSpPr>
-          <p:cNvPr id="19" name="TextBox 18"/>
-          <p:cNvSpPr txBox="1"/>
-          <p:nvPr/>
-        </p:nvSpPr>
-        <p:spPr>
-          <a:xfrm>
-            <a:off x="822960" y="3703320"/>
+          <p:cNvPr id="15" name="TextBox 14"/>
+          <p:cNvSpPr txBox="1"/>
+          <p:nvPr/>
+        </p:nvSpPr>
+        <p:spPr>
+          <a:xfrm>
+            <a:off x="822960" y="2971799"/>
             <a:ext cx="640080" cy="365760"/>
           </a:xfrm>
           <a:prstGeom prst="rect">
@@ -9063,20 +12976,20 @@
                 </a:solidFill>
                 <a:latin typeface="Georgia"/>
               </a:rPr>
-              <a:t>Q4</a:t>
-            </a:r>
-          </a:p>
-        </p:txBody>
-      </p:sp>
-      <p:sp>
-        <p:nvSpPr>
-          <p:cNvPr id="20" name="TextBox 19"/>
-          <p:cNvSpPr txBox="1"/>
-          <p:nvPr/>
-        </p:nvSpPr>
-        <p:spPr>
-          <a:xfrm>
-            <a:off x="1554480" y="3694175"/>
+              <a:t>Q3</a:t>
+            </a:r>
+          </a:p>
+        </p:txBody>
+      </p:sp>
+      <p:sp>
+        <p:nvSpPr>
+          <p:cNvPr id="16" name="TextBox 15"/>
+          <p:cNvSpPr txBox="1"/>
+          <p:nvPr/>
+        </p:nvSpPr>
+        <p:spPr>
+          <a:xfrm>
+            <a:off x="1554480" y="2962656"/>
             <a:ext cx="9875520" cy="585216"/>
           </a:xfrm>
           <a:prstGeom prst="rect">
@@ -9097,7 +13010,7 @@
                   <a:srgbClr val="1B2A41"/>
                 </a:solidFill>
               </a:rPr>
-              <a:t>Basel already has a risk-based capital ratio. Why add a leverage ratio that ignores risk weights?</a:t>
+              <a:t>Say what question the LCR answers, without using the word ratio.</a:t>
             </a:r>
           </a:p>
           <a:p>
@@ -9120,20 +13033,20 @@
                   <a:srgbClr val="5D6B7E"/>
                 </a:solidFill>
               </a:rPr>
-              <a:t>Risk weights can be wrong or gamed. The leverage ratio is the backstop that does not depend on them.</a:t>
-            </a:r>
-          </a:p>
-        </p:txBody>
-      </p:sp>
-      <p:sp>
-        <p:nvSpPr>
-          <p:cNvPr id="21" name="Rectangle 20"/>
+              <a:t>Can the bank pay 30 days of outflows in a stress from assets it can sell today? At 100% or more, yes.</a:t>
+            </a:r>
+          </a:p>
+        </p:txBody>
+      </p:sp>
+      <p:sp>
+        <p:nvSpPr>
+          <p:cNvPr id="17" name="Rectangle 16"/>
           <p:cNvSpPr/>
           <p:nvPr/>
         </p:nvSpPr>
         <p:spPr>
           <a:xfrm>
-            <a:off x="548640" y="4370831"/>
+            <a:off x="548640" y="3639311"/>
             <a:ext cx="11091672" cy="676656"/>
           </a:xfrm>
           <a:prstGeom prst="rect">
@@ -9171,13 +13084,13 @@
       </p:sp>
       <p:sp>
         <p:nvSpPr>
-          <p:cNvPr id="22" name="Rectangle 21"/>
+          <p:cNvPr id="18" name="Rectangle 17"/>
           <p:cNvSpPr/>
           <p:nvPr/>
         </p:nvSpPr>
         <p:spPr>
           <a:xfrm>
-            <a:off x="548640" y="4370831"/>
+            <a:off x="548640" y="3639311"/>
             <a:ext cx="64008" cy="676656"/>
           </a:xfrm>
           <a:prstGeom prst="rect">
@@ -9215,13 +13128,13 @@
       </p:sp>
       <p:sp>
         <p:nvSpPr>
-          <p:cNvPr id="23" name="TextBox 22"/>
-          <p:cNvSpPr txBox="1"/>
-          <p:nvPr/>
-        </p:nvSpPr>
-        <p:spPr>
-          <a:xfrm>
-            <a:off x="822960" y="4434840"/>
+          <p:cNvPr id="19" name="TextBox 18"/>
+          <p:cNvSpPr txBox="1"/>
+          <p:nvPr/>
+        </p:nvSpPr>
+        <p:spPr>
+          <a:xfrm>
+            <a:off x="822960" y="3703320"/>
             <a:ext cx="640080" cy="365760"/>
           </a:xfrm>
           <a:prstGeom prst="rect">
@@ -9243,20 +13156,20 @@
                 </a:solidFill>
                 <a:latin typeface="Georgia"/>
               </a:rPr>
-              <a:t>Q5</a:t>
-            </a:r>
-          </a:p>
-        </p:txBody>
-      </p:sp>
-      <p:sp>
-        <p:nvSpPr>
-          <p:cNvPr id="24" name="TextBox 23"/>
-          <p:cNvSpPr txBox="1"/>
-          <p:nvPr/>
-        </p:nvSpPr>
-        <p:spPr>
-          <a:xfrm>
-            <a:off x="1554480" y="4425695"/>
+              <a:t>Q4</a:t>
+            </a:r>
+          </a:p>
+        </p:txBody>
+      </p:sp>
+      <p:sp>
+        <p:nvSpPr>
+          <p:cNvPr id="20" name="TextBox 19"/>
+          <p:cNvSpPr txBox="1"/>
+          <p:nvPr/>
+        </p:nvSpPr>
+        <p:spPr>
+          <a:xfrm>
+            <a:off x="1554480" y="3694175"/>
             <a:ext cx="9875520" cy="585216"/>
           </a:xfrm>
           <a:prstGeom prst="rect">
@@ -9277,7 +13190,7 @@
                   <a:srgbClr val="1B2A41"/>
                 </a:solidFill>
               </a:rPr>
-              <a:t>An AML system fires 10,000 alerts a month and 9,500 are false. What does ML change, and what must it never change?</a:t>
+              <a:t>Basel already has a risk-based capital ratio. Why add a leverage ratio that ignores risk weights?</a:t>
             </a:r>
           </a:p>
           <a:p>
@@ -9300,20 +13213,20 @@
                   <a:srgbClr val="5D6B7E"/>
                 </a:solidFill>
               </a:rPr>
-              <a:t>It ranks the alerts so the analyst reaches the real ones first. It never closes an alert or files a report without a human signature.</a:t>
-            </a:r>
-          </a:p>
-        </p:txBody>
-      </p:sp>
-      <p:sp>
-        <p:nvSpPr>
-          <p:cNvPr id="25" name="Rectangle 24"/>
+              <a:t>Risk weights can be wrong or gamed. The leverage ratio is the backstop that does not depend on them.</a:t>
+            </a:r>
+          </a:p>
+        </p:txBody>
+      </p:sp>
+      <p:sp>
+        <p:nvSpPr>
+          <p:cNvPr id="21" name="Rectangle 20"/>
           <p:cNvSpPr/>
           <p:nvPr/>
         </p:nvSpPr>
         <p:spPr>
           <a:xfrm>
-            <a:off x="548640" y="5102351"/>
+            <a:off x="548640" y="4370831"/>
             <a:ext cx="11091672" cy="676656"/>
           </a:xfrm>
           <a:prstGeom prst="rect">
@@ -9351,13 +13264,13 @@
       </p:sp>
       <p:sp>
         <p:nvSpPr>
-          <p:cNvPr id="26" name="Rectangle 25"/>
+          <p:cNvPr id="22" name="Rectangle 21"/>
           <p:cNvSpPr/>
           <p:nvPr/>
         </p:nvSpPr>
         <p:spPr>
           <a:xfrm>
-            <a:off x="548640" y="5102351"/>
+            <a:off x="548640" y="4370831"/>
             <a:ext cx="64008" cy="676656"/>
           </a:xfrm>
           <a:prstGeom prst="rect">
@@ -9395,13 +13308,13 @@
       </p:sp>
       <p:sp>
         <p:nvSpPr>
-          <p:cNvPr id="27" name="TextBox 26"/>
-          <p:cNvSpPr txBox="1"/>
-          <p:nvPr/>
-        </p:nvSpPr>
-        <p:spPr>
-          <a:xfrm>
-            <a:off x="822960" y="5166359"/>
+          <p:cNvPr id="23" name="TextBox 22"/>
+          <p:cNvSpPr txBox="1"/>
+          <p:nvPr/>
+        </p:nvSpPr>
+        <p:spPr>
+          <a:xfrm>
+            <a:off x="822960" y="4434840"/>
             <a:ext cx="640080" cy="365760"/>
           </a:xfrm>
           <a:prstGeom prst="rect">
@@ -9423,20 +13336,20 @@
                 </a:solidFill>
                 <a:latin typeface="Georgia"/>
               </a:rPr>
-              <a:t>Q6</a:t>
-            </a:r>
-          </a:p>
-        </p:txBody>
-      </p:sp>
-      <p:sp>
-        <p:nvSpPr>
-          <p:cNvPr id="28" name="TextBox 27"/>
-          <p:cNvSpPr txBox="1"/>
-          <p:nvPr/>
-        </p:nvSpPr>
-        <p:spPr>
-          <a:xfrm>
-            <a:off x="1554480" y="5157215"/>
+              <a:t>Q5</a:t>
+            </a:r>
+          </a:p>
+        </p:txBody>
+      </p:sp>
+      <p:sp>
+        <p:nvSpPr>
+          <p:cNvPr id="24" name="TextBox 23"/>
+          <p:cNvSpPr txBox="1"/>
+          <p:nvPr/>
+        </p:nvSpPr>
+        <p:spPr>
+          <a:xfrm>
+            <a:off x="1554480" y="4425695"/>
             <a:ext cx="9875520" cy="585216"/>
           </a:xfrm>
           <a:prstGeom prst="rect">
@@ -9457,7 +13370,7 @@
                   <a:srgbClr val="1B2A41"/>
                 </a:solidFill>
               </a:rPr>
-              <a:t>Your generated Pillar 3 document shows a total capital ratio of 16.9%. The bank published 16.41%. What do you do?</a:t>
+              <a:t>An AML system fires 10,000 alerts a month and 9,500 are false. What does ML change, and what must it never change?</a:t>
             </a:r>
           </a:p>
           <a:p>
@@ -9480,6 +13393,186 @@
                   <a:srgbClr val="5D6B7E"/>
                 </a:solidFill>
               </a:rPr>
+              <a:t>It ranks the alerts so the analyst reaches the real ones first. It never closes an alert or files a report without a human signature.</a:t>
+            </a:r>
+          </a:p>
+        </p:txBody>
+      </p:sp>
+      <p:sp>
+        <p:nvSpPr>
+          <p:cNvPr id="25" name="Rectangle 24"/>
+          <p:cNvSpPr/>
+          <p:nvPr/>
+        </p:nvSpPr>
+        <p:spPr>
+          <a:xfrm>
+            <a:off x="548640" y="5102351"/>
+            <a:ext cx="11091672" cy="676656"/>
+          </a:xfrm>
+          <a:prstGeom prst="rect">
+            <a:avLst/>
+          </a:prstGeom>
+          <a:solidFill>
+            <a:srgbClr val="FFFFFF"/>
+          </a:solidFill>
+          <a:ln>
+            <a:noFill/>
+          </a:ln>
+          <a:effectLst/>
+        </p:spPr>
+        <p:style>
+          <a:lnRef idx="1">
+            <a:schemeClr val="accent1"/>
+          </a:lnRef>
+          <a:fillRef idx="3">
+            <a:schemeClr val="accent1"/>
+          </a:fillRef>
+          <a:effectRef idx="2">
+            <a:schemeClr val="accent1"/>
+          </a:effectRef>
+          <a:fontRef idx="minor">
+            <a:schemeClr val="lt1"/>
+          </a:fontRef>
+        </p:style>
+        <p:txBody>
+          <a:bodyPr rtlCol="0" anchor="ctr"/>
+          <a:lstStyle/>
+          <a:p>
+            <a:pPr algn="ctr"/>
+          </a:p>
+        </p:txBody>
+      </p:sp>
+      <p:sp>
+        <p:nvSpPr>
+          <p:cNvPr id="26" name="Rectangle 25"/>
+          <p:cNvSpPr/>
+          <p:nvPr/>
+        </p:nvSpPr>
+        <p:spPr>
+          <a:xfrm>
+            <a:off x="548640" y="5102351"/>
+            <a:ext cx="64008" cy="676656"/>
+          </a:xfrm>
+          <a:prstGeom prst="rect">
+            <a:avLst/>
+          </a:prstGeom>
+          <a:solidFill>
+            <a:srgbClr val="3A5C9E"/>
+          </a:solidFill>
+          <a:ln>
+            <a:noFill/>
+          </a:ln>
+          <a:effectLst/>
+        </p:spPr>
+        <p:style>
+          <a:lnRef idx="1">
+            <a:schemeClr val="accent1"/>
+          </a:lnRef>
+          <a:fillRef idx="3">
+            <a:schemeClr val="accent1"/>
+          </a:fillRef>
+          <a:effectRef idx="2">
+            <a:schemeClr val="accent1"/>
+          </a:effectRef>
+          <a:fontRef idx="minor">
+            <a:schemeClr val="lt1"/>
+          </a:fontRef>
+        </p:style>
+        <p:txBody>
+          <a:bodyPr rtlCol="0" anchor="ctr"/>
+          <a:lstStyle/>
+          <a:p>
+            <a:pPr algn="ctr"/>
+          </a:p>
+        </p:txBody>
+      </p:sp>
+      <p:sp>
+        <p:nvSpPr>
+          <p:cNvPr id="27" name="TextBox 26"/>
+          <p:cNvSpPr txBox="1"/>
+          <p:nvPr/>
+        </p:nvSpPr>
+        <p:spPr>
+          <a:xfrm>
+            <a:off x="822960" y="5166359"/>
+            <a:ext cx="640080" cy="365760"/>
+          </a:xfrm>
+          <a:prstGeom prst="rect">
+            <a:avLst/>
+          </a:prstGeom>
+          <a:noFill/>
+        </p:spPr>
+        <p:txBody>
+          <a:bodyPr wrap="square" anchor="t" lIns="0" rIns="0" tIns="0" bIns="0">
+            <a:spAutoFit/>
+          </a:bodyPr>
+          <a:lstStyle/>
+          <a:p>
+            <a:pPr algn="l"/>
+            <a:r>
+              <a:rPr sz="1400" b="1">
+                <a:solidFill>
+                  <a:srgbClr val="3A5C9E"/>
+                </a:solidFill>
+                <a:latin typeface="Georgia"/>
+              </a:rPr>
+              <a:t>Q6</a:t>
+            </a:r>
+          </a:p>
+        </p:txBody>
+      </p:sp>
+      <p:sp>
+        <p:nvSpPr>
+          <p:cNvPr id="28" name="TextBox 27"/>
+          <p:cNvSpPr txBox="1"/>
+          <p:nvPr/>
+        </p:nvSpPr>
+        <p:spPr>
+          <a:xfrm>
+            <a:off x="1554480" y="5157215"/>
+            <a:ext cx="9875520" cy="585216"/>
+          </a:xfrm>
+          <a:prstGeom prst="rect">
+            <a:avLst/>
+          </a:prstGeom>
+          <a:noFill/>
+        </p:spPr>
+        <p:txBody>
+          <a:bodyPr wrap="square" anchor="t" lIns="0" rIns="0" tIns="0" bIns="0">
+            <a:spAutoFit/>
+          </a:bodyPr>
+          <a:lstStyle/>
+          <a:p>
+            <a:pPr algn="l"/>
+            <a:r>
+              <a:rPr sz="1050" b="1">
+                <a:solidFill>
+                  <a:srgbClr val="1B2A41"/>
+                </a:solidFill>
+              </a:rPr>
+              <a:t>Your generated Pillar 3 document shows a total capital ratio of 16.9%. The bank published 16.41%. What do you do?</a:t>
+            </a:r>
+          </a:p>
+          <a:p>
+            <a:pPr algn="l">
+              <a:spcBef>
+                <a:spcPts val="200"/>
+              </a:spcBef>
+            </a:pPr>
+            <a:r>
+              <a:rPr sz="900" b="1">
+                <a:solidFill>
+                  <a:srgbClr val="C9A227"/>
+                </a:solidFill>
+              </a:rPr>
+              <a:t>TIP  </a:t>
+            </a:r>
+            <a:r>
+              <a:rPr sz="900" b="0">
+                <a:solidFill>
+                  <a:srgbClr val="5D6B7E"/>
+                </a:solidFill>
+              </a:rPr>
               <a:t>Do not issue it. Find the wrong input or the wrong formula. Reconciliation to the published number is the gate.</a:t>
             </a:r>
           </a:p>
@@ -9487,13 +13580,905 @@
       </p:sp>
       <p:sp>
         <p:nvSpPr>
-          <p:cNvPr id="29" name="Rectangle 28"/>
+          <p:cNvPr id="29" name="TextBox 28"/>
+          <p:cNvSpPr txBox="1"/>
+          <p:nvPr/>
+        </p:nvSpPr>
+        <p:spPr>
+          <a:xfrm>
+            <a:off x="548640" y="6473952"/>
+            <a:ext cx="7315200" cy="228600"/>
+          </a:xfrm>
+          <a:prstGeom prst="rect">
+            <a:avLst/>
+          </a:prstGeom>
+          <a:noFill/>
+        </p:spPr>
+        <p:txBody>
+          <a:bodyPr wrap="square" anchor="t" lIns="0" rIns="0" tIns="0" bIns="0">
+            <a:spAutoFit/>
+          </a:bodyPr>
+          <a:lstStyle/>
+          <a:p>
+            <a:pPr algn="l"/>
+            <a:r>
+              <a:rPr sz="800" b="0">
+                <a:solidFill>
+                  <a:srgbClr val="5D6B7E"/>
+                </a:solidFill>
+              </a:rPr>
+              <a:t>ISBMS · PGDM 2025–27 · AGENTIC AI &amp; ADVANCED ANALYTICS IN FINANCE</a:t>
+            </a:r>
+          </a:p>
+        </p:txBody>
+      </p:sp>
+      <p:sp>
+        <p:nvSpPr>
+          <p:cNvPr id="30" name="TextBox 29"/>
+          <p:cNvSpPr txBox="1"/>
+          <p:nvPr/>
+        </p:nvSpPr>
+        <p:spPr>
+          <a:xfrm>
+            <a:off x="9262872" y="6473952"/>
+            <a:ext cx="2377440" cy="228600"/>
+          </a:xfrm>
+          <a:prstGeom prst="rect">
+            <a:avLst/>
+          </a:prstGeom>
+          <a:noFill/>
+        </p:spPr>
+        <p:txBody>
+          <a:bodyPr wrap="square" anchor="t" lIns="0" rIns="0" tIns="0" bIns="0">
+            <a:spAutoFit/>
+          </a:bodyPr>
+          <a:lstStyle/>
+          <a:p>
+            <a:pPr algn="r"/>
+            <a:r>
+              <a:rPr sz="800" b="0">
+                <a:solidFill>
+                  <a:srgbClr val="5D6B7E"/>
+                </a:solidFill>
+              </a:rPr>
+              <a:t>MODULE 6  ·  08</a:t>
+            </a:r>
+          </a:p>
+        </p:txBody>
+      </p:sp>
+    </p:spTree>
+  </p:cSld>
+  <p:clrMapOvr>
+    <a:masterClrMapping/>
+  </p:clrMapOvr>
+</p:sld>
+</file>
+
+<file path=ppt/slides/slide9.xml><?xml version="1.0" encoding="utf-8"?>
+<p:sld xmlns:a="http://schemas.openxmlformats.org/drawingml/2006/main" xmlns:p="http://schemas.openxmlformats.org/presentationml/2006/main" xmlns:r="http://schemas.openxmlformats.org/officeDocument/2006/relationships">
+  <p:cSld>
+    <p:bg>
+      <p:bgPr>
+        <a:solidFill>
+          <a:srgbClr val="F7F8FA"/>
+        </a:solidFill>
+        <a:effectLst/>
+      </p:bgPr>
+    </p:bg>
+    <p:spTree>
+      <p:nvGrpSpPr>
+        <p:cNvPr id="1" name=""/>
+        <p:cNvGrpSpPr/>
+        <p:nvPr/>
+      </p:nvGrpSpPr>
+      <p:grpSpPr/>
+      <p:sp>
+        <p:nvSpPr>
+          <p:cNvPr id="2" name="Rectangle 1"/>
           <p:cNvSpPr/>
           <p:nvPr/>
         </p:nvSpPr>
         <p:spPr>
           <a:xfrm>
-            <a:off x="548640" y="5870448"/>
+            <a:off x="548640" y="402336"/>
+            <a:ext cx="118872" cy="118872"/>
+          </a:xfrm>
+          <a:prstGeom prst="rect">
+            <a:avLst/>
+          </a:prstGeom>
+          <a:solidFill>
+            <a:srgbClr val="C9A227"/>
+          </a:solidFill>
+          <a:ln>
+            <a:noFill/>
+          </a:ln>
+          <a:effectLst/>
+        </p:spPr>
+        <p:style>
+          <a:lnRef idx="1">
+            <a:schemeClr val="accent1"/>
+          </a:lnRef>
+          <a:fillRef idx="3">
+            <a:schemeClr val="accent1"/>
+          </a:fillRef>
+          <a:effectRef idx="2">
+            <a:schemeClr val="accent1"/>
+          </a:effectRef>
+          <a:fontRef idx="minor">
+            <a:schemeClr val="lt1"/>
+          </a:fontRef>
+        </p:style>
+        <p:txBody>
+          <a:bodyPr rtlCol="0" anchor="ctr"/>
+          <a:lstStyle/>
+          <a:p>
+            <a:pPr algn="ctr"/>
+          </a:p>
+        </p:txBody>
+      </p:sp>
+      <p:sp>
+        <p:nvSpPr>
+          <p:cNvPr id="3" name="TextBox 2"/>
+          <p:cNvSpPr txBox="1"/>
+          <p:nvPr/>
+        </p:nvSpPr>
+        <p:spPr>
+          <a:xfrm>
+            <a:off x="786384" y="310896"/>
+            <a:ext cx="10817352" cy="274320"/>
+          </a:xfrm>
+          <a:prstGeom prst="rect">
+            <a:avLst/>
+          </a:prstGeom>
+          <a:noFill/>
+        </p:spPr>
+        <p:txBody>
+          <a:bodyPr wrap="square" anchor="t" lIns="0" rIns="0" tIns="0" bIns="0">
+            <a:spAutoFit/>
+          </a:bodyPr>
+          <a:lstStyle/>
+          <a:p>
+            <a:pPr algn="l"/>
+            <a:r>
+              <a:rPr sz="1100" b="1">
+                <a:solidFill>
+                  <a:srgbClr val="C9A227"/>
+                </a:solidFill>
+              </a:rPr>
+              <a:t>PRACTICE QUESTIONS</a:t>
+            </a:r>
+          </a:p>
+        </p:txBody>
+      </p:sp>
+      <p:sp>
+        <p:nvSpPr>
+          <p:cNvPr id="4" name="Rectangle 3"/>
+          <p:cNvSpPr/>
+          <p:nvPr/>
+        </p:nvSpPr>
+        <p:spPr>
+          <a:xfrm>
+            <a:off x="548640" y="914400"/>
+            <a:ext cx="11091672" cy="914400"/>
+          </a:xfrm>
+          <a:prstGeom prst="rect">
+            <a:avLst/>
+          </a:prstGeom>
+          <a:solidFill>
+            <a:srgbClr val="FFFFFF"/>
+          </a:solidFill>
+          <a:ln>
+            <a:noFill/>
+          </a:ln>
+          <a:effectLst/>
+        </p:spPr>
+        <p:style>
+          <a:lnRef idx="1">
+            <a:schemeClr val="accent1"/>
+          </a:lnRef>
+          <a:fillRef idx="3">
+            <a:schemeClr val="accent1"/>
+          </a:fillRef>
+          <a:effectRef idx="2">
+            <a:schemeClr val="accent1"/>
+          </a:effectRef>
+          <a:fontRef idx="minor">
+            <a:schemeClr val="lt1"/>
+          </a:fontRef>
+        </p:style>
+        <p:txBody>
+          <a:bodyPr rtlCol="0" anchor="ctr"/>
+          <a:lstStyle/>
+          <a:p>
+            <a:pPr algn="ctr"/>
+          </a:p>
+        </p:txBody>
+      </p:sp>
+      <p:sp>
+        <p:nvSpPr>
+          <p:cNvPr id="5" name="Rectangle 4"/>
+          <p:cNvSpPr/>
+          <p:nvPr/>
+        </p:nvSpPr>
+        <p:spPr>
+          <a:xfrm>
+            <a:off x="548640" y="914400"/>
+            <a:ext cx="64008" cy="914400"/>
+          </a:xfrm>
+          <a:prstGeom prst="rect">
+            <a:avLst/>
+          </a:prstGeom>
+          <a:solidFill>
+            <a:srgbClr val="3A5C9E"/>
+          </a:solidFill>
+          <a:ln>
+            <a:noFill/>
+          </a:ln>
+          <a:effectLst/>
+        </p:spPr>
+        <p:style>
+          <a:lnRef idx="1">
+            <a:schemeClr val="accent1"/>
+          </a:lnRef>
+          <a:fillRef idx="3">
+            <a:schemeClr val="accent1"/>
+          </a:fillRef>
+          <a:effectRef idx="2">
+            <a:schemeClr val="accent1"/>
+          </a:effectRef>
+          <a:fontRef idx="minor">
+            <a:schemeClr val="lt1"/>
+          </a:fontRef>
+        </p:style>
+        <p:txBody>
+          <a:bodyPr rtlCol="0" anchor="ctr"/>
+          <a:lstStyle/>
+          <a:p>
+            <a:pPr algn="ctr"/>
+          </a:p>
+        </p:txBody>
+      </p:sp>
+      <p:sp>
+        <p:nvSpPr>
+          <p:cNvPr id="6" name="TextBox 5"/>
+          <p:cNvSpPr txBox="1"/>
+          <p:nvPr/>
+        </p:nvSpPr>
+        <p:spPr>
+          <a:xfrm>
+            <a:off x="822960" y="1005840"/>
+            <a:ext cx="685800" cy="365760"/>
+          </a:xfrm>
+          <a:prstGeom prst="rect">
+            <a:avLst/>
+          </a:prstGeom>
+          <a:noFill/>
+        </p:spPr>
+        <p:txBody>
+          <a:bodyPr wrap="square" anchor="t" lIns="0" rIns="0" tIns="0" bIns="0">
+            <a:spAutoFit/>
+          </a:bodyPr>
+          <a:lstStyle/>
+          <a:p>
+            <a:pPr algn="l"/>
+            <a:r>
+              <a:rPr sz="1400" b="1">
+                <a:solidFill>
+                  <a:srgbClr val="3A5C9E"/>
+                </a:solidFill>
+                <a:latin typeface="Georgia"/>
+              </a:rPr>
+              <a:t>Q7</a:t>
+            </a:r>
+          </a:p>
+        </p:txBody>
+      </p:sp>
+      <p:sp>
+        <p:nvSpPr>
+          <p:cNvPr id="7" name="TextBox 6"/>
+          <p:cNvSpPr txBox="1"/>
+          <p:nvPr/>
+        </p:nvSpPr>
+        <p:spPr>
+          <a:xfrm>
+            <a:off x="1554480" y="1005840"/>
+            <a:ext cx="9875520" cy="777240"/>
+          </a:xfrm>
+          <a:prstGeom prst="rect">
+            <a:avLst/>
+          </a:prstGeom>
+          <a:noFill/>
+        </p:spPr>
+        <p:txBody>
+          <a:bodyPr wrap="square" anchor="t" lIns="0" rIns="0" tIns="0" bIns="0">
+            <a:spAutoFit/>
+          </a:bodyPr>
+          <a:lstStyle/>
+          <a:p>
+            <a:pPr algn="l"/>
+            <a:r>
+              <a:rPr sz="1050" b="1">
+                <a:solidFill>
+                  <a:srgbClr val="1B2A41"/>
+                </a:solidFill>
+              </a:rPr>
+              <a:t>Give three ways AI is used in KYC document automation, and say what the human still does.</a:t>
+            </a:r>
+          </a:p>
+          <a:p>
+            <a:pPr algn="l">
+              <a:spcBef>
+                <a:spcPts val="300"/>
+              </a:spcBef>
+            </a:pPr>
+            <a:r>
+              <a:rPr sz="900" b="1">
+                <a:solidFill>
+                  <a:srgbClr val="C9A227"/>
+                </a:solidFill>
+              </a:rPr>
+              <a:t>TIP  </a:t>
+            </a:r>
+            <a:r>
+              <a:rPr sz="900" b="0">
+                <a:solidFill>
+                  <a:srgbClr val="5D6B7E"/>
+                </a:solidFill>
+              </a:rPr>
+              <a:t>OCR reads the ID. NLP matches the name, date of birth and address to the form and catches a reordered name. A model flags a tampered or expired document. The human handles the exceptions, not the volume.</a:t>
+            </a:r>
+          </a:p>
+        </p:txBody>
+      </p:sp>
+      <p:sp>
+        <p:nvSpPr>
+          <p:cNvPr id="8" name="Rectangle 7"/>
+          <p:cNvSpPr/>
+          <p:nvPr/>
+        </p:nvSpPr>
+        <p:spPr>
+          <a:xfrm>
+            <a:off x="548640" y="1938528"/>
+            <a:ext cx="11091672" cy="914400"/>
+          </a:xfrm>
+          <a:prstGeom prst="rect">
+            <a:avLst/>
+          </a:prstGeom>
+          <a:solidFill>
+            <a:srgbClr val="FFFFFF"/>
+          </a:solidFill>
+          <a:ln>
+            <a:noFill/>
+          </a:ln>
+          <a:effectLst/>
+        </p:spPr>
+        <p:style>
+          <a:lnRef idx="1">
+            <a:schemeClr val="accent1"/>
+          </a:lnRef>
+          <a:fillRef idx="3">
+            <a:schemeClr val="accent1"/>
+          </a:fillRef>
+          <a:effectRef idx="2">
+            <a:schemeClr val="accent1"/>
+          </a:effectRef>
+          <a:fontRef idx="minor">
+            <a:schemeClr val="lt1"/>
+          </a:fontRef>
+        </p:style>
+        <p:txBody>
+          <a:bodyPr rtlCol="0" anchor="ctr"/>
+          <a:lstStyle/>
+          <a:p>
+            <a:pPr algn="ctr"/>
+          </a:p>
+        </p:txBody>
+      </p:sp>
+      <p:sp>
+        <p:nvSpPr>
+          <p:cNvPr id="9" name="Rectangle 8"/>
+          <p:cNvSpPr/>
+          <p:nvPr/>
+        </p:nvSpPr>
+        <p:spPr>
+          <a:xfrm>
+            <a:off x="548640" y="1938528"/>
+            <a:ext cx="64008" cy="914400"/>
+          </a:xfrm>
+          <a:prstGeom prst="rect">
+            <a:avLst/>
+          </a:prstGeom>
+          <a:solidFill>
+            <a:srgbClr val="3A5C9E"/>
+          </a:solidFill>
+          <a:ln>
+            <a:noFill/>
+          </a:ln>
+          <a:effectLst/>
+        </p:spPr>
+        <p:style>
+          <a:lnRef idx="1">
+            <a:schemeClr val="accent1"/>
+          </a:lnRef>
+          <a:fillRef idx="3">
+            <a:schemeClr val="accent1"/>
+          </a:fillRef>
+          <a:effectRef idx="2">
+            <a:schemeClr val="accent1"/>
+          </a:effectRef>
+          <a:fontRef idx="minor">
+            <a:schemeClr val="lt1"/>
+          </a:fontRef>
+        </p:style>
+        <p:txBody>
+          <a:bodyPr rtlCol="0" anchor="ctr"/>
+          <a:lstStyle/>
+          <a:p>
+            <a:pPr algn="ctr"/>
+          </a:p>
+        </p:txBody>
+      </p:sp>
+      <p:sp>
+        <p:nvSpPr>
+          <p:cNvPr id="10" name="TextBox 9"/>
+          <p:cNvSpPr txBox="1"/>
+          <p:nvPr/>
+        </p:nvSpPr>
+        <p:spPr>
+          <a:xfrm>
+            <a:off x="822960" y="2029968"/>
+            <a:ext cx="685800" cy="365760"/>
+          </a:xfrm>
+          <a:prstGeom prst="rect">
+            <a:avLst/>
+          </a:prstGeom>
+          <a:noFill/>
+        </p:spPr>
+        <p:txBody>
+          <a:bodyPr wrap="square" anchor="t" lIns="0" rIns="0" tIns="0" bIns="0">
+            <a:spAutoFit/>
+          </a:bodyPr>
+          <a:lstStyle/>
+          <a:p>
+            <a:pPr algn="l"/>
+            <a:r>
+              <a:rPr sz="1400" b="1">
+                <a:solidFill>
+                  <a:srgbClr val="3A5C9E"/>
+                </a:solidFill>
+                <a:latin typeface="Georgia"/>
+              </a:rPr>
+              <a:t>Q8</a:t>
+            </a:r>
+          </a:p>
+        </p:txBody>
+      </p:sp>
+      <p:sp>
+        <p:nvSpPr>
+          <p:cNvPr id="11" name="TextBox 10"/>
+          <p:cNvSpPr txBox="1"/>
+          <p:nvPr/>
+        </p:nvSpPr>
+        <p:spPr>
+          <a:xfrm>
+            <a:off x="1554480" y="2029968"/>
+            <a:ext cx="9875520" cy="777240"/>
+          </a:xfrm>
+          <a:prstGeom prst="rect">
+            <a:avLst/>
+          </a:prstGeom>
+          <a:noFill/>
+        </p:spPr>
+        <p:txBody>
+          <a:bodyPr wrap="square" anchor="t" lIns="0" rIns="0" tIns="0" bIns="0">
+            <a:spAutoFit/>
+          </a:bodyPr>
+          <a:lstStyle/>
+          <a:p>
+            <a:pPr algn="l"/>
+            <a:r>
+              <a:rPr sz="1050" b="1">
+                <a:solidFill>
+                  <a:srgbClr val="1B2A41"/>
+                </a:solidFill>
+              </a:rPr>
+              <a:t>What is COREP and what is FINREP? Name one thing that sits in each.</a:t>
+            </a:r>
+          </a:p>
+          <a:p>
+            <a:pPr algn="l">
+              <a:spcBef>
+                <a:spcPts val="300"/>
+              </a:spcBef>
+            </a:pPr>
+            <a:r>
+              <a:rPr sz="900" b="1">
+                <a:solidFill>
+                  <a:srgbClr val="C9A227"/>
+                </a:solidFill>
+              </a:rPr>
+              <a:t>TIP  </a:t>
+            </a:r>
+            <a:r>
+              <a:rPr sz="900" b="0">
+                <a:solidFill>
+                  <a:srgbClr val="5D6B7E"/>
+                </a:solidFill>
+              </a:rPr>
+              <a:t>COREP is the capital return: own funds, RWA by risk type, leverage, LCR, NSFR, large exposures. FINREP is the accounting return: IFRS balance sheet, P&amp;L, NPE and forbearance. Both are filed in XBRL under the EBA data point model.</a:t>
+            </a:r>
+          </a:p>
+        </p:txBody>
+      </p:sp>
+      <p:sp>
+        <p:nvSpPr>
+          <p:cNvPr id="12" name="Rectangle 11"/>
+          <p:cNvSpPr/>
+          <p:nvPr/>
+        </p:nvSpPr>
+        <p:spPr>
+          <a:xfrm>
+            <a:off x="548640" y="2962656"/>
+            <a:ext cx="11091672" cy="914400"/>
+          </a:xfrm>
+          <a:prstGeom prst="rect">
+            <a:avLst/>
+          </a:prstGeom>
+          <a:solidFill>
+            <a:srgbClr val="FFFFFF"/>
+          </a:solidFill>
+          <a:ln>
+            <a:noFill/>
+          </a:ln>
+          <a:effectLst/>
+        </p:spPr>
+        <p:style>
+          <a:lnRef idx="1">
+            <a:schemeClr val="accent1"/>
+          </a:lnRef>
+          <a:fillRef idx="3">
+            <a:schemeClr val="accent1"/>
+          </a:fillRef>
+          <a:effectRef idx="2">
+            <a:schemeClr val="accent1"/>
+          </a:effectRef>
+          <a:fontRef idx="minor">
+            <a:schemeClr val="lt1"/>
+          </a:fontRef>
+        </p:style>
+        <p:txBody>
+          <a:bodyPr rtlCol="0" anchor="ctr"/>
+          <a:lstStyle/>
+          <a:p>
+            <a:pPr algn="ctr"/>
+          </a:p>
+        </p:txBody>
+      </p:sp>
+      <p:sp>
+        <p:nvSpPr>
+          <p:cNvPr id="13" name="Rectangle 12"/>
+          <p:cNvSpPr/>
+          <p:nvPr/>
+        </p:nvSpPr>
+        <p:spPr>
+          <a:xfrm>
+            <a:off x="548640" y="2962656"/>
+            <a:ext cx="64008" cy="914400"/>
+          </a:xfrm>
+          <a:prstGeom prst="rect">
+            <a:avLst/>
+          </a:prstGeom>
+          <a:solidFill>
+            <a:srgbClr val="3A5C9E"/>
+          </a:solidFill>
+          <a:ln>
+            <a:noFill/>
+          </a:ln>
+          <a:effectLst/>
+        </p:spPr>
+        <p:style>
+          <a:lnRef idx="1">
+            <a:schemeClr val="accent1"/>
+          </a:lnRef>
+          <a:fillRef idx="3">
+            <a:schemeClr val="accent1"/>
+          </a:fillRef>
+          <a:effectRef idx="2">
+            <a:schemeClr val="accent1"/>
+          </a:effectRef>
+          <a:fontRef idx="minor">
+            <a:schemeClr val="lt1"/>
+          </a:fontRef>
+        </p:style>
+        <p:txBody>
+          <a:bodyPr rtlCol="0" anchor="ctr"/>
+          <a:lstStyle/>
+          <a:p>
+            <a:pPr algn="ctr"/>
+          </a:p>
+        </p:txBody>
+      </p:sp>
+      <p:sp>
+        <p:nvSpPr>
+          <p:cNvPr id="14" name="TextBox 13"/>
+          <p:cNvSpPr txBox="1"/>
+          <p:nvPr/>
+        </p:nvSpPr>
+        <p:spPr>
+          <a:xfrm>
+            <a:off x="822960" y="3054096"/>
+            <a:ext cx="685800" cy="365760"/>
+          </a:xfrm>
+          <a:prstGeom prst="rect">
+            <a:avLst/>
+          </a:prstGeom>
+          <a:noFill/>
+        </p:spPr>
+        <p:txBody>
+          <a:bodyPr wrap="square" anchor="t" lIns="0" rIns="0" tIns="0" bIns="0">
+            <a:spAutoFit/>
+          </a:bodyPr>
+          <a:lstStyle/>
+          <a:p>
+            <a:pPr algn="l"/>
+            <a:r>
+              <a:rPr sz="1400" b="1">
+                <a:solidFill>
+                  <a:srgbClr val="3A5C9E"/>
+                </a:solidFill>
+                <a:latin typeface="Georgia"/>
+              </a:rPr>
+              <a:t>Q9</a:t>
+            </a:r>
+          </a:p>
+        </p:txBody>
+      </p:sp>
+      <p:sp>
+        <p:nvSpPr>
+          <p:cNvPr id="15" name="TextBox 14"/>
+          <p:cNvSpPr txBox="1"/>
+          <p:nvPr/>
+        </p:nvSpPr>
+        <p:spPr>
+          <a:xfrm>
+            <a:off x="1554480" y="3054096"/>
+            <a:ext cx="9875520" cy="777240"/>
+          </a:xfrm>
+          <a:prstGeom prst="rect">
+            <a:avLst/>
+          </a:prstGeom>
+          <a:noFill/>
+        </p:spPr>
+        <p:txBody>
+          <a:bodyPr wrap="square" anchor="t" lIns="0" rIns="0" tIns="0" bIns="0">
+            <a:spAutoFit/>
+          </a:bodyPr>
+          <a:lstStyle/>
+          <a:p>
+            <a:pPr algn="l"/>
+            <a:r>
+              <a:rPr sz="1050" b="1">
+                <a:solidFill>
+                  <a:srgbClr val="1B2A41"/>
+                </a:solidFill>
+              </a:rPr>
+              <a:t>How can AI be used in transaction monitoring and suspicious-activity monitoring? What must it never do?</a:t>
+            </a:r>
+          </a:p>
+          <a:p>
+            <a:pPr algn="l">
+              <a:spcBef>
+                <a:spcPts val="300"/>
+              </a:spcBef>
+            </a:pPr>
+            <a:r>
+              <a:rPr sz="900" b="1">
+                <a:solidFill>
+                  <a:srgbClr val="C9A227"/>
+                </a:solidFill>
+              </a:rPr>
+              <a:t>TIP  </a:t>
+            </a:r>
+            <a:r>
+              <a:rPr sz="900" b="0">
+                <a:solidFill>
+                  <a:srgbClr val="5D6B7E"/>
+                </a:solidFill>
+              </a:rPr>
+              <a:t>Rank rule alerts by how often past alerts like them were real, link related accounts, and draft the STR narrative. It never closes an alert or files a report without an analyst's signature.</a:t>
+            </a:r>
+          </a:p>
+        </p:txBody>
+      </p:sp>
+      <p:sp>
+        <p:nvSpPr>
+          <p:cNvPr id="16" name="Rectangle 15"/>
+          <p:cNvSpPr/>
+          <p:nvPr/>
+        </p:nvSpPr>
+        <p:spPr>
+          <a:xfrm>
+            <a:off x="548640" y="3986784"/>
+            <a:ext cx="11091672" cy="914400"/>
+          </a:xfrm>
+          <a:prstGeom prst="rect">
+            <a:avLst/>
+          </a:prstGeom>
+          <a:solidFill>
+            <a:srgbClr val="FFFFFF"/>
+          </a:solidFill>
+          <a:ln>
+            <a:noFill/>
+          </a:ln>
+          <a:effectLst/>
+        </p:spPr>
+        <p:style>
+          <a:lnRef idx="1">
+            <a:schemeClr val="accent1"/>
+          </a:lnRef>
+          <a:fillRef idx="3">
+            <a:schemeClr val="accent1"/>
+          </a:fillRef>
+          <a:effectRef idx="2">
+            <a:schemeClr val="accent1"/>
+          </a:effectRef>
+          <a:fontRef idx="minor">
+            <a:schemeClr val="lt1"/>
+          </a:fontRef>
+        </p:style>
+        <p:txBody>
+          <a:bodyPr rtlCol="0" anchor="ctr"/>
+          <a:lstStyle/>
+          <a:p>
+            <a:pPr algn="ctr"/>
+          </a:p>
+        </p:txBody>
+      </p:sp>
+      <p:sp>
+        <p:nvSpPr>
+          <p:cNvPr id="17" name="Rectangle 16"/>
+          <p:cNvSpPr/>
+          <p:nvPr/>
+        </p:nvSpPr>
+        <p:spPr>
+          <a:xfrm>
+            <a:off x="548640" y="3986784"/>
+            <a:ext cx="64008" cy="914400"/>
+          </a:xfrm>
+          <a:prstGeom prst="rect">
+            <a:avLst/>
+          </a:prstGeom>
+          <a:solidFill>
+            <a:srgbClr val="3A5C9E"/>
+          </a:solidFill>
+          <a:ln>
+            <a:noFill/>
+          </a:ln>
+          <a:effectLst/>
+        </p:spPr>
+        <p:style>
+          <a:lnRef idx="1">
+            <a:schemeClr val="accent1"/>
+          </a:lnRef>
+          <a:fillRef idx="3">
+            <a:schemeClr val="accent1"/>
+          </a:fillRef>
+          <a:effectRef idx="2">
+            <a:schemeClr val="accent1"/>
+          </a:effectRef>
+          <a:fontRef idx="minor">
+            <a:schemeClr val="lt1"/>
+          </a:fontRef>
+        </p:style>
+        <p:txBody>
+          <a:bodyPr rtlCol="0" anchor="ctr"/>
+          <a:lstStyle/>
+          <a:p>
+            <a:pPr algn="ctr"/>
+          </a:p>
+        </p:txBody>
+      </p:sp>
+      <p:sp>
+        <p:nvSpPr>
+          <p:cNvPr id="18" name="TextBox 17"/>
+          <p:cNvSpPr txBox="1"/>
+          <p:nvPr/>
+        </p:nvSpPr>
+        <p:spPr>
+          <a:xfrm>
+            <a:off x="822960" y="4078224"/>
+            <a:ext cx="685800" cy="365760"/>
+          </a:xfrm>
+          <a:prstGeom prst="rect">
+            <a:avLst/>
+          </a:prstGeom>
+          <a:noFill/>
+        </p:spPr>
+        <p:txBody>
+          <a:bodyPr wrap="square" anchor="t" lIns="0" rIns="0" tIns="0" bIns="0">
+            <a:spAutoFit/>
+          </a:bodyPr>
+          <a:lstStyle/>
+          <a:p>
+            <a:pPr algn="l"/>
+            <a:r>
+              <a:rPr sz="1400" b="1">
+                <a:solidFill>
+                  <a:srgbClr val="3A5C9E"/>
+                </a:solidFill>
+                <a:latin typeface="Georgia"/>
+              </a:rPr>
+              <a:t>Q10</a:t>
+            </a:r>
+          </a:p>
+        </p:txBody>
+      </p:sp>
+      <p:sp>
+        <p:nvSpPr>
+          <p:cNvPr id="19" name="TextBox 18"/>
+          <p:cNvSpPr txBox="1"/>
+          <p:nvPr/>
+        </p:nvSpPr>
+        <p:spPr>
+          <a:xfrm>
+            <a:off x="1554480" y="4078224"/>
+            <a:ext cx="9875520" cy="777240"/>
+          </a:xfrm>
+          <a:prstGeom prst="rect">
+            <a:avLst/>
+          </a:prstGeom>
+          <a:noFill/>
+        </p:spPr>
+        <p:txBody>
+          <a:bodyPr wrap="square" anchor="t" lIns="0" rIns="0" tIns="0" bIns="0">
+            <a:spAutoFit/>
+          </a:bodyPr>
+          <a:lstStyle/>
+          <a:p>
+            <a:pPr algn="l"/>
+            <a:r>
+              <a:rPr sz="1050" b="1">
+                <a:solidFill>
+                  <a:srgbClr val="1B2A41"/>
+                </a:solidFill>
+              </a:rPr>
+              <a:t>What is a COSIMA check, and how would you put an LLM into it?</a:t>
+            </a:r>
+          </a:p>
+          <a:p>
+            <a:pPr algn="l">
+              <a:spcBef>
+                <a:spcPts val="300"/>
+              </a:spcBef>
+            </a:pPr>
+            <a:r>
+              <a:rPr sz="900" b="1">
+                <a:solidFill>
+                  <a:srgbClr val="C9A227"/>
+                </a:solidFill>
+              </a:rPr>
+              <a:t>TIP  </a:t>
+            </a:r>
+            <a:r>
+              <a:rPr sz="900" b="0">
+                <a:solidFill>
+                  <a:srgbClr val="5D6B7E"/>
+                </a:solidFill>
+              </a:rPr>
+              <a:t>A name screen against sanctions, PEP and negative-news lists at onboarding and on review. The LLM reads the possible matches, separates same-name strangers from the client, classifies the adverse news, and drafts the memo. The analyst clears the hit.</a:t>
+            </a:r>
+          </a:p>
+        </p:txBody>
+      </p:sp>
+      <p:sp>
+        <p:nvSpPr>
+          <p:cNvPr id="20" name="Rectangle 19"/>
+          <p:cNvSpPr/>
+          <p:nvPr/>
+        </p:nvSpPr>
+        <p:spPr>
+          <a:xfrm>
+            <a:off x="548640" y="5138928"/>
             <a:ext cx="11091672" cy="512064"/>
           </a:xfrm>
           <a:prstGeom prst="rect">
@@ -9531,13 +14516,13 @@
       </p:sp>
       <p:sp>
         <p:nvSpPr>
-          <p:cNvPr id="30" name="Rectangle 29"/>
+          <p:cNvPr id="21" name="Rectangle 20"/>
           <p:cNvSpPr/>
           <p:nvPr/>
         </p:nvSpPr>
         <p:spPr>
           <a:xfrm>
-            <a:off x="548640" y="5870448"/>
+            <a:off x="548640" y="5138928"/>
             <a:ext cx="64008" cy="512064"/>
           </a:xfrm>
           <a:prstGeom prst="rect">
@@ -9575,13 +14560,13 @@
       </p:sp>
       <p:sp>
         <p:nvSpPr>
-          <p:cNvPr id="31" name="TextBox 30"/>
-          <p:cNvSpPr txBox="1"/>
-          <p:nvPr/>
-        </p:nvSpPr>
-        <p:spPr>
-          <a:xfrm>
-            <a:off x="822960" y="5870448"/>
+          <p:cNvPr id="22" name="TextBox 21"/>
+          <p:cNvSpPr txBox="1"/>
+          <p:nvPr/>
+        </p:nvSpPr>
+        <p:spPr>
+          <a:xfrm>
+            <a:off x="822960" y="5138928"/>
             <a:ext cx="10515600" cy="512064"/>
           </a:xfrm>
           <a:prstGeom prst="rect">
@@ -9617,14 +14602,48 @@
       </p:sp>
       <p:sp>
         <p:nvSpPr>
-          <p:cNvPr id="32" name="TextBox 31"/>
+          <p:cNvPr id="23" name="TextBox 22"/>
+          <p:cNvSpPr txBox="1"/>
+          <p:nvPr/>
+        </p:nvSpPr>
+        <p:spPr>
+          <a:xfrm>
+            <a:off x="548640" y="5852160"/>
+            <a:ext cx="10972800" cy="274320"/>
+          </a:xfrm>
+          <a:prstGeom prst="rect">
+            <a:avLst/>
+          </a:prstGeom>
+          <a:noFill/>
+        </p:spPr>
+        <p:txBody>
+          <a:bodyPr wrap="square" anchor="t" lIns="0" rIns="0" tIns="0" bIns="0">
+            <a:spAutoFit/>
+          </a:bodyPr>
+          <a:lstStyle/>
+          <a:p>
+            <a:pPr algn="l"/>
+            <a:r>
+              <a:rPr sz="800" b="0">
+                <a:solidFill>
+                  <a:srgbClr val="5D6B7E"/>
+                </a:solidFill>
+              </a:rPr>
+              <a:t>The tip is the shape of the answer, not the whole answer. Two or three sentences each in the exam.</a:t>
+            </a:r>
+          </a:p>
+        </p:txBody>
+      </p:sp>
+      <p:sp>
+        <p:nvSpPr>
+          <p:cNvPr id="24" name="TextBox 23"/>
           <p:cNvSpPr txBox="1"/>
           <p:nvPr/>
         </p:nvSpPr>
         <p:spPr>
           <a:xfrm>
             <a:off x="548640" y="6473952"/>
-            <a:ext cx="8229600" cy="228600"/>
+            <a:ext cx="7315200" cy="228600"/>
           </a:xfrm>
           <a:prstGeom prst="rect">
             <a:avLst/>
@@ -9644,14 +14663,14 @@
                   <a:srgbClr val="5D6B7E"/>
                 </a:solidFill>
               </a:rPr>
-              <a:t>The tip is the shape of the answer, not the whole answer. Two or three sentences each in the exam.</a:t>
-            </a:r>
-          </a:p>
-        </p:txBody>
-      </p:sp>
-      <p:sp>
-        <p:nvSpPr>
-          <p:cNvPr id="33" name="TextBox 32"/>
+              <a:t>ISBMS · PGDM 2025–27 · AGENTIC AI &amp; ADVANCED ANALYTICS IN FINANCE</a:t>
+            </a:r>
+          </a:p>
+        </p:txBody>
+      </p:sp>
+      <p:sp>
+        <p:nvSpPr>
+          <p:cNvPr id="25" name="TextBox 24"/>
           <p:cNvSpPr txBox="1"/>
           <p:nvPr/>
         </p:nvSpPr>
@@ -9678,7 +14697,7 @@
                   <a:srgbClr val="5D6B7E"/>
                 </a:solidFill>
               </a:rPr>
-              <a:t>MODULE 6  ·  05</a:t>
+              <a:t>MODULE 6  ·  09</a:t>
             </a:r>
           </a:p>
         </p:txBody>

--- a/slides/Module-06-RegTech-Basel-Compliance.pptx
+++ b/slides/Module-06-RegTech-Basel-Compliance.pptx
@@ -11175,7 +11175,7 @@
                 </a:solidFill>
                 <a:latin typeface="Georgia"/>
               </a:rPr>
-              <a:t>One sentence, one Word document, one check</a:t>
+              <a:t>One sentence, eighteen files, one check</a:t>
             </a:r>
           </a:p>
         </p:txBody>
@@ -11313,7 +11313,7 @@
                 </a:solidFill>
                 <a:latin typeface="Georgia"/>
               </a:rPr>
-              <a:t>“Here is a bank's capital, RWA and leverage data in bank_data.json. Compute CET1, Tier 1, total capital, leverage, LCR and NSFR, compare each with the RBI minimum, and write a Pillar 3 disclosure in Word with the DF-2 and DF-18 tables.”</a:t>
+              <a:t>“Here is a bank's Pillar 3 data in bank_data.json, one block per RBI table. Compute the six ratios, check them against what the bank published, and write one Word file per RBI table, DF-1 to DF-18, in filing order, with a filing log.”</a:t>
             </a:r>
           </a:p>
         </p:txBody>
@@ -11468,7 +11468,7 @@
                   <a:srgbClr val="1B2A41"/>
                 </a:solidFill>
               </a:rPr>
-              <a:t>Real data: ICICI Bank's published capital and leverage figures, March 2025</a:t>
+              <a:t>Real data: ICICI Bank's published Pillar 3 figures, one block per table</a:t>
             </a:r>
           </a:p>
         </p:txBody>
@@ -11510,7 +11510,7 @@
                   <a:srgbClr val="1B2A41"/>
                 </a:solidFill>
               </a:rPr>
-              <a:t>Six ratios, each one division</a:t>
+              <a:t>Six ratios, each one division, beside the RBI floor</a:t>
             </a:r>
           </a:p>
         </p:txBody>
@@ -11552,7 +11552,7 @@
                   <a:srgbClr val="1B2A41"/>
                 </a:solidFill>
               </a:rPr>
-              <a:t>Each ratio next to the RBI floor with buffers</a:t>
+              <a:t>One Word file per RBI table, DF-1 to DF-18, written one after another</a:t>
             </a:r>
           </a:p>
         </p:txBody>
@@ -11594,7 +11594,7 @@
                   <a:srgbClr val="1B2A41"/>
                 </a:solidFill>
               </a:rPr>
-              <a:t>A Word document in the RBI table layout, written by python-docx</a:t>
+              <a:t>A filing log, and a stub for any table the data cannot fill</a:t>
             </a:r>
           </a:p>
         </p:txBody>
@@ -11791,7 +11791,7 @@
                   <a:srgbClr val="1B2A41"/>
                 </a:solidFill>
               </a:rPr>
-              <a:t>Your document must land on the same four numbers</a:t>
+              <a:t>Your run must land on the same four, and DF-17 must add up</a:t>
             </a:r>
           </a:p>
         </p:txBody>
@@ -11833,7 +11833,7 @@
                   <a:srgbClr val="1B2A41"/>
                 </a:solidFill>
               </a:rPr>
-              <a:t>A mismatch means a wrong input or a wrong formula</a:t>
+              <a:t>The script checks this before it writes a single file</a:t>
             </a:r>
           </a:p>
         </p:txBody>
@@ -11875,7 +11875,7 @@
                   <a:srgbClr val="1B2A41"/>
                 </a:solidFill>
               </a:rPr>
-              <a:t>A document that does not reconcile is not issued</a:t>
+              <a:t>One mismatch and it stops with nothing filed</a:t>
             </a:r>
           </a:p>
         </p:txBody>
@@ -12030,7 +12030,7 @@
                   <a:srgbClr val="C9D6EE"/>
                 </a:solidFill>
               </a:rPr>
-              <a:t>Swap documents with the next desk</a:t>
+              <a:t>Swap folders with the next desk and open their filing log</a:t>
             </a:r>
           </a:p>
         </p:txBody>
